--- a/誰是文化王_備案簡報_Who_Is_Culture_King.pptx
+++ b/誰是文化王_備案簡報_Who_Is_Culture_King.pptx
@@ -517,12 +517,7 @@
           <a:lstStyle/>
           <a:p>
             <a:r>
-              <a:t>【講師開場引言】</a:t>
-            </a:r>
-          </a:p>
-          <a:p>
-            <a:r>
-              <a:t>歡迎大家來到《誰是文化王》。這是一場結合哈佛商業評論（HBR）《Being the Boss》三大要務與 Erin Meyer 跨文化領導矩陣的實戰競技。今天每一組都將化身跨國整合專案組，面對 4 場海外真實衝突，在 2×2 座標地圖上盲測落點，角逐全場文化王！</a:t>
+              <a:t>【講師開場】歡迎大家來到《誰是文化王》。今天每一組將化身跨國整合專案組，面對 4 場海外真實衝突，在四象限地圖上盲測落點，角逐全場文化王！</a:t>
             </a:r>
           </a:p>
         </p:txBody>
@@ -592,17 +587,7 @@
           <a:lstStyle/>
           <a:p>
             <a:r>
-              <a:t>【計分與覆盤引導】</a:t>
-            </a:r>
-          </a:p>
-          <a:p>
-            <a:r>
-              <a:t>靶心座標為 (22, 24)。請各組計算歐幾里得距離！</a:t>
-            </a:r>
-          </a:p>
-          <a:p>
-            <a:r>
-              <a:t>提問：哪些組別誤判為第二象限（共識決策）？引導學員理解『小 d（小寫 decision）』在矽谷敏捷文化中的真正含義。</a:t>
+              <a:t>【計分引導】靶心座標為 (22, 24)。引導學員理解敏捷文化中的小速決思維。</a:t>
             </a:r>
           </a:p>
         </p:txBody>
@@ -672,22 +657,7 @@
           <a:lstStyle/>
           <a:p>
             <a:r>
-              <a:t>【討論引導提示】</a:t>
-            </a:r>
-          </a:p>
-          <a:p>
-            <a:r>
-              <a:t>請引導學員注意：</a:t>
-            </a:r>
-          </a:p>
-          <a:p>
-            <a:r>
-              <a:t>1. 為什麼技術長不能強行下令放行？</a:t>
-            </a:r>
-          </a:p>
-          <a:p>
-            <a:r>
-              <a:t>2. 商業折扣或高層密室協商在此文化中有用嗎？為什麼？</a:t>
+              <a:t>【引導提示】為什麼技術長不能強推？面對高平等高共識文化，威權與商業收買完全無效。</a:t>
             </a:r>
           </a:p>
         </p:txBody>
@@ -757,17 +727,7 @@
           <a:lstStyle/>
           <a:p>
             <a:r>
-              <a:t>【計分與覆盤引導】</a:t>
-            </a:r>
-          </a:p>
-          <a:p>
-            <a:r>
-              <a:t>靶心座標為 (18, 85)。至此四回合已全部揭曉！</a:t>
-            </a:r>
-          </a:p>
-          <a:p>
-            <a:r>
-              <a:t>請各組加總四輪總積分，算出一至四回合的累積總得分！</a:t>
+              <a:t>【計分引導】靶心座標為 (18, 85)。至此四回合已全部揭曉，請各組加總四輪總積分！</a:t>
             </a:r>
           </a:p>
         </p:txBody>
@@ -837,12 +797,7 @@
           <a:lstStyle/>
           <a:p>
             <a:r>
-              <a:t>【全景總結引導】</a:t>
-            </a:r>
-          </a:p>
-          <a:p>
-            <a:r>
-              <a:t>這張圖是整個工作坊最核心的知識圖譜。建議請學員拍照或存檔。帶領學員快速複習四個象限的國家代表與領導者角色轉換。</a:t>
+              <a:t>這張圖是整個工作坊最核心的知識圖譜，建議請學員拍照或存檔。</a:t>
             </a:r>
           </a:p>
         </p:txBody>
@@ -912,12 +867,7 @@
           <a:lstStyle/>
           <a:p>
             <a:r>
-              <a:t>【大 D 與小 d 的案例】</a:t>
-            </a:r>
-          </a:p>
-          <a:p>
-            <a:r>
-              <a:t>舉 Erin Meyer 書中德美合作的經典例子：美國大老闆開會喊『We have a decision!』，德國工程師通宵寫進規格書，三天後美國老闆說『我們換個方向』，德國團隊差點全員罷工！只要在會後加上一句宣告，就能省下數百萬美元的誤解成本。</a:t>
+              <a:t>跨國管理最大的災難是用同一個詞彙卻懷抱完全不同的心理預期。</a:t>
             </a:r>
           </a:p>
         </p:txBody>
@@ -987,12 +937,7 @@
           <a:lstStyle/>
           <a:p>
             <a:r>
-              <a:t>【回歸核心領導力】</a:t>
-            </a:r>
-          </a:p>
-          <a:p>
-            <a:r>
-              <a:t>Linda Hill 與 Kent Lineback 在《Being the Boss》強調：管理自己是基礎，管理網絡是槓桿，打造團隊是成果。跨文化環境放大了這三大要務的張力，唯有持續反思自我、經營網絡並賦能團隊，才能成為卓越的領導者。</a:t>
+              <a:t>管理自己是基礎，管理網絡是槓桿，打造團隊是成果。</a:t>
             </a:r>
           </a:p>
         </p:txBody>
@@ -1062,12 +1007,7 @@
           <a:lstStyle/>
           <a:p>
             <a:r>
-              <a:t>【結尾頒獎詞】</a:t>
-            </a:r>
-          </a:p>
-          <a:p>
-            <a:r>
-              <a:t>請講師統計各組總分，邀請冠軍組別起立接受全場鼓掌，頒發象徵性的文化王榮譽，並邀請冠軍組代表用一句話分享今天最深刻的跨文化頓悟！</a:t>
+              <a:t>請講師統計各組總分，邀請冠軍組別起立接受全場鼓掌，頒發象徵性的文化王榮譽！</a:t>
             </a:r>
           </a:p>
         </p:txBody>
@@ -1137,12 +1077,7 @@
           <a:lstStyle/>
           <a:p>
             <a:r>
-              <a:t>【引導重點】</a:t>
-            </a:r>
-          </a:p>
-          <a:p>
-            <a:r>
-              <a:t>向學員強調：X 軸是『權力與距離』，Y 軸是『速度與共識』。很多人常誤以為『平等＝一定會共識』或『階層＝一定由上而下』，但這恰恰是跨國管理最大的盲點！例如日本是『高階層 × 高共識』，而美國是『平等 × 由上而下』。</a:t>
+              <a:t>向學員強調：X 軸是『權力與距離』，Y 軸是『速度與共識』。跨國管理最大的盲點就是誤以為平等一定共識、階層一定獨裁。</a:t>
             </a:r>
           </a:p>
         </p:txBody>
@@ -1212,12 +1147,7 @@
           <a:lstStyle/>
           <a:p>
             <a:r>
-              <a:t>【象限圖解說明】</a:t>
-            </a:r>
-          </a:p>
-          <a:p>
-            <a:r>
-              <a:t>請引導學員注意這張圖的四個角落。接下來的 4 個實戰案例，將會平均分散在這 4 個象限中。各組需要仔細觀察案例中的線索，判斷該情境究竟屬於哪一個象限！</a:t>
+              <a:t>引導學員注意這張圖的四個角落，接下來的 4 個實戰案例分別座落在這 4 個象限中。</a:t>
             </a:r>
           </a:p>
         </p:txBody>
@@ -1287,12 +1217,7 @@
           <a:lstStyle/>
           <a:p>
             <a:r>
-              <a:t>【實體操作指引】</a:t>
-            </a:r>
-          </a:p>
-          <a:p>
-            <a:r>
-              <a:t>請發給每組一張白紙，請每組畫出 2×2 十字軸，標記 0~100。每題討論結束後，請各組隊長在紙上寫下他們決定的 (X, Y) 座標並高舉亮出！</a:t>
+              <a:t>請各組隊長在紙上寫下他們決定的 (X, Y) 座標並高舉亮出！</a:t>
             </a:r>
           </a:p>
         </p:txBody>
@@ -1362,22 +1287,7 @@
           <a:lstStyle/>
           <a:p>
             <a:r>
-              <a:t>【討論引導提示】</a:t>
-            </a:r>
-          </a:p>
-          <a:p>
-            <a:r>
-              <a:t>請引導學員注意兩大線索：</a:t>
-            </a:r>
-          </a:p>
-          <a:p>
-            <a:r>
-              <a:t>1. 為什麼總工在會上不反對，會後卻完全不動？</a:t>
-            </a:r>
-          </a:p>
-          <a:p>
-            <a:r>
-              <a:t>2. 為什麼總工要嚴懲直接寫信給你的年輕工程師？這反映了什麼樣的權力距離與決策程序？</a:t>
+              <a:t>【引導提示】為什麼總工會上不反對會後不動？為什麼總工要嚴懲越級寫信的年輕工程師？</a:t>
             </a:r>
           </a:p>
         </p:txBody>
@@ -1447,17 +1357,7 @@
           <a:lstStyle/>
           <a:p>
             <a:r>
-              <a:t>【計分與覆盤引導】</a:t>
-            </a:r>
-          </a:p>
-          <a:p>
-            <a:r>
-              <a:t>靶心座標為 (78, 82)。請各組計算本組座標與 (78, 82) 的距離 d = √[(X-78)² + (Y-82)²]，得分為 100 - d！</a:t>
-            </a:r>
-          </a:p>
-          <a:p>
-            <a:r>
-              <a:t>重點詢問：哪些組別誤判落入左側（平等主義）或下方（由上而下）？為什麼會產生這種誤判？</a:t>
+              <a:t>【計分引導】靶心座標為 (78, 82)。請計算距離 d = √[(X-78)² + (Y-82)²]，得分為 100 - d。</a:t>
             </a:r>
           </a:p>
         </p:txBody>
@@ -1527,12 +1427,7 @@
           <a:lstStyle/>
           <a:p>
             <a:r>
-              <a:t>【討論引導提示】</a:t>
-            </a:r>
-          </a:p>
-          <a:p>
-            <a:r>
-              <a:t>請引導學員思考：為什麼大家都在爭吵『誰該負全責』？為什麼領班說『沒明確裁示沒人敢動手』？此時如果要求大家坐下來開會凝聚共識，會發生什麼事？</a:t>
+              <a:t>【引導提示】為什麼領班說『沒明確裁示沒人敢動手』？危機時刻要求共識會引發什麼反效果？</a:t>
             </a:r>
           </a:p>
         </p:txBody>
@@ -1602,17 +1497,7 @@
           <a:lstStyle/>
           <a:p>
             <a:r>
-              <a:t>【計分與覆盤引導】</a:t>
-            </a:r>
-          </a:p>
-          <a:p>
-            <a:r>
-              <a:t>靶心座標為 (84, 18)。請各組計算與靶心的歐幾里得距離！</a:t>
-            </a:r>
-          </a:p>
-          <a:p>
-            <a:r>
-              <a:t>提問：哪些組別在第二輪誤選了共識決策（Y &gt; 50）？在交期剩 4 小時的工廠危機中，為什麼尋求全員共識反而是災難？</a:t>
+              <a:t>【計分引導】靶心座標為 (84, 18)。交期只剩 4 小時的危機中，尋求共識會被視為卸責。</a:t>
             </a:r>
           </a:p>
         </p:txBody>
@@ -1682,22 +1567,7 @@
           <a:lstStyle/>
           <a:p>
             <a:r>
-              <a:t>【討論引導提示】</a:t>
-            </a:r>
-          </a:p>
-          <a:p>
-            <a:r>
-              <a:t>請引導學員注意：</a:t>
-            </a:r>
-          </a:p>
-          <a:p>
-            <a:r>
-              <a:t>1. 年輕工程師敢直接當眾推翻主管，權力距離是高還是低？</a:t>
-            </a:r>
-          </a:p>
-          <a:p>
-            <a:r>
-              <a:t>2. 團隊崇尚『先上線、有問題再動態修正（小 d）』，這究竟是由上而下敏捷決策，還是全員耗時大共識？</a:t>
+              <a:t>【引導提示】年輕人敢當面挑戰主管反映極低權力距離；先上線有問題再修補反映小 d 速決思維。</a:t>
             </a:r>
           </a:p>
         </p:txBody>
@@ -4838,7 +4708,7 @@
               </a:defRPr>
             </a:pPr>
             <a:r>
-              <a:t>WORKSHOP BACKUP DECK</a:t>
+              <a:t>工作坊備用簡報</a:t>
             </a:r>
           </a:p>
         </p:txBody>
@@ -4920,7 +4790,7 @@
               </a:defRPr>
             </a:pPr>
             <a:r>
-              <a:t>WHO IS THE CULTURE KING · Cross-Cultural Decision &amp; Persuasion Arena</a:t>
+              <a:t>誰是文化王 · 跨文化決策與說服競技場</a:t>
             </a:r>
           </a:p>
           <a:p>
@@ -4932,7 +4802,7 @@
               </a:defRPr>
             </a:pPr>
             <a:r>
-              <a:t>當線上連線受限或學員離線時，本簡報提供 100% 完整的四象限盲測情境、實體便利貼插旗機制、歐幾里得距離計分法與 HBR 經典案例覆盤。</a:t>
+              <a:t>結合四格漫畫實境、四象限落點盲測、歐幾里得距離計分法與經典案例深度覆盤。</a:t>
             </a:r>
           </a:p>
         </p:txBody>
@@ -5148,7 +5018,7 @@
               </a:defRPr>
             </a:pPr>
             <a:r>
-              <a:t>📚 HBR Linda Hill 領導矩陣</a:t>
+              <a:t>📚 哈佛商業評論 組織領導矩陣</a:t>
             </a:r>
           </a:p>
         </p:txBody>
@@ -5222,8 +5092,8 @@
         </p:nvSpPr>
         <p:spPr>
           <a:xfrm>
-            <a:off x="731520" y="411480"/>
-            <a:ext cx="10698480" cy="320040"/>
+            <a:off x="731520" y="365760"/>
+            <a:ext cx="10698480" cy="274320"/>
           </a:xfrm>
           <a:prstGeom prst="rect">
             <a:avLst/>
@@ -5244,7 +5114,7 @@
               </a:defRPr>
             </a:pPr>
             <a:r>
-              <a:t>ROUND 3 · VERDICT &amp; HBR DEEP DIVE</a:t>
+              <a:t>第三回合 · 答案揭曉與文獻深度解析</a:t>
             </a:r>
           </a:p>
         </p:txBody>
@@ -5257,8 +5127,8 @@
         </p:nvSpPr>
         <p:spPr>
           <a:xfrm>
-            <a:off x="731520" y="685800"/>
-            <a:ext cx="10698480" cy="594360"/>
+            <a:off x="731520" y="621792"/>
+            <a:ext cx="10698480" cy="548640"/>
           </a:xfrm>
           <a:prstGeom prst="rect">
             <a:avLst/>
@@ -5279,7 +5149,7 @@
               </a:defRPr>
             </a:pPr>
             <a:r>
-              <a:t>CASE 03 答案揭曉 · 第三象限（左下：X=22, Y=24）</a:t>
+              <a:t>案例三 答案揭曉 · 第三象限（左下：橫軸 22，縱軸 24）</a:t>
             </a:r>
           </a:p>
         </p:txBody>
@@ -5292,8 +5162,114 @@
         </p:nvSpPr>
         <p:spPr>
           <a:xfrm>
-            <a:off x="731520" y="1554480"/>
-            <a:ext cx="2194560" cy="2194560"/>
+            <a:off x="731520" y="1234440"/>
+            <a:ext cx="4114800" cy="5120640"/>
+          </a:xfrm>
+          <a:prstGeom prst="roundRect">
+            <a:avLst/>
+          </a:prstGeom>
+          <a:solidFill>
+            <a:srgbClr val="1E3A8A"/>
+          </a:solidFill>
+          <a:ln>
+            <a:noFill/>
+          </a:ln>
+        </p:spPr>
+        <p:style>
+          <a:lnRef idx="1">
+            <a:schemeClr val="accent1"/>
+          </a:lnRef>
+          <a:fillRef idx="3">
+            <a:schemeClr val="accent1"/>
+          </a:fillRef>
+          <a:effectRef idx="2">
+            <a:schemeClr val="accent1"/>
+          </a:effectRef>
+          <a:fontRef idx="minor">
+            <a:schemeClr val="lt1"/>
+          </a:fontRef>
+        </p:style>
+        <p:txBody>
+          <a:bodyPr rtlCol="0" anchor="ctr" wrap="square" lIns="228600" rIns="228600" tIns="320040"/>
+          <a:lstStyle/>
+          <a:p>
+            <a:pPr algn="ctr">
+              <a:defRPr sz="1500" b="1">
+                <a:solidFill>
+                  <a:srgbClr val="BFDBFE"/>
+                </a:solidFill>
+              </a:defRPr>
+            </a:pPr>
+            <a:r>
+              <a:t>正確答案（左下）</a:t>
+            </a:r>
+          </a:p>
+          <a:p>
+            <a:pPr algn="ctr">
+              <a:defRPr sz="3600" b="1">
+                <a:solidFill>
+                  <a:srgbClr val="FFFFFF"/>
+                </a:solidFill>
+              </a:defRPr>
+            </a:pPr>
+            <a:r>
+              <a:t>第三象限</a:t>
+            </a:r>
+          </a:p>
+          <a:p>
+            <a:pPr algn="ctr">
+              <a:defRPr sz="1600" b="1">
+                <a:solidFill>
+                  <a:srgbClr val="FEF3C7"/>
+                </a:solidFill>
+              </a:defRPr>
+            </a:pPr>
+            <a:r>
+              <a:t>平等主義 × 由上而下速決</a:t>
+            </a:r>
+          </a:p>
+          <a:p>
+            <a:pPr algn="ctr">
+              <a:spcBef>
+                <a:spcPts val="600"/>
+              </a:spcBef>
+              <a:defRPr sz="1200">
+                <a:solidFill>
+                  <a:srgbClr val="E2E8F0"/>
+                </a:solidFill>
+              </a:defRPr>
+            </a:pPr>
+            <a:r>
+              <a:t>🎯 靶心座標：(22, 24)</a:t>
+            </a:r>
+          </a:p>
+          <a:p>
+            <a:pPr algn="ctr">
+              <a:spcBef>
+                <a:spcPts val="800"/>
+              </a:spcBef>
+              <a:defRPr sz="1500" b="1">
+                <a:solidFill>
+                  <a:srgbClr val="FACC15"/>
+                </a:solidFill>
+              </a:defRPr>
+            </a:pPr>
+            <a:r>
+              <a:t>選對組別 + 100 分</a:t>
+            </a:r>
+          </a:p>
+        </p:txBody>
+      </p:sp>
+      <p:sp>
+        <p:nvSpPr>
+          <p:cNvPr id="6" name="Rounded Rectangle 5"/>
+          <p:cNvSpPr/>
+          <p:nvPr/>
+        </p:nvSpPr>
+        <p:spPr>
+          <a:xfrm>
+            <a:off x="1645920" y="4114800"/>
+            <a:ext cx="1051560" cy="1051560"/>
           </a:xfrm>
           <a:prstGeom prst="roundRect">
             <a:avLst/>
@@ -5326,7 +5302,7 @@
           <a:lstStyle/>
           <a:p>
             <a:pPr algn="ctr">
-              <a:defRPr sz="1100" b="1">
+              <a:defRPr sz="1000" b="1">
                 <a:solidFill>
                   <a:srgbClr val="1E293B"/>
                 </a:solidFill>
@@ -5338,7 +5314,7 @@
           </a:p>
           <a:p>
             <a:pPr algn="ctr">
-              <a:defRPr sz="1000">
+              <a:defRPr sz="900">
                 <a:solidFill>
                   <a:srgbClr val="475569"/>
                 </a:solidFill>
@@ -5348,30 +5324,18 @@
               <a:t>共識決策 × 平等主義</a:t>
             </a:r>
           </a:p>
-          <a:p>
-            <a:pPr algn="ctr">
-              <a:defRPr sz="950">
-                <a:solidFill>
-                  <a:srgbClr val="D97706"/>
-                </a:solidFill>
-              </a:defRPr>
-            </a:pPr>
-            <a:r>
-              <a:t>【荷蘭 Polder / 北歐】</a:t>
-            </a:r>
-          </a:p>
-        </p:txBody>
-      </p:sp>
-      <p:sp>
-        <p:nvSpPr>
-          <p:cNvPr id="6" name="Rounded Rectangle 5"/>
+        </p:txBody>
+      </p:sp>
+      <p:sp>
+        <p:nvSpPr>
+          <p:cNvPr id="7" name="Rounded Rectangle 6"/>
           <p:cNvSpPr/>
           <p:nvPr/>
         </p:nvSpPr>
         <p:spPr>
           <a:xfrm>
-            <a:off x="2926080" y="1554480"/>
-            <a:ext cx="2194560" cy="2194560"/>
+            <a:off x="2697480" y="4114800"/>
+            <a:ext cx="1051560" cy="1051560"/>
           </a:xfrm>
           <a:prstGeom prst="roundRect">
             <a:avLst/>
@@ -5404,7 +5368,7 @@
           <a:lstStyle/>
           <a:p>
             <a:pPr algn="ctr">
-              <a:defRPr sz="1100" b="1">
+              <a:defRPr sz="1000" b="1">
                 <a:solidFill>
                   <a:srgbClr val="1E293B"/>
                 </a:solidFill>
@@ -5416,7 +5380,7 @@
           </a:p>
           <a:p>
             <a:pPr algn="ctr">
-              <a:defRPr sz="1000">
+              <a:defRPr sz="900">
                 <a:solidFill>
                   <a:srgbClr val="475569"/>
                 </a:solidFill>
@@ -5426,30 +5390,18 @@
               <a:t>共識決策 × 階層制</a:t>
             </a:r>
           </a:p>
-          <a:p>
-            <a:pPr algn="ctr">
-              <a:defRPr sz="950">
-                <a:solidFill>
-                  <a:srgbClr val="D97706"/>
-                </a:solidFill>
-              </a:defRPr>
-            </a:pPr>
-            <a:r>
-              <a:t>【日本根回 / 稟議】</a:t>
-            </a:r>
-          </a:p>
-        </p:txBody>
-      </p:sp>
-      <p:sp>
-        <p:nvSpPr>
-          <p:cNvPr id="7" name="Rounded Rectangle 6"/>
+        </p:txBody>
+      </p:sp>
+      <p:sp>
+        <p:nvSpPr>
+          <p:cNvPr id="8" name="Rounded Rectangle 7"/>
           <p:cNvSpPr/>
           <p:nvPr/>
         </p:nvSpPr>
         <p:spPr>
           <a:xfrm>
-            <a:off x="731520" y="3749040"/>
-            <a:ext cx="2194560" cy="2194560"/>
+            <a:off x="1645920" y="5166360"/>
+            <a:ext cx="1051560" cy="1051560"/>
           </a:xfrm>
           <a:prstGeom prst="roundRect">
             <a:avLst/>
@@ -5482,7 +5434,7 @@
           <a:lstStyle/>
           <a:p>
             <a:pPr algn="ctr">
-              <a:defRPr sz="1100" b="1">
+              <a:defRPr sz="1000" b="1">
                 <a:solidFill>
                   <a:srgbClr val="1E293B"/>
                 </a:solidFill>
@@ -5494,7 +5446,7 @@
           </a:p>
           <a:p>
             <a:pPr algn="ctr">
-              <a:defRPr sz="1000">
+              <a:defRPr sz="900">
                 <a:solidFill>
                   <a:srgbClr val="475569"/>
                 </a:solidFill>
@@ -5504,30 +5456,18 @@
               <a:t>由上而下 × 平等主義</a:t>
             </a:r>
           </a:p>
-          <a:p>
-            <a:pPr algn="ctr">
-              <a:defRPr sz="950">
-                <a:solidFill>
-                  <a:srgbClr val="D97706"/>
-                </a:solidFill>
-              </a:defRPr>
-            </a:pPr>
-            <a:r>
-              <a:t>【矽谷敏捷 / 小 d】</a:t>
-            </a:r>
-          </a:p>
-        </p:txBody>
-      </p:sp>
-      <p:sp>
-        <p:nvSpPr>
-          <p:cNvPr id="8" name="Rounded Rectangle 7"/>
+        </p:txBody>
+      </p:sp>
+      <p:sp>
+        <p:nvSpPr>
+          <p:cNvPr id="9" name="Rounded Rectangle 8"/>
           <p:cNvSpPr/>
           <p:nvPr/>
         </p:nvSpPr>
         <p:spPr>
           <a:xfrm>
-            <a:off x="2926080" y="3749040"/>
-            <a:ext cx="2194560" cy="2194560"/>
+            <a:off x="2697480" y="5166360"/>
+            <a:ext cx="1051560" cy="1051560"/>
           </a:xfrm>
           <a:prstGeom prst="roundRect">
             <a:avLst/>
@@ -5560,7 +5500,7 @@
           <a:lstStyle/>
           <a:p>
             <a:pPr algn="ctr">
-              <a:defRPr sz="1100" b="1">
+              <a:defRPr sz="1000" b="1">
                 <a:solidFill>
                   <a:srgbClr val="1E293B"/>
                 </a:solidFill>
@@ -5572,7 +5512,7 @@
           </a:p>
           <a:p>
             <a:pPr algn="ctr">
-              <a:defRPr sz="1000">
+              <a:defRPr sz="900">
                 <a:solidFill>
                   <a:srgbClr val="475569"/>
                 </a:solidFill>
@@ -5582,100 +5522,18 @@
               <a:t>由上而下 × 階層制</a:t>
             </a:r>
           </a:p>
-          <a:p>
-            <a:pPr algn="ctr">
-              <a:defRPr sz="950">
-                <a:solidFill>
-                  <a:srgbClr val="D97706"/>
-                </a:solidFill>
-              </a:defRPr>
-            </a:pPr>
-            <a:r>
-              <a:t>【中國/法國/導演模式】</a:t>
-            </a:r>
-          </a:p>
-        </p:txBody>
-      </p:sp>
-      <p:sp>
-        <p:nvSpPr>
-          <p:cNvPr id="9" name="TextBox 8"/>
-          <p:cNvSpPr txBox="1"/>
-          <p:nvPr/>
-        </p:nvSpPr>
-        <p:spPr>
-          <a:xfrm>
-            <a:off x="731520" y="1234440"/>
-            <a:ext cx="4389120" cy="274320"/>
-          </a:xfrm>
-          <a:prstGeom prst="rect">
-            <a:avLst/>
-          </a:prstGeom>
-          <a:noFill/>
-        </p:spPr>
-        <p:txBody>
-          <a:bodyPr wrap="none" lIns="0" tIns="0" rIns="0" bIns="0">
-            <a:spAutoFit/>
-          </a:bodyPr>
-          <a:lstStyle/>
-          <a:p>
-            <a:pPr algn="ctr">
-              <a:defRPr sz="950" b="1">
-                <a:solidFill>
-                  <a:srgbClr val="0284C7"/>
-                </a:solidFill>
-              </a:defRPr>
-            </a:pPr>
-            <a:r>
-              <a:t>▲ 共識型決策 Consensual (Y: 100)</a:t>
-            </a:r>
-          </a:p>
-        </p:txBody>
-      </p:sp>
-      <p:sp>
-        <p:nvSpPr>
-          <p:cNvPr id="10" name="TextBox 9"/>
-          <p:cNvSpPr txBox="1"/>
-          <p:nvPr/>
-        </p:nvSpPr>
-        <p:spPr>
-          <a:xfrm>
-            <a:off x="731520" y="5989320"/>
-            <a:ext cx="4389120" cy="274320"/>
-          </a:xfrm>
-          <a:prstGeom prst="rect">
-            <a:avLst/>
-          </a:prstGeom>
-          <a:noFill/>
-        </p:spPr>
-        <p:txBody>
-          <a:bodyPr wrap="none" lIns="0" tIns="0" rIns="0" bIns="0">
-            <a:spAutoFit/>
-          </a:bodyPr>
-          <a:lstStyle/>
-          <a:p>
-            <a:pPr algn="ctr">
-              <a:defRPr sz="900" b="1">
-                <a:solidFill>
-                  <a:srgbClr val="64748B"/>
-                </a:solidFill>
-              </a:defRPr>
-            </a:pPr>
-            <a:r>
-              <a:t>◀ 平等主義 (X:0)   ▼ 由上而下 (Y:0)   階層制 (X:100) ▶</a:t>
-            </a:r>
-          </a:p>
-        </p:txBody>
-      </p:sp>
-      <p:sp>
-        <p:nvSpPr>
-          <p:cNvPr id="11" name="Oval 10"/>
+        </p:txBody>
+      </p:sp>
+      <p:sp>
+        <p:nvSpPr>
+          <p:cNvPr id="10" name="Oval 9"/>
           <p:cNvSpPr/>
           <p:nvPr/>
         </p:nvSpPr>
         <p:spPr>
           <a:xfrm>
-            <a:off x="1569110" y="4762195"/>
-            <a:ext cx="256032" cy="256032"/>
+            <a:off x="1998878" y="5603443"/>
+            <a:ext cx="219456" cy="219456"/>
           </a:xfrm>
           <a:prstGeom prst="ellipse">
             <a:avLst/>
@@ -5683,7 +5541,7 @@
           <a:solidFill>
             <a:srgbClr val="DC2626"/>
           </a:solidFill>
-          <a:ln w="25400">
+          <a:ln w="19050">
             <a:solidFill>
               <a:srgbClr val="FFFFFF"/>
             </a:solidFill>
@@ -5713,49 +5571,14 @@
       </p:sp>
       <p:sp>
         <p:nvSpPr>
-          <p:cNvPr id="12" name="TextBox 11"/>
-          <p:cNvSpPr txBox="1"/>
-          <p:nvPr/>
-        </p:nvSpPr>
-        <p:spPr>
-          <a:xfrm>
-            <a:off x="965606" y="5054803"/>
-            <a:ext cx="1463040" cy="320040"/>
-          </a:xfrm>
-          <a:prstGeom prst="rect">
-            <a:avLst/>
-          </a:prstGeom>
-          <a:noFill/>
-        </p:spPr>
-        <p:txBody>
-          <a:bodyPr wrap="none" lIns="0" tIns="0" rIns="0" bIns="0">
-            <a:spAutoFit/>
-          </a:bodyPr>
-          <a:lstStyle/>
-          <a:p>
-            <a:pPr algn="ctr">
-              <a:defRPr sz="1000" b="1">
-                <a:solidFill>
-                  <a:srgbClr val="DC2626"/>
-                </a:solidFill>
-              </a:defRPr>
-            </a:pPr>
-            <a:r>
-              <a:t>🎯 靶心 (22, 24)</a:t>
-            </a:r>
-          </a:p>
-        </p:txBody>
-      </p:sp>
-      <p:sp>
-        <p:nvSpPr>
-          <p:cNvPr id="13" name="Rounded Rectangle 12"/>
+          <p:cNvPr id="11" name="Rounded Rectangle 10"/>
           <p:cNvSpPr/>
           <p:nvPr/>
         </p:nvSpPr>
         <p:spPr>
           <a:xfrm>
-            <a:off x="5486400" y="1371600"/>
-            <a:ext cx="5973775" cy="4937760"/>
+            <a:off x="5029200" y="1234440"/>
+            <a:ext cx="6430975" cy="5120640"/>
           </a:xfrm>
           <a:prstGeom prst="roundRect">
             <a:avLst/>
@@ -5784,107 +5607,109 @@
           </a:fontRef>
         </p:style>
         <p:txBody>
-          <a:bodyPr rtlCol="0" anchor="ctr" wrap="square" lIns="274320" tIns="274320" rIns="274320"/>
+          <a:bodyPr rtlCol="0" anchor="ctr" wrap="square" lIns="365760" rIns="365760" tIns="411480"/>
           <a:lstStyle/>
           <a:p>
             <a:pPr algn="ctr">
+              <a:defRPr sz="1900" b="1">
+                <a:solidFill>
+                  <a:srgbClr val="1E293B"/>
+                </a:solidFill>
+              </a:defRPr>
+            </a:pPr>
+            <a:r>
+              <a:t>文獻理論依據與決策盲點解析</a:t>
+            </a:r>
+          </a:p>
+          <a:p>
+            <a:pPr>
+              <a:spcBef>
+                <a:spcPts val="1800"/>
+              </a:spcBef>
               <a:defRPr sz="1600" b="1">
                 <a:solidFill>
-                  <a:srgbClr val="059669"/>
-                </a:solidFill>
-              </a:defRPr>
-            </a:pPr>
-            <a:r>
-              <a:t>🎯 真實最佳座標：第三象限（左下 X:22, Y:24）</a:t>
-            </a:r>
-          </a:p>
-          <a:p>
-            <a:pPr>
-              <a:defRPr sz="1200" b="1">
-                <a:solidFill>
                   <a:srgbClr val="1E293B"/>
                 </a:solidFill>
               </a:defRPr>
             </a:pPr>
             <a:r>
-              <a:t>判定特質：低權力距離（平等主義）× 由上而下敏捷速決（小 d 模式）</a:t>
-            </a:r>
-            <a:br/>
-          </a:p>
-          <a:p>
-            <a:pPr>
-              <a:defRPr b="1" sz="1150">
+              <a:t>文化特徵：</a:t>
+            </a:r>
+          </a:p>
+          <a:p>
+            <a:pPr>
+              <a:lnSpc>
+                <a:spcPct val="135000"/>
+              </a:lnSpc>
+              <a:defRPr sz="1300">
+                <a:solidFill>
+                  <a:srgbClr val="475569"/>
+                </a:solidFill>
+              </a:defRPr>
+            </a:pPr>
+            <a:r>
+              <a:t>矽谷敏捷試錯模式，組織極度扁平，決策採小寫 d 快速推進與動態修補。</a:t>
+            </a:r>
+          </a:p>
+          <a:p>
+            <a:pPr>
+              <a:spcBef>
+                <a:spcPts val="1800"/>
+              </a:spcBef>
+              <a:defRPr sz="1600" b="1">
                 <a:solidFill>
                   <a:srgbClr val="1E293B"/>
                 </a:solidFill>
               </a:defRPr>
             </a:pPr>
             <a:r>
-              <a:t>• 文獻理論原型：美國矽谷與英國團隊的「小 d」模式</a:t>
-            </a:r>
-          </a:p>
-          <a:p>
-            <a:pPr>
-              <a:defRPr sz="1000">
+              <a:t>管理盲點：</a:t>
+            </a:r>
+          </a:p>
+          <a:p>
+            <a:pPr>
+              <a:lnSpc>
+                <a:spcPct val="135000"/>
+              </a:lnSpc>
+              <a:defRPr sz="1300">
                 <a:solidFill>
                   <a:srgbClr val="475569"/>
                 </a:solidFill>
               </a:defRPr>
             </a:pPr>
             <a:r>
-              <a:t>組織展現典型第三象限特質（低權力距離 X: 22 × 由上而下速決 Y: 24）。年輕人敢當面挑戰主管反映極低權力距離；而習慣先上線事後修正正是文獻定義的「小寫 d（little-d）」決策。</a:t>
-            </a:r>
-            <a:br/>
-          </a:p>
-          <a:p>
-            <a:pPr>
-              <a:defRPr b="1" sz="1150">
+              <a:t>若開馬拉松會議追求完美共識，會被視為官僚、保守且缺乏魄力與市場速度。</a:t>
+            </a:r>
+          </a:p>
+          <a:p>
+            <a:pPr>
+              <a:spcBef>
+                <a:spcPts val="1800"/>
+              </a:spcBef>
+              <a:defRPr sz="1600" b="1">
                 <a:solidFill>
                   <a:srgbClr val="1E293B"/>
                 </a:solidFill>
               </a:defRPr>
             </a:pPr>
             <a:r>
-              <a:t>• 常見管理盲點覆盤</a:t>
-            </a:r>
-          </a:p>
-          <a:p>
-            <a:pPr>
-              <a:defRPr sz="1000">
+              <a:t>正確對策：</a:t>
+            </a:r>
+          </a:p>
+          <a:p>
+            <a:pPr>
+              <a:lnSpc>
+                <a:spcPct val="135000"/>
+              </a:lnSpc>
+              <a:defRPr sz="1300">
                 <a:solidFill>
                   <a:srgbClr val="475569"/>
                 </a:solidFill>
               </a:defRPr>
             </a:pPr>
             <a:r>
-              <a:t>亞洲或歐陸主管容易誤以為「大家都贊成＝要尋求 100% 共識」，因而召開跨日馬拉松會議。但在矽谷敏捷文化中，速度重於完美，過度尋求共識會被視為官僚且缺乏魄力。</a:t>
-            </a:r>
-            <a:br/>
-          </a:p>
-          <a:p>
-            <a:pPr>
-              <a:defRPr b="1" sz="1150">
-                <a:solidFill>
-                  <a:srgbClr val="1E293B"/>
-                </a:solidFill>
-              </a:defRPr>
-            </a:pPr>
-            <a:r>
-              <a:t>• 卓越領導者的因地制宜行動</a:t>
-            </a:r>
-          </a:p>
-          <a:p>
-            <a:pPr>
-              <a:defRPr sz="1000">
-                <a:solidFill>
-                  <a:srgbClr val="475569"/>
-                </a:solidFill>
-              </a:defRPr>
-            </a:pPr>
-            <a:r>
-              <a:t>鼓勵成員平等暢所欲言，肯定創新熱情；但領導者應迅速拍板明確規則（如先採用 10% 灰度發布或沙盒測試），保留敏捷 Hotfix 彈性，迅速推進！</a:t>
-            </a:r>
-            <a:br/>
+              <a:t>肯定創新熱情並迅速拍板小規模試跑（如灰度發布），保留後續動態修補彈性。</a:t>
+            </a:r>
           </a:p>
         </p:txBody>
       </p:sp>
@@ -5957,8 +5782,8 @@
         </p:nvSpPr>
         <p:spPr>
           <a:xfrm>
-            <a:off x="731520" y="411480"/>
-            <a:ext cx="10698480" cy="320040"/>
+            <a:off x="731520" y="365760"/>
+            <a:ext cx="10698480" cy="274320"/>
           </a:xfrm>
           <a:prstGeom prst="rect">
             <a:avLst/>
@@ -5979,7 +5804,7 @@
               </a:defRPr>
             </a:pPr>
             <a:r>
-              <a:t>ROUND 4 · SCENARIO CHALLENGE</a:t>
+              <a:t>第四回合 · 情境挑戰</a:t>
             </a:r>
           </a:p>
         </p:txBody>
@@ -5992,8 +5817,8 @@
         </p:nvSpPr>
         <p:spPr>
           <a:xfrm>
-            <a:off x="731520" y="685800"/>
-            <a:ext cx="10698480" cy="594360"/>
+            <a:off x="731520" y="621792"/>
+            <a:ext cx="10698480" cy="548640"/>
           </a:xfrm>
           <a:prstGeom prst="rect">
             <a:avLst/>
@@ -6014,7 +5839,7 @@
               </a:defRPr>
             </a:pPr>
             <a:r>
-              <a:t>CASE 04 · 首發登台前兩小時的極限攤牌</a:t>
+              <a:t>案例四 · 首發登台前兩小時的極限攤牌</a:t>
             </a:r>
           </a:p>
         </p:txBody>
@@ -6027,8 +5852,8 @@
         </p:nvSpPr>
         <p:spPr>
           <a:xfrm>
-            <a:off x="731520" y="1371600"/>
-            <a:ext cx="6217920" cy="3931920"/>
+            <a:off x="676656" y="1179576"/>
+            <a:ext cx="4453128" cy="4453128"/>
           </a:xfrm>
           <a:prstGeom prst="roundRect">
             <a:avLst/>
@@ -6057,72 +5882,47 @@
           </a:fontRef>
         </p:style>
         <p:txBody>
-          <a:bodyPr rtlCol="0" anchor="ctr" wrap="square" lIns="274320" tIns="274320" rIns="274320"/>
-          <a:lstStyle/>
-          <a:p>
-            <a:pPr algn="ctr">
-              <a:defRPr sz="1400" b="1">
-                <a:solidFill>
-                  <a:srgbClr val="4F46E5"/>
-                </a:solidFill>
-              </a:defRPr>
-            </a:pPr>
-            <a:r>
-              <a:t>📍 地點：全球首發 · Delta 戰略客戶攤牌現場</a:t>
-            </a:r>
-          </a:p>
-          <a:p>
-            <a:pPr>
-              <a:defRPr sz="1200">
-                <a:solidFill>
-                  <a:srgbClr val="1E293B"/>
-                </a:solidFill>
-              </a:defRPr>
-            </a:pPr>
-            <a:r>
-              <a:t>【衝突現場】</a:t>
-            </a:r>
-            <a:br/>
-            <a:r>
-              <a:t>全球發表會倒數最後兩小時，最大戰略客戶端技術長帶著兩名年輕的基層測試員走進後台休息室，將一份「極端低溫訊號衰減報告」放在桌上。</a:t>
-            </a:r>
-          </a:p>
-          <a:p>
-            <a:pPr>
-              <a:defRPr sz="1200">
-                <a:solidFill>
-                  <a:srgbClr val="1E293B"/>
-                </a:solidFill>
-              </a:defRPr>
-            </a:pPr>
-            <a:r>
-              <a:t>客戶方年輕的基層測試員直接直視你說：「在我們的團隊裡，每位技術人員都有權為安全把關。我們不在乎你的職銜高低或商業賠償金，這份數據如果不由雙方所有工程師坐下來公開透明共同審核並達成一致協議，我們不會簽署放行。」</a:t>
-            </a:r>
-          </a:p>
-          <a:p>
-            <a:pPr>
-              <a:defRPr sz="1200">
-                <a:solidFill>
-                  <a:srgbClr val="1E293B"/>
-                </a:solidFill>
-              </a:defRPr>
-            </a:pPr>
-            <a:r>
-              <a:t>後台總部高層催促立刻強硬反擊，但客戶技術長表示自己無權違背測試團隊的專業否決權。</a:t>
-            </a:r>
-          </a:p>
-        </p:txBody>
-      </p:sp>
-      <p:sp>
-        <p:nvSpPr>
-          <p:cNvPr id="6" name="Rounded Rectangle 5"/>
+          <a:bodyPr rtlCol="0" anchor="ctr"/>
+          <a:lstStyle/>
+          <a:p>
+            <a:pPr algn="ctr"/>
+          </a:p>
+        </p:txBody>
+      </p:sp>
+      <p:pic>
+        <p:nvPicPr>
+          <p:cNvPr id="6" name="Picture 5" descr="case4_delta.png"/>
+          <p:cNvPicPr>
+            <a:picLocks noChangeAspect="1"/>
+          </p:cNvPicPr>
+          <p:nvPr/>
+        </p:nvPicPr>
+        <p:blipFill>
+          <a:blip r:embed="rId2"/>
+          <a:stretch>
+            <a:fillRect/>
+          </a:stretch>
+        </p:blipFill>
+        <p:spPr>
+          <a:xfrm>
+            <a:off x="731520" y="1234440"/>
+            <a:ext cx="4343400" cy="4343400"/>
+          </a:xfrm>
+          <a:prstGeom prst="rect">
+            <a:avLst/>
+          </a:prstGeom>
+        </p:spPr>
+      </p:pic>
+      <p:sp>
+        <p:nvSpPr>
+          <p:cNvPr id="7" name="Rounded Rectangle 6"/>
           <p:cNvSpPr/>
           <p:nvPr/>
         </p:nvSpPr>
         <p:spPr>
           <a:xfrm>
-            <a:off x="7132320" y="1371600"/>
-            <a:ext cx="4327855" cy="3931920"/>
+            <a:off x="5303520" y="1234440"/>
+            <a:ext cx="6156655" cy="3429000"/>
           </a:xfrm>
           <a:prstGeom prst="roundRect">
             <a:avLst/>
@@ -6132,7 +5932,7 @@
           </a:solidFill>
           <a:ln w="19050">
             <a:solidFill>
-              <a:srgbClr val="4F46E5"/>
+              <a:srgbClr val="E2E8F0"/>
             </a:solidFill>
           </a:ln>
         </p:spPr>
@@ -6151,34 +5951,40 @@
           </a:fontRef>
         </p:style>
         <p:txBody>
-          <a:bodyPr rtlCol="0" anchor="ctr" wrap="square" lIns="228600" tIns="228600" rIns="228600"/>
+          <a:bodyPr rtlCol="0" anchor="ctr" wrap="square" lIns="256032" rIns="256032" tIns="182880"/>
           <a:lstStyle/>
           <a:p>
             <a:pPr algn="ctr">
-              <a:defRPr sz="1400" b="1">
-                <a:solidFill>
-                  <a:srgbClr val="4F46E5"/>
-                </a:solidFill>
-              </a:defRPr>
-            </a:pPr>
-            <a:r>
-              <a:t>🎙️ 現場真實對白錄音</a:t>
-            </a:r>
-          </a:p>
-          <a:p>
-            <a:pPr>
-              <a:defRPr b="1" sz="1100">
+              <a:defRPr sz="1300" b="1">
+                <a:solidFill>
+                  <a:srgbClr val="0284C7"/>
+                </a:solidFill>
+              </a:defRPr>
+            </a:pPr>
+            <a:r>
+              <a:t>📍 全球首發 · 戰略客戶攤牌現場</a:t>
+            </a:r>
+          </a:p>
+          <a:p>
+            <a:pPr>
+              <a:spcBef>
+                <a:spcPts val="600"/>
+              </a:spcBef>
+              <a:defRPr sz="1100" b="1">
                 <a:solidFill>
                   <a:srgbClr val="1E293B"/>
                 </a:solidFill>
               </a:defRPr>
             </a:pPr>
             <a:r>
-              <a:t>• 客戶基層測試員</a:t>
-            </a:r>
-          </a:p>
-          <a:p>
-            <a:pPr>
+              <a:t>【後台突發】</a:t>
+            </a:r>
+          </a:p>
+          <a:p>
+            <a:pPr>
+              <a:lnSpc>
+                <a:spcPct val="125000"/>
+              </a:lnSpc>
               <a:defRPr sz="1050">
                 <a:solidFill>
                   <a:srgbClr val="475569"/>
@@ -6186,24 +5992,29 @@
               </a:defRPr>
             </a:pPr>
             <a:r>
-              <a:t>「沒有經得起檢驗的品質承諾與全員透明共審，誰敢為發表會背書？任何私下妥協我們一概不認！」</a:t>
-            </a:r>
-            <a:br/>
-          </a:p>
-          <a:p>
-            <a:pPr>
-              <a:defRPr b="1" sz="1100">
+              <a:t>全球發表會倒數 02:00:00，最大客戶技術長帶著兩名年輕測試員突然直接走進後台。</a:t>
+            </a:r>
+          </a:p>
+          <a:p>
+            <a:pPr>
+              <a:spcBef>
+                <a:spcPts val="600"/>
+              </a:spcBef>
+              <a:defRPr sz="1100" b="1">
                 <a:solidFill>
                   <a:srgbClr val="1E293B"/>
                 </a:solidFill>
               </a:defRPr>
             </a:pPr>
             <a:r>
-              <a:t>• 客戶技術長</a:t>
-            </a:r>
-          </a:p>
-          <a:p>
-            <a:pPr>
+              <a:t>【報告攤牌】</a:t>
+            </a:r>
+          </a:p>
+          <a:p>
+            <a:pPr>
+              <a:lnSpc>
+                <a:spcPct val="125000"/>
+              </a:lnSpc>
               <a:defRPr sz="1050">
                 <a:solidFill>
                   <a:srgbClr val="475569"/>
@@ -6211,24 +6022,29 @@
               </a:defRPr>
             </a:pPr>
             <a:r>
-              <a:t>「在我們國家，技術長的職稱不能壓過數據與基層專業。我必須尊重他們的否決權。」</a:t>
-            </a:r>
-            <a:br/>
-          </a:p>
-          <a:p>
-            <a:pPr>
-              <a:defRPr b="1" sz="1100">
+              <a:t>啪！測試員將「極端低溫環境訊號衰減報告」拍在桌上！</a:t>
+            </a:r>
+          </a:p>
+          <a:p>
+            <a:pPr>
+              <a:spcBef>
+                <a:spcPts val="600"/>
+              </a:spcBef>
+              <a:defRPr sz="1100" b="1">
                 <a:solidFill>
                   <a:srgbClr val="1E293B"/>
                 </a:solidFill>
               </a:defRPr>
             </a:pPr>
             <a:r>
-              <a:t>• 總部高層私訊</a:t>
-            </a:r>
-          </a:p>
-          <a:p>
-            <a:pPr>
+              <a:t>【基層聲明】</a:t>
+            </a:r>
+          </a:p>
+          <a:p>
+            <a:pPr>
+              <a:lnSpc>
+                <a:spcPct val="125000"/>
+              </a:lnSpc>
               <a:defRPr sz="1050">
                 <a:solidFill>
                   <a:srgbClr val="475569"/>
@@ -6236,22 +6052,51 @@
               </a:defRPr>
             </a:pPr>
             <a:r>
-              <a:t>「市場開盤在即，能不能給他們主管商業折扣讓他們先簽字放行？」</a:t>
-            </a:r>
-            <a:br/>
-          </a:p>
-        </p:txBody>
-      </p:sp>
-      <p:sp>
-        <p:nvSpPr>
-          <p:cNvPr id="7" name="Rounded Rectangle 6"/>
+              <a:t>年輕測試員：「在我們團隊裡，每位技術員都有權為安全把關，我們不在乎你的職銜或賠償金。」</a:t>
+            </a:r>
+          </a:p>
+          <a:p>
+            <a:pPr>
+              <a:spcBef>
+                <a:spcPts val="600"/>
+              </a:spcBef>
+              <a:defRPr sz="1100" b="1">
+                <a:solidFill>
+                  <a:srgbClr val="1E293B"/>
+                </a:solidFill>
+              </a:defRPr>
+            </a:pPr>
+            <a:r>
+              <a:t>【拒絕妥協】</a:t>
+            </a:r>
+          </a:p>
+          <a:p>
+            <a:pPr>
+              <a:lnSpc>
+                <a:spcPct val="125000"/>
+              </a:lnSpc>
+              <a:defRPr sz="1050">
+                <a:solidFill>
+                  <a:srgbClr val="475569"/>
+                </a:solidFill>
+              </a:defRPr>
+            </a:pPr>
+            <a:r>
+              <a:t>「若非雙方工程師公開透明共同審核並達成一致協議，我們絕不簽署放行同意書！」</a:t>
+            </a:r>
+          </a:p>
+        </p:txBody>
+      </p:sp>
+      <p:sp>
+        <p:nvSpPr>
+          <p:cNvPr id="8" name="Rounded Rectangle 7"/>
           <p:cNvSpPr/>
           <p:nvPr/>
         </p:nvSpPr>
         <p:spPr>
           <a:xfrm>
-            <a:off x="731520" y="5486400"/>
-            <a:ext cx="10728655" cy="868680"/>
+            <a:off x="5303520" y="4800600"/>
+            <a:ext cx="6156655" cy="868680"/>
           </a:xfrm>
           <a:prstGeom prst="roundRect">
             <a:avLst/>
@@ -6278,18 +6123,18 @@
           </a:fontRef>
         </p:style>
         <p:txBody>
-          <a:bodyPr rtlCol="0" anchor="ctr" wrap="square"/>
+          <a:bodyPr rtlCol="0" anchor="ctr" wrap="square" lIns="228600" rIns="228600" tIns="137160"/>
           <a:lstStyle/>
           <a:p>
             <a:pPr algn="ctr">
-              <a:defRPr sz="1300" b="1">
+              <a:defRPr sz="1200" b="1">
                 <a:solidFill>
                   <a:srgbClr val="FEF3C7"/>
                 </a:solidFill>
               </a:defRPr>
             </a:pPr>
             <a:r>
-              <a:t>⏱️ 小組任務（倒數 3 分鐘）：面對基層專業人員擁有絕對否決權、堅持全員透明共審的團隊，領導座標應落在哪裡？</a:t>
+              <a:t>⏱️ 決策課題：面對基層擁有完全否決權、堅持透明共審的團隊，你的領導決策座標應落在哪裡？</a:t>
             </a:r>
           </a:p>
         </p:txBody>
@@ -6363,8 +6208,8 @@
         </p:nvSpPr>
         <p:spPr>
           <a:xfrm>
-            <a:off x="731520" y="411480"/>
-            <a:ext cx="10698480" cy="320040"/>
+            <a:off x="731520" y="365760"/>
+            <a:ext cx="10698480" cy="274320"/>
           </a:xfrm>
           <a:prstGeom prst="rect">
             <a:avLst/>
@@ -6385,7 +6230,7 @@
               </a:defRPr>
             </a:pPr>
             <a:r>
-              <a:t>ROUND 4 · VERDICT &amp; HBR DEEP DIVE</a:t>
+              <a:t>第四回合 · 答案揭曉與文獻深度解析</a:t>
             </a:r>
           </a:p>
         </p:txBody>
@@ -6398,8 +6243,8 @@
         </p:nvSpPr>
         <p:spPr>
           <a:xfrm>
-            <a:off x="731520" y="685800"/>
-            <a:ext cx="10698480" cy="594360"/>
+            <a:off x="731520" y="621792"/>
+            <a:ext cx="10698480" cy="548640"/>
           </a:xfrm>
           <a:prstGeom prst="rect">
             <a:avLst/>
@@ -6420,7 +6265,7 @@
               </a:defRPr>
             </a:pPr>
             <a:r>
-              <a:t>CASE 04 答案揭曉 · 第二象限（左上：X=18, Y=85）</a:t>
+              <a:t>案例四 答案揭曉 · 第二象限（左上：橫軸 18，縱軸 85）</a:t>
             </a:r>
           </a:p>
         </p:txBody>
@@ -6433,8 +6278,114 @@
         </p:nvSpPr>
         <p:spPr>
           <a:xfrm>
-            <a:off x="731520" y="1554480"/>
-            <a:ext cx="2194560" cy="2194560"/>
+            <a:off x="731520" y="1234440"/>
+            <a:ext cx="4114800" cy="5120640"/>
+          </a:xfrm>
+          <a:prstGeom prst="roundRect">
+            <a:avLst/>
+          </a:prstGeom>
+          <a:solidFill>
+            <a:srgbClr val="1E3A8A"/>
+          </a:solidFill>
+          <a:ln>
+            <a:noFill/>
+          </a:ln>
+        </p:spPr>
+        <p:style>
+          <a:lnRef idx="1">
+            <a:schemeClr val="accent1"/>
+          </a:lnRef>
+          <a:fillRef idx="3">
+            <a:schemeClr val="accent1"/>
+          </a:fillRef>
+          <a:effectRef idx="2">
+            <a:schemeClr val="accent1"/>
+          </a:effectRef>
+          <a:fontRef idx="minor">
+            <a:schemeClr val="lt1"/>
+          </a:fontRef>
+        </p:style>
+        <p:txBody>
+          <a:bodyPr rtlCol="0" anchor="ctr" wrap="square" lIns="228600" rIns="228600" tIns="320040"/>
+          <a:lstStyle/>
+          <a:p>
+            <a:pPr algn="ctr">
+              <a:defRPr sz="1500" b="1">
+                <a:solidFill>
+                  <a:srgbClr val="BFDBFE"/>
+                </a:solidFill>
+              </a:defRPr>
+            </a:pPr>
+            <a:r>
+              <a:t>正確答案（左上）</a:t>
+            </a:r>
+          </a:p>
+          <a:p>
+            <a:pPr algn="ctr">
+              <a:defRPr sz="3600" b="1">
+                <a:solidFill>
+                  <a:srgbClr val="FFFFFF"/>
+                </a:solidFill>
+              </a:defRPr>
+            </a:pPr>
+            <a:r>
+              <a:t>第二象限</a:t>
+            </a:r>
+          </a:p>
+          <a:p>
+            <a:pPr algn="ctr">
+              <a:defRPr sz="1600" b="1">
+                <a:solidFill>
+                  <a:srgbClr val="FEF3C7"/>
+                </a:solidFill>
+              </a:defRPr>
+            </a:pPr>
+            <a:r>
+              <a:t>平等主義 × 共識型決策</a:t>
+            </a:r>
+          </a:p>
+          <a:p>
+            <a:pPr algn="ctr">
+              <a:spcBef>
+                <a:spcPts val="600"/>
+              </a:spcBef>
+              <a:defRPr sz="1200">
+                <a:solidFill>
+                  <a:srgbClr val="E2E8F0"/>
+                </a:solidFill>
+              </a:defRPr>
+            </a:pPr>
+            <a:r>
+              <a:t>🎯 靶心座標：(18, 85)</a:t>
+            </a:r>
+          </a:p>
+          <a:p>
+            <a:pPr algn="ctr">
+              <a:spcBef>
+                <a:spcPts val="800"/>
+              </a:spcBef>
+              <a:defRPr sz="1500" b="1">
+                <a:solidFill>
+                  <a:srgbClr val="FACC15"/>
+                </a:solidFill>
+              </a:defRPr>
+            </a:pPr>
+            <a:r>
+              <a:t>選對組別 + 100 分</a:t>
+            </a:r>
+          </a:p>
+        </p:txBody>
+      </p:sp>
+      <p:sp>
+        <p:nvSpPr>
+          <p:cNvPr id="6" name="Rounded Rectangle 5"/>
+          <p:cNvSpPr/>
+          <p:nvPr/>
+        </p:nvSpPr>
+        <p:spPr>
+          <a:xfrm>
+            <a:off x="1645920" y="4114800"/>
+            <a:ext cx="1051560" cy="1051560"/>
           </a:xfrm>
           <a:prstGeom prst="roundRect">
             <a:avLst/>
@@ -6467,7 +6418,7 @@
           <a:lstStyle/>
           <a:p>
             <a:pPr algn="ctr">
-              <a:defRPr sz="1100" b="1">
+              <a:defRPr sz="1000" b="1">
                 <a:solidFill>
                   <a:srgbClr val="1E293B"/>
                 </a:solidFill>
@@ -6479,7 +6430,7 @@
           </a:p>
           <a:p>
             <a:pPr algn="ctr">
-              <a:defRPr sz="1000">
+              <a:defRPr sz="900">
                 <a:solidFill>
                   <a:srgbClr val="475569"/>
                 </a:solidFill>
@@ -6489,30 +6440,18 @@
               <a:t>共識決策 × 平等主義</a:t>
             </a:r>
           </a:p>
-          <a:p>
-            <a:pPr algn="ctr">
-              <a:defRPr sz="950">
-                <a:solidFill>
-                  <a:srgbClr val="D97706"/>
-                </a:solidFill>
-              </a:defRPr>
-            </a:pPr>
-            <a:r>
-              <a:t>【荷蘭 Polder / 北歐】</a:t>
-            </a:r>
-          </a:p>
-        </p:txBody>
-      </p:sp>
-      <p:sp>
-        <p:nvSpPr>
-          <p:cNvPr id="6" name="Rounded Rectangle 5"/>
+        </p:txBody>
+      </p:sp>
+      <p:sp>
+        <p:nvSpPr>
+          <p:cNvPr id="7" name="Rounded Rectangle 6"/>
           <p:cNvSpPr/>
           <p:nvPr/>
         </p:nvSpPr>
         <p:spPr>
           <a:xfrm>
-            <a:off x="2926080" y="1554480"/>
-            <a:ext cx="2194560" cy="2194560"/>
+            <a:off x="2697480" y="4114800"/>
+            <a:ext cx="1051560" cy="1051560"/>
           </a:xfrm>
           <a:prstGeom prst="roundRect">
             <a:avLst/>
@@ -6545,7 +6484,7 @@
           <a:lstStyle/>
           <a:p>
             <a:pPr algn="ctr">
-              <a:defRPr sz="1100" b="1">
+              <a:defRPr sz="1000" b="1">
                 <a:solidFill>
                   <a:srgbClr val="1E293B"/>
                 </a:solidFill>
@@ -6557,7 +6496,7 @@
           </a:p>
           <a:p>
             <a:pPr algn="ctr">
-              <a:defRPr sz="1000">
+              <a:defRPr sz="900">
                 <a:solidFill>
                   <a:srgbClr val="475569"/>
                 </a:solidFill>
@@ -6567,30 +6506,18 @@
               <a:t>共識決策 × 階層制</a:t>
             </a:r>
           </a:p>
-          <a:p>
-            <a:pPr algn="ctr">
-              <a:defRPr sz="950">
-                <a:solidFill>
-                  <a:srgbClr val="D97706"/>
-                </a:solidFill>
-              </a:defRPr>
-            </a:pPr>
-            <a:r>
-              <a:t>【日本根回 / 稟議】</a:t>
-            </a:r>
-          </a:p>
-        </p:txBody>
-      </p:sp>
-      <p:sp>
-        <p:nvSpPr>
-          <p:cNvPr id="7" name="Rounded Rectangle 6"/>
+        </p:txBody>
+      </p:sp>
+      <p:sp>
+        <p:nvSpPr>
+          <p:cNvPr id="8" name="Rounded Rectangle 7"/>
           <p:cNvSpPr/>
           <p:nvPr/>
         </p:nvSpPr>
         <p:spPr>
           <a:xfrm>
-            <a:off x="731520" y="3749040"/>
-            <a:ext cx="2194560" cy="2194560"/>
+            <a:off x="1645920" y="5166360"/>
+            <a:ext cx="1051560" cy="1051560"/>
           </a:xfrm>
           <a:prstGeom prst="roundRect">
             <a:avLst/>
@@ -6623,7 +6550,7 @@
           <a:lstStyle/>
           <a:p>
             <a:pPr algn="ctr">
-              <a:defRPr sz="1100" b="1">
+              <a:defRPr sz="1000" b="1">
                 <a:solidFill>
                   <a:srgbClr val="1E293B"/>
                 </a:solidFill>
@@ -6635,7 +6562,7 @@
           </a:p>
           <a:p>
             <a:pPr algn="ctr">
-              <a:defRPr sz="1000">
+              <a:defRPr sz="900">
                 <a:solidFill>
                   <a:srgbClr val="475569"/>
                 </a:solidFill>
@@ -6645,30 +6572,18 @@
               <a:t>由上而下 × 平等主義</a:t>
             </a:r>
           </a:p>
-          <a:p>
-            <a:pPr algn="ctr">
-              <a:defRPr sz="950">
-                <a:solidFill>
-                  <a:srgbClr val="D97706"/>
-                </a:solidFill>
-              </a:defRPr>
-            </a:pPr>
-            <a:r>
-              <a:t>【矽谷敏捷 / 小 d】</a:t>
-            </a:r>
-          </a:p>
-        </p:txBody>
-      </p:sp>
-      <p:sp>
-        <p:nvSpPr>
-          <p:cNvPr id="8" name="Rounded Rectangle 7"/>
+        </p:txBody>
+      </p:sp>
+      <p:sp>
+        <p:nvSpPr>
+          <p:cNvPr id="9" name="Rounded Rectangle 8"/>
           <p:cNvSpPr/>
           <p:nvPr/>
         </p:nvSpPr>
         <p:spPr>
           <a:xfrm>
-            <a:off x="2926080" y="3749040"/>
-            <a:ext cx="2194560" cy="2194560"/>
+            <a:off x="2697480" y="5166360"/>
+            <a:ext cx="1051560" cy="1051560"/>
           </a:xfrm>
           <a:prstGeom prst="roundRect">
             <a:avLst/>
@@ -6701,7 +6616,7 @@
           <a:lstStyle/>
           <a:p>
             <a:pPr algn="ctr">
-              <a:defRPr sz="1100" b="1">
+              <a:defRPr sz="1000" b="1">
                 <a:solidFill>
                   <a:srgbClr val="1E293B"/>
                 </a:solidFill>
@@ -6713,7 +6628,7 @@
           </a:p>
           <a:p>
             <a:pPr algn="ctr">
-              <a:defRPr sz="1000">
+              <a:defRPr sz="900">
                 <a:solidFill>
                   <a:srgbClr val="475569"/>
                 </a:solidFill>
@@ -6723,100 +6638,18 @@
               <a:t>由上而下 × 階層制</a:t>
             </a:r>
           </a:p>
-          <a:p>
-            <a:pPr algn="ctr">
-              <a:defRPr sz="950">
-                <a:solidFill>
-                  <a:srgbClr val="D97706"/>
-                </a:solidFill>
-              </a:defRPr>
-            </a:pPr>
-            <a:r>
-              <a:t>【中國/法國/導演模式】</a:t>
-            </a:r>
-          </a:p>
-        </p:txBody>
-      </p:sp>
-      <p:sp>
-        <p:nvSpPr>
-          <p:cNvPr id="9" name="TextBox 8"/>
-          <p:cNvSpPr txBox="1"/>
-          <p:nvPr/>
-        </p:nvSpPr>
-        <p:spPr>
-          <a:xfrm>
-            <a:off x="731520" y="1234440"/>
-            <a:ext cx="4389120" cy="274320"/>
-          </a:xfrm>
-          <a:prstGeom prst="rect">
-            <a:avLst/>
-          </a:prstGeom>
-          <a:noFill/>
-        </p:spPr>
-        <p:txBody>
-          <a:bodyPr wrap="none" lIns="0" tIns="0" rIns="0" bIns="0">
-            <a:spAutoFit/>
-          </a:bodyPr>
-          <a:lstStyle/>
-          <a:p>
-            <a:pPr algn="ctr">
-              <a:defRPr sz="950" b="1">
-                <a:solidFill>
-                  <a:srgbClr val="0284C7"/>
-                </a:solidFill>
-              </a:defRPr>
-            </a:pPr>
-            <a:r>
-              <a:t>▲ 共識型決策 Consensual (Y: 100)</a:t>
-            </a:r>
-          </a:p>
-        </p:txBody>
-      </p:sp>
-      <p:sp>
-        <p:nvSpPr>
-          <p:cNvPr id="10" name="TextBox 9"/>
-          <p:cNvSpPr txBox="1"/>
-          <p:nvPr/>
-        </p:nvSpPr>
-        <p:spPr>
-          <a:xfrm>
-            <a:off x="731520" y="5989320"/>
-            <a:ext cx="4389120" cy="274320"/>
-          </a:xfrm>
-          <a:prstGeom prst="rect">
-            <a:avLst/>
-          </a:prstGeom>
-          <a:noFill/>
-        </p:spPr>
-        <p:txBody>
-          <a:bodyPr wrap="none" lIns="0" tIns="0" rIns="0" bIns="0">
-            <a:spAutoFit/>
-          </a:bodyPr>
-          <a:lstStyle/>
-          <a:p>
-            <a:pPr algn="ctr">
-              <a:defRPr sz="900" b="1">
-                <a:solidFill>
-                  <a:srgbClr val="64748B"/>
-                </a:solidFill>
-              </a:defRPr>
-            </a:pPr>
-            <a:r>
-              <a:t>◀ 平等主義 (X:0)   ▼ 由上而下 (Y:0)   階層制 (X:100) ▶</a:t>
-            </a:r>
-          </a:p>
-        </p:txBody>
-      </p:sp>
-      <p:sp>
-        <p:nvSpPr>
-          <p:cNvPr id="11" name="Oval 10"/>
+        </p:txBody>
+      </p:sp>
+      <p:sp>
+        <p:nvSpPr>
+          <p:cNvPr id="10" name="Oval 9"/>
           <p:cNvSpPr/>
           <p:nvPr/>
         </p:nvSpPr>
         <p:spPr>
           <a:xfrm>
-            <a:off x="1393545" y="2084832"/>
-            <a:ext cx="256032" cy="256032"/>
+            <a:off x="1914753" y="4320540"/>
+            <a:ext cx="219456" cy="219456"/>
           </a:xfrm>
           <a:prstGeom prst="ellipse">
             <a:avLst/>
@@ -6824,7 +6657,7 @@
           <a:solidFill>
             <a:srgbClr val="DC2626"/>
           </a:solidFill>
-          <a:ln w="25400">
+          <a:ln w="19050">
             <a:solidFill>
               <a:srgbClr val="FFFFFF"/>
             </a:solidFill>
@@ -6854,49 +6687,14 @@
       </p:sp>
       <p:sp>
         <p:nvSpPr>
-          <p:cNvPr id="12" name="TextBox 11"/>
-          <p:cNvSpPr txBox="1"/>
-          <p:nvPr/>
-        </p:nvSpPr>
-        <p:spPr>
-          <a:xfrm>
-            <a:off x="790041" y="2377440"/>
-            <a:ext cx="1463040" cy="320040"/>
-          </a:xfrm>
-          <a:prstGeom prst="rect">
-            <a:avLst/>
-          </a:prstGeom>
-          <a:noFill/>
-        </p:spPr>
-        <p:txBody>
-          <a:bodyPr wrap="none" lIns="0" tIns="0" rIns="0" bIns="0">
-            <a:spAutoFit/>
-          </a:bodyPr>
-          <a:lstStyle/>
-          <a:p>
-            <a:pPr algn="ctr">
-              <a:defRPr sz="1000" b="1">
-                <a:solidFill>
-                  <a:srgbClr val="DC2626"/>
-                </a:solidFill>
-              </a:defRPr>
-            </a:pPr>
-            <a:r>
-              <a:t>🎯 靶心 (18, 85)</a:t>
-            </a:r>
-          </a:p>
-        </p:txBody>
-      </p:sp>
-      <p:sp>
-        <p:nvSpPr>
-          <p:cNvPr id="13" name="Rounded Rectangle 12"/>
+          <p:cNvPr id="11" name="Rounded Rectangle 10"/>
           <p:cNvSpPr/>
           <p:nvPr/>
         </p:nvSpPr>
         <p:spPr>
           <a:xfrm>
-            <a:off x="5486400" y="1371600"/>
-            <a:ext cx="5973775" cy="4937760"/>
+            <a:off x="5029200" y="1234440"/>
+            <a:ext cx="6430975" cy="5120640"/>
           </a:xfrm>
           <a:prstGeom prst="roundRect">
             <a:avLst/>
@@ -6925,107 +6723,109 @@
           </a:fontRef>
         </p:style>
         <p:txBody>
-          <a:bodyPr rtlCol="0" anchor="ctr" wrap="square" lIns="274320" tIns="274320" rIns="274320"/>
+          <a:bodyPr rtlCol="0" anchor="ctr" wrap="square" lIns="365760" rIns="365760" tIns="411480"/>
           <a:lstStyle/>
           <a:p>
             <a:pPr algn="ctr">
+              <a:defRPr sz="1900" b="1">
+                <a:solidFill>
+                  <a:srgbClr val="1E293B"/>
+                </a:solidFill>
+              </a:defRPr>
+            </a:pPr>
+            <a:r>
+              <a:t>文獻理論依據與決策盲點解析</a:t>
+            </a:r>
+          </a:p>
+          <a:p>
+            <a:pPr>
+              <a:spcBef>
+                <a:spcPts val="1800"/>
+              </a:spcBef>
               <a:defRPr sz="1600" b="1">
                 <a:solidFill>
-                  <a:srgbClr val="4F46E5"/>
-                </a:solidFill>
-              </a:defRPr>
-            </a:pPr>
-            <a:r>
-              <a:t>🎯 真實最佳座標：第二象限（左上 X:18, Y:85）</a:t>
-            </a:r>
-          </a:p>
-          <a:p>
-            <a:pPr>
-              <a:defRPr sz="1200" b="1">
-                <a:solidFill>
                   <a:srgbClr val="1E293B"/>
                 </a:solidFill>
               </a:defRPr>
             </a:pPr>
             <a:r>
-              <a:t>判定特質：極低權力距離（平等主義）× 全員透明共識（Consensual 大 D）</a:t>
-            </a:r>
-            <a:br/>
-          </a:p>
-          <a:p>
-            <a:pPr>
-              <a:defRPr b="1" sz="1150">
+              <a:t>文化特徵：</a:t>
+            </a:r>
+          </a:p>
+          <a:p>
+            <a:pPr>
+              <a:lnSpc>
+                <a:spcPct val="135000"/>
+              </a:lnSpc>
+              <a:defRPr sz="1300">
+                <a:solidFill>
+                  <a:srgbClr val="475569"/>
+                </a:solidFill>
+              </a:defRPr>
+            </a:pPr>
+            <a:r>
+              <a:t>荷蘭低地協商模式，基層工程師擁有一票否決權，追求刻在石碑上的神聖大承諾。</a:t>
+            </a:r>
+          </a:p>
+          <a:p>
+            <a:pPr>
+              <a:spcBef>
+                <a:spcPts val="1800"/>
+              </a:spcBef>
+              <a:defRPr sz="1600" b="1">
                 <a:solidFill>
                   <a:srgbClr val="1E293B"/>
                 </a:solidFill>
               </a:defRPr>
             </a:pPr>
             <a:r>
-              <a:t>• 文獻理論原型：荷蘭 Polder Model 與北歐促進者模式</a:t>
-            </a:r>
-          </a:p>
-          <a:p>
-            <a:pPr>
-              <a:defRPr sz="1000">
+              <a:t>管理盲點：</a:t>
+            </a:r>
+          </a:p>
+          <a:p>
+            <a:pPr>
+              <a:lnSpc>
+                <a:spcPct val="135000"/>
+              </a:lnSpc>
+              <a:defRPr sz="1300">
                 <a:solidFill>
                   <a:srgbClr val="475569"/>
                 </a:solidFill>
               </a:defRPr>
             </a:pPr>
             <a:r>
-              <a:t>情境屬於典型第二象限（極低權力距離 X: 18 × 高度共識導向 Y: 85）。基層工程師擁有一票否決權，職位頭銜無特權；堅持全員公開透明審查達成一致，體現神聖「大寫 D」共識承諾。</a:t>
-            </a:r>
-            <a:br/>
-          </a:p>
-          <a:p>
-            <a:pPr>
-              <a:defRPr b="1" sz="1150">
+              <a:t>試圖透過職級施壓或私下利益妥協，會被視為踐踏專業誠信與違背團隊共識。</a:t>
+            </a:r>
+          </a:p>
+          <a:p>
+            <a:pPr>
+              <a:spcBef>
+                <a:spcPts val="1800"/>
+              </a:spcBef>
+              <a:defRPr sz="1600" b="1">
                 <a:solidFill>
                   <a:srgbClr val="1E293B"/>
                 </a:solidFill>
               </a:defRPr>
             </a:pPr>
             <a:r>
-              <a:t>• 常見管理盲點覆盤</a:t>
-            </a:r>
-          </a:p>
-          <a:p>
-            <a:pPr>
-              <a:defRPr sz="1000">
+              <a:t>正確對策：</a:t>
+            </a:r>
+          </a:p>
+          <a:p>
+            <a:pPr>
+              <a:lnSpc>
+                <a:spcPct val="135000"/>
+              </a:lnSpc>
+              <a:defRPr sz="1300">
                 <a:solidFill>
                   <a:srgbClr val="475569"/>
                 </a:solidFill>
               </a:defRPr>
             </a:pPr>
             <a:r>
-              <a:t>傳統主管常試圖「私下搞定對方高層」或「用商業折扣收買」，在北歐或荷蘭文化中，這被視為對專業誠信的嚴重侮辱，會立刻引發信任崩盤。</a:t>
-            </a:r>
-            <a:br/>
-          </a:p>
-          <a:p>
-            <a:pPr>
-              <a:defRPr b="1" sz="1150">
-                <a:solidFill>
-                  <a:srgbClr val="1E293B"/>
-                </a:solidFill>
-              </a:defRPr>
-            </a:pPr>
-            <a:r>
-              <a:t>• 卓越領導者的因地制宜行動</a:t>
-            </a:r>
-          </a:p>
-          <a:p>
-            <a:pPr>
-              <a:defRPr sz="1000">
-                <a:solidFill>
-                  <a:srgbClr val="475569"/>
-                </a:solidFill>
-              </a:defRPr>
-            </a:pPr>
-            <a:r>
-              <a:t>主管必須轉化為「促進者（Facilitator）」，讓雙方工程師平起平坐、攤開數據共同制定方案（例如首波常溫批次交付＋低溫三方共審），以透明共識達成大 D 簽字！</a:t>
-            </a:r>
-            <a:br/>
+              <a:t>主管轉化為中立協調促進者，召集雙方技術人員公開數據、透明共審，凝聚神聖共識。</a:t>
+            </a:r>
           </a:p>
         </p:txBody>
       </p:sp>
@@ -7098,8 +6898,8 @@
         </p:nvSpPr>
         <p:spPr>
           <a:xfrm>
-            <a:off x="731520" y="411480"/>
-            <a:ext cx="10698480" cy="320040"/>
+            <a:off x="731520" y="365760"/>
+            <a:ext cx="10698480" cy="274320"/>
           </a:xfrm>
           <a:prstGeom prst="rect">
             <a:avLst/>
@@ -7120,7 +6920,7 @@
               </a:defRPr>
             </a:pPr>
             <a:r>
-              <a:t>THE COMPLETE CULTURAL SPECTRUM</a:t>
+              <a:t>跨文化決策全景對照表</a:t>
             </a:r>
           </a:p>
         </p:txBody>
@@ -7133,8 +6933,8 @@
         </p:nvSpPr>
         <p:spPr>
           <a:xfrm>
-            <a:off x="731520" y="685800"/>
-            <a:ext cx="10698480" cy="594360"/>
+            <a:off x="731520" y="621792"/>
+            <a:ext cx="10698480" cy="548640"/>
           </a:xfrm>
           <a:prstGeom prst="rect">
             <a:avLst/>
@@ -7258,7 +7058,7 @@
               </a:defRPr>
             </a:pPr>
             <a:r>
-              <a:t>• 領導者角色：整合協調者 (Synthesizer)</a:t>
+              <a:t>• 領導者角色：整合協調者 </a:t>
             </a:r>
           </a:p>
           <a:p>
@@ -7373,7 +7173,7 @@
               </a:defRPr>
             </a:pPr>
             <a:r>
-              <a:t>• 決策機制：Polder Model 大 D</a:t>
+              <a:t>• 決策機制：低地共識協商模式</a:t>
             </a:r>
           </a:p>
           <a:p>
@@ -7385,7 +7185,7 @@
               </a:defRPr>
             </a:pPr>
             <a:r>
-              <a:t>• 領導者角色：中立促進者 (Facilitator)</a:t>
+              <a:t>• 領導者角色：中立促進者 </a:t>
             </a:r>
           </a:p>
           <a:p>
@@ -7512,7 +7312,7 @@
               </a:defRPr>
             </a:pPr>
             <a:r>
-              <a:t>• 領導者角色：方向定舵者 (Steerer)</a:t>
+              <a:t>• 領導者角色：方向定舵者 </a:t>
             </a:r>
           </a:p>
           <a:p>
@@ -7524,7 +7324,7 @@
               </a:defRPr>
             </a:pPr>
             <a:r>
-              <a:t>• 關鍵動作：鼓勵平等暢所欲言，授權主管速決，後續 Hotfix。</a:t>
+              <a:t>• 關鍵動作：鼓勵平等暢所欲言，授權主管速決，後續線上動態修補。</a:t>
             </a:r>
           </a:p>
           <a:p>
@@ -7627,7 +7427,7 @@
               </a:defRPr>
             </a:pPr>
             <a:r>
-              <a:t>• 決策機制：Director 指揮模式</a:t>
+              <a:t>• 決策機制：指揮官指揮模式</a:t>
             </a:r>
           </a:p>
           <a:p>
@@ -7639,7 +7439,7 @@
               </a:defRPr>
             </a:pPr>
             <a:r>
-              <a:t>• 領導者角色：最高指揮官 (Director)</a:t>
+              <a:t>• 領導者角色：最高指揮官 </a:t>
             </a:r>
           </a:p>
           <a:p>
@@ -7737,8 +7537,8 @@
         </p:nvSpPr>
         <p:spPr>
           <a:xfrm>
-            <a:off x="731520" y="411480"/>
-            <a:ext cx="10698480" cy="320040"/>
+            <a:off x="731520" y="365760"/>
+            <a:ext cx="10698480" cy="274320"/>
           </a:xfrm>
           <a:prstGeom prst="rect">
             <a:avLst/>
@@ -7759,7 +7559,7 @@
               </a:defRPr>
             </a:pPr>
             <a:r>
-              <a:t>BIG D VS. LITTLE D</a:t>
+              <a:t>決策哲學辨析</a:t>
             </a:r>
           </a:p>
         </p:txBody>
@@ -7772,8 +7572,8 @@
         </p:nvSpPr>
         <p:spPr>
           <a:xfrm>
-            <a:off x="731520" y="685800"/>
-            <a:ext cx="10698480" cy="594360"/>
+            <a:off x="731520" y="621792"/>
+            <a:ext cx="10698480" cy="548640"/>
           </a:xfrm>
           <a:prstGeom prst="rect">
             <a:avLst/>
@@ -7794,7 +7594,7 @@
               </a:defRPr>
             </a:pPr>
             <a:r>
-              <a:t>核心哲學碰撞：「大寫 D」與「小寫 d」的本質差異</a:t>
+              <a:t>核心哲學碰撞：「大承諾」與「小速決」的本質差異</a:t>
             </a:r>
           </a:p>
         </p:txBody>
@@ -7848,7 +7648,7 @@
               </a:defRPr>
             </a:pPr>
             <a:r>
-              <a:t>🏛️ 大寫 D（Big-D）：刻在石碑上的神聖承諾</a:t>
+              <a:t>🏛️ 大承諾：刻在石碑上的神聖承諾</a:t>
             </a:r>
           </a:p>
           <a:p>
@@ -7860,7 +7660,7 @@
               </a:defRPr>
             </a:pPr>
             <a:r>
-              <a:t>Decision as Final Commitment（日本、德國、荷蘭、北歐）</a:t>
+              <a:t>決策即為終局承諾（日本、德國、荷蘭、北歐各國）</a:t>
             </a:r>
             <a:br/>
           </a:p>
@@ -7965,7 +7765,7 @@
               </a:defRPr>
             </a:pPr>
             <a:r>
-              <a:t>🚀 小寫 d（Little-d）：動態迭代的敏捷里程碑</a:t>
+              <a:t>🚀 小速決：動態迭代的敏捷里程碑</a:t>
             </a:r>
           </a:p>
           <a:p>
@@ -7977,7 +7777,7 @@
               </a:defRPr>
             </a:pPr>
             <a:r>
-              <a:t>decision as Dynamic Milestone（美國矽谷、英國新創）</a:t>
+              <a:t>決策即為動態里程碑（新創與敏捷團隊）</a:t>
             </a:r>
             <a:br/>
           </a:p>
@@ -8080,7 +7880,7 @@
               </a:defRPr>
             </a:pPr>
             <a:r>
-              <a:t>💡 跨國合作解方：導入「D 與 d 雙軌宣告協定」</a:t>
+              <a:t>💡 跨國合作解方：導入雙軌宣告協定</a:t>
             </a:r>
           </a:p>
           <a:p>
@@ -8092,7 +7892,7 @@
               </a:defRPr>
             </a:pPr>
             <a:r>
-              <a:t>跨國管理最大的災難是用同一個英文單字『Decision』，雙方卻懷抱完全不同的心理預期！會議結束前，主持人必須明確宣告：這是不可輕易翻案的「大 D」，還是隨時可調的「小 d」？</a:t>
+              <a:t>跨國管理最大的災難是用同一個詞彙『決策』，雙方卻懷抱完全不同的心理預期！會議結束前，主持人必須明確宣告：這是不可輕易翻案的「大承諾」，還是隨時可調的「小速決」？</a:t>
             </a:r>
           </a:p>
         </p:txBody>
@@ -8166,8 +7966,8 @@
         </p:nvSpPr>
         <p:spPr>
           <a:xfrm>
-            <a:off x="731520" y="411480"/>
-            <a:ext cx="10698480" cy="320040"/>
+            <a:off x="731520" y="365760"/>
+            <a:ext cx="10698480" cy="274320"/>
           </a:xfrm>
           <a:prstGeom prst="rect">
             <a:avLst/>
@@ -8188,7 +7988,7 @@
               </a:defRPr>
             </a:pPr>
             <a:r>
-              <a:t>THE THREE IMPERATIVES</a:t>
+              <a:t>領導三大要務</a:t>
             </a:r>
           </a:p>
         </p:txBody>
@@ -8201,8 +8001,8 @@
         </p:nvSpPr>
         <p:spPr>
           <a:xfrm>
-            <a:off x="731520" y="685800"/>
-            <a:ext cx="10698480" cy="594360"/>
+            <a:off x="731520" y="621792"/>
+            <a:ext cx="10698480" cy="548640"/>
           </a:xfrm>
           <a:prstGeom prst="rect">
             <a:avLst/>
@@ -8223,7 +8023,7 @@
               </a:defRPr>
             </a:pPr>
             <a:r>
-              <a:t>HBR〈Being the Boss〉三大要務：跨文化卓越領導檢核</a:t>
+              <a:t>哈佛商業評論 領導三大要務自我檢核</a:t>
             </a:r>
           </a:p>
         </p:txBody>
@@ -8277,7 +8077,7 @@
               </a:defRPr>
             </a:pPr>
             <a:r>
-              <a:t>要務一：管理自己（Manage Yourself）· 放下文化優越感</a:t>
+              <a:t>要務一：管理自己 · 放下文化優越感</a:t>
             </a:r>
           </a:p>
           <a:p>
@@ -8343,7 +8143,7 @@
               </a:defRPr>
             </a:pPr>
             <a:r>
-              <a:t>要務二：管理網絡（Manage Your Network）· 建立跨邊界同盟</a:t>
+              <a:t>要務二：管理網絡 · 建立跨邊界同盟</a:t>
             </a:r>
           </a:p>
           <a:p>
@@ -8355,7 +8155,7 @@
               </a:defRPr>
             </a:pPr>
             <a:r>
-              <a:t>辨識跨國組織內部的「非正式權力地圖」。在階層制文化中尊重垂直網絡與長幼序位；在平等文化中建立橫向網絡。善用會前「根回（Nemawashi）」，將潛在抗拒者轉化為協作盟友。</a:t>
+              <a:t>辨識跨國組織內部的「非正式權力地圖」。在階層制文化中尊重垂直網絡與長幼序位；在平等文化中建立橫向網絡。善用會前「會前私下摸底（根回）」，將潛在抗拒者轉化為協作盟友。</a:t>
             </a:r>
           </a:p>
         </p:txBody>
@@ -8409,7 +8209,7 @@
               </a:defRPr>
             </a:pPr>
             <a:r>
-              <a:t>要務三：打造團隊（Manage Your Team）· 建立多元心理安全感</a:t>
+              <a:t>要務三：打造團隊 · 建立多元心理安全感</a:t>
             </a:r>
           </a:p>
           <a:p>
@@ -8421,7 +8221,7 @@
               </a:defRPr>
             </a:pPr>
             <a:r>
-              <a:t>建立容許不同發言風格的團隊文化常規（Team Norms）。為習慣沉默的成員打造非正式一對一表達管道，為敏捷直率的成員規範決策界限，將文化衝突轉化為跨國創新的核心競爭力。</a:t>
+              <a:t>建立容許不同發言風格的團隊文化常規（團隊合作常規）。為習慣沉默的成員打造非正式一對一表達管道，為敏捷直率的成員規範決策界限，將文化衝突轉化為跨國創新的核心競爭力。</a:t>
             </a:r>
           </a:p>
         </p:txBody>
@@ -8792,8 +8592,8 @@
         </p:nvSpPr>
         <p:spPr>
           <a:xfrm>
-            <a:off x="731520" y="411480"/>
-            <a:ext cx="10698480" cy="320040"/>
+            <a:off x="731520" y="365760"/>
+            <a:ext cx="10698480" cy="274320"/>
           </a:xfrm>
           <a:prstGeom prst="rect">
             <a:avLst/>
@@ -8814,7 +8614,7 @@
               </a:defRPr>
             </a:pPr>
             <a:r>
-              <a:t>THEORETICAL FOUNDATION</a:t>
+              <a:t>理論基礎：決策維度解析</a:t>
             </a:r>
           </a:p>
         </p:txBody>
@@ -8827,8 +8627,8 @@
         </p:nvSpPr>
         <p:spPr>
           <a:xfrm>
-            <a:off x="731520" y="685800"/>
-            <a:ext cx="10698480" cy="594360"/>
+            <a:off x="731520" y="621792"/>
+            <a:ext cx="10698480" cy="548640"/>
           </a:xfrm>
           <a:prstGeom prst="rect">
             <a:avLst/>
@@ -8915,7 +8715,7 @@
               </a:defRPr>
             </a:pPr>
             <a:r>
-              <a:t>平等主義 (Egalitarian: 0) ↔ 階層制 (Hierarchical: 100)</a:t>
+              <a:t>平等主義 (0) ↔ 階層制 (100)</a:t>
             </a:r>
             <a:br/>
           </a:p>
@@ -8928,7 +8728,7 @@
               </a:defRPr>
             </a:pPr>
             <a:r>
-              <a:t>• 平等主義（Low Power Distance / 0~35）</a:t>
+              <a:t>• 平等主義（0 ~ 35）</a:t>
             </a:r>
           </a:p>
           <a:p>
@@ -8953,7 +8753,7 @@
               </a:defRPr>
             </a:pPr>
             <a:r>
-              <a:t>• 階層制（High Power Distance / 65~100）</a:t>
+              <a:t>• 階層制（65 ~ 100）</a:t>
             </a:r>
           </a:p>
           <a:p>
@@ -9032,7 +8832,7 @@
               </a:defRPr>
             </a:pPr>
             <a:r>
-              <a:t>由上而下速決 (Top-Down: 0) ↔ 全員共識決策 (Consensual: 100)</a:t>
+              <a:t>由上而下速決 (0) ↔ 全員共識決策 (100)</a:t>
             </a:r>
             <a:br/>
           </a:p>
@@ -9045,7 +8845,7 @@
               </a:defRPr>
             </a:pPr>
             <a:r>
-              <a:t>• 由上而下速決（Top-Down / 0~35）</a:t>
+              <a:t>• 由上而下速決（0 ~ 35）</a:t>
             </a:r>
           </a:p>
           <a:p>
@@ -9057,7 +8857,7 @@
               </a:defRPr>
             </a:pPr>
             <a:r>
-              <a:t>決策講求速度與效率。主管聽取意見後迅速拍板（小寫 d 模式）。決策被視為「動態里程碑」，隨時可依新數據敏捷微調（Hotfix）。</a:t>
+              <a:t>決策講求速度與效率。主管聽取意見後迅速拍板（小速決模式）。決策被視為「動態里程碑」，隨時可依新數據敏捷微調。</a:t>
             </a:r>
             <a:br/>
           </a:p>
@@ -9070,7 +8870,7 @@
               </a:defRPr>
             </a:pPr>
             <a:r>
-              <a:t>• 全員共識決策（Consensual / 65~100）</a:t>
+              <a:t>• 全員共識決策（65 ~ 100）</a:t>
             </a:r>
           </a:p>
           <a:p>
@@ -9082,7 +8882,7 @@
               </a:defRPr>
             </a:pPr>
             <a:r>
-              <a:t>追求全員一致同意與深度承諾（大寫 D 模式）。前期花費大量時間會前溝通（根回 Nemawashi），一旦拍板如石碑不可輕易翻案。</a:t>
+              <a:t>追求全員一致同意與深度承諾（大承諾模式）。前期花費大量時間會前溝通摸底，一旦拍板如石碑不可輕易翻案。</a:t>
             </a:r>
             <a:br/>
           </a:p>
@@ -9161,7 +8961,7 @@
               </a:defRPr>
             </a:pPr>
             <a:r>
-              <a:t>💡 跨文化領導的核心啟示：沒有放之四海皆準的領導風格。卓越管理者從不強求團隊改變文化 DNA，而是精準調整自己的決策座標！</a:t>
+              <a:t>💡 跨文化領導的核心啟示：沒有放之四海皆準的領導風格。卓越管理者從不強求團隊改變團隊文化底蘊，而是精準調整自己的決策座標！</a:t>
             </a:r>
           </a:p>
         </p:txBody>
@@ -9235,8 +9035,8 @@
         </p:nvSpPr>
         <p:spPr>
           <a:xfrm>
-            <a:off x="731520" y="411480"/>
-            <a:ext cx="10698480" cy="320040"/>
+            <a:off x="731520" y="365760"/>
+            <a:ext cx="10698480" cy="274320"/>
           </a:xfrm>
           <a:prstGeom prst="rect">
             <a:avLst/>
@@ -9257,7 +9057,7 @@
               </a:defRPr>
             </a:pPr>
             <a:r>
-              <a:t>THE 2X2 CULTURAL MATRIX</a:t>
+              <a:t>四象限決策矩陣</a:t>
             </a:r>
           </a:p>
         </p:txBody>
@@ -9270,8 +9070,8 @@
         </p:nvSpPr>
         <p:spPr>
           <a:xfrm>
-            <a:off x="731520" y="685800"/>
-            <a:ext cx="10698480" cy="594360"/>
+            <a:off x="731520" y="621792"/>
+            <a:ext cx="10698480" cy="548640"/>
           </a:xfrm>
           <a:prstGeom prst="rect">
             <a:avLst/>
@@ -9339,7 +9139,7 @@
           <a:lstStyle/>
           <a:p>
             <a:pPr algn="ctr">
-              <a:defRPr sz="1100" b="1">
+              <a:defRPr sz="1000" b="1">
                 <a:solidFill>
                   <a:srgbClr val="1E293B"/>
                 </a:solidFill>
@@ -9351,7 +9151,7 @@
           </a:p>
           <a:p>
             <a:pPr algn="ctr">
-              <a:defRPr sz="1000">
+              <a:defRPr sz="900">
                 <a:solidFill>
                   <a:srgbClr val="475569"/>
                 </a:solidFill>
@@ -9359,18 +9159,6 @@
             </a:pPr>
             <a:r>
               <a:t>共識決策 × 平等主義</a:t>
-            </a:r>
-          </a:p>
-          <a:p>
-            <a:pPr algn="ctr">
-              <a:defRPr sz="950">
-                <a:solidFill>
-                  <a:srgbClr val="64748B"/>
-                </a:solidFill>
-              </a:defRPr>
-            </a:pPr>
-            <a:r>
-              <a:t>【荷蘭 Polder / 北歐】</a:t>
             </a:r>
           </a:p>
         </p:txBody>
@@ -9417,7 +9205,7 @@
           <a:lstStyle/>
           <a:p>
             <a:pPr algn="ctr">
-              <a:defRPr sz="1100" b="1">
+              <a:defRPr sz="1000" b="1">
                 <a:solidFill>
                   <a:srgbClr val="1E293B"/>
                 </a:solidFill>
@@ -9429,7 +9217,7 @@
           </a:p>
           <a:p>
             <a:pPr algn="ctr">
-              <a:defRPr sz="1000">
+              <a:defRPr sz="900">
                 <a:solidFill>
                   <a:srgbClr val="475569"/>
                 </a:solidFill>
@@ -9437,18 +9225,6 @@
             </a:pPr>
             <a:r>
               <a:t>共識決策 × 階層制</a:t>
-            </a:r>
-          </a:p>
-          <a:p>
-            <a:pPr algn="ctr">
-              <a:defRPr sz="950">
-                <a:solidFill>
-                  <a:srgbClr val="64748B"/>
-                </a:solidFill>
-              </a:defRPr>
-            </a:pPr>
-            <a:r>
-              <a:t>【日本根回 / 稟議】</a:t>
             </a:r>
           </a:p>
         </p:txBody>
@@ -9495,7 +9271,7 @@
           <a:lstStyle/>
           <a:p>
             <a:pPr algn="ctr">
-              <a:defRPr sz="1100" b="1">
+              <a:defRPr sz="1000" b="1">
                 <a:solidFill>
                   <a:srgbClr val="1E293B"/>
                 </a:solidFill>
@@ -9507,7 +9283,7 @@
           </a:p>
           <a:p>
             <a:pPr algn="ctr">
-              <a:defRPr sz="1000">
+              <a:defRPr sz="900">
                 <a:solidFill>
                   <a:srgbClr val="475569"/>
                 </a:solidFill>
@@ -9515,18 +9291,6 @@
             </a:pPr>
             <a:r>
               <a:t>由上而下 × 平等主義</a:t>
-            </a:r>
-          </a:p>
-          <a:p>
-            <a:pPr algn="ctr">
-              <a:defRPr sz="950">
-                <a:solidFill>
-                  <a:srgbClr val="64748B"/>
-                </a:solidFill>
-              </a:defRPr>
-            </a:pPr>
-            <a:r>
-              <a:t>【矽谷敏捷 / 小 d】</a:t>
             </a:r>
           </a:p>
         </p:txBody>
@@ -9573,7 +9337,7 @@
           <a:lstStyle/>
           <a:p>
             <a:pPr algn="ctr">
-              <a:defRPr sz="1100" b="1">
+              <a:defRPr sz="1000" b="1">
                 <a:solidFill>
                   <a:srgbClr val="1E293B"/>
                 </a:solidFill>
@@ -9585,7 +9349,7 @@
           </a:p>
           <a:p>
             <a:pPr algn="ctr">
-              <a:defRPr sz="1000">
+              <a:defRPr sz="900">
                 <a:solidFill>
                   <a:srgbClr val="475569"/>
                 </a:solidFill>
@@ -9595,93 +9359,11 @@
               <a:t>由上而下 × 階層制</a:t>
             </a:r>
           </a:p>
-          <a:p>
-            <a:pPr algn="ctr">
-              <a:defRPr sz="950">
-                <a:solidFill>
-                  <a:srgbClr val="64748B"/>
-                </a:solidFill>
-              </a:defRPr>
-            </a:pPr>
-            <a:r>
-              <a:t>【中國/法國/導演模式】</a:t>
-            </a:r>
-          </a:p>
-        </p:txBody>
-      </p:sp>
-      <p:sp>
-        <p:nvSpPr>
-          <p:cNvPr id="9" name="TextBox 8"/>
-          <p:cNvSpPr txBox="1"/>
-          <p:nvPr/>
-        </p:nvSpPr>
-        <p:spPr>
-          <a:xfrm>
-            <a:off x="731520" y="1234440"/>
-            <a:ext cx="4389120" cy="274320"/>
-          </a:xfrm>
-          <a:prstGeom prst="rect">
-            <a:avLst/>
-          </a:prstGeom>
-          <a:noFill/>
-        </p:spPr>
-        <p:txBody>
-          <a:bodyPr wrap="none" lIns="0" tIns="0" rIns="0" bIns="0">
-            <a:spAutoFit/>
-          </a:bodyPr>
-          <a:lstStyle/>
-          <a:p>
-            <a:pPr algn="ctr">
-              <a:defRPr sz="950" b="1">
-                <a:solidFill>
-                  <a:srgbClr val="0284C7"/>
-                </a:solidFill>
-              </a:defRPr>
-            </a:pPr>
-            <a:r>
-              <a:t>▲ 共識型決策 Consensual (Y: 100)</a:t>
-            </a:r>
-          </a:p>
-        </p:txBody>
-      </p:sp>
-      <p:sp>
-        <p:nvSpPr>
-          <p:cNvPr id="10" name="TextBox 9"/>
-          <p:cNvSpPr txBox="1"/>
-          <p:nvPr/>
-        </p:nvSpPr>
-        <p:spPr>
-          <a:xfrm>
-            <a:off x="731520" y="5989320"/>
-            <a:ext cx="4389120" cy="274320"/>
-          </a:xfrm>
-          <a:prstGeom prst="rect">
-            <a:avLst/>
-          </a:prstGeom>
-          <a:noFill/>
-        </p:spPr>
-        <p:txBody>
-          <a:bodyPr wrap="none" lIns="0" tIns="0" rIns="0" bIns="0">
-            <a:spAutoFit/>
-          </a:bodyPr>
-          <a:lstStyle/>
-          <a:p>
-            <a:pPr algn="ctr">
-              <a:defRPr sz="900" b="1">
-                <a:solidFill>
-                  <a:srgbClr val="64748B"/>
-                </a:solidFill>
-              </a:defRPr>
-            </a:pPr>
-            <a:r>
-              <a:t>◀ 平等主義 (X:0)   ▼ 由上而下 (Y:0)   階層制 (X:100) ▶</a:t>
-            </a:r>
-          </a:p>
-        </p:txBody>
-      </p:sp>
-      <p:sp>
-        <p:nvSpPr>
-          <p:cNvPr id="11" name="Rounded Rectangle 10"/>
+        </p:txBody>
+      </p:sp>
+      <p:sp>
+        <p:nvSpPr>
+          <p:cNvPr id="9" name="Rounded Rectangle 8"/>
           <p:cNvSpPr/>
           <p:nvPr/>
         </p:nvSpPr>
@@ -9740,14 +9422,14 @@
               </a:defRPr>
             </a:pPr>
             <a:r>
-              <a:t>【日本、韓國】嚴明職級尊重與全員共識並存。正式會議僅為形式用印，真正的決策必須在會前依職級序列由下而上完成「根回（Nemawashi）」。</a:t>
-            </a:r>
-          </a:p>
-        </p:txBody>
-      </p:sp>
-      <p:sp>
-        <p:nvSpPr>
-          <p:cNvPr id="12" name="Rounded Rectangle 11"/>
+              <a:t>【日本、韓國】嚴明職級尊重與全員共識並存。正式會議僅為形式用印，真正的決策必須在會前依職級序列由下而上完成「會前私下摸底（根回）」。</a:t>
+            </a:r>
+          </a:p>
+        </p:txBody>
+      </p:sp>
+      <p:sp>
+        <p:nvSpPr>
+          <p:cNvPr id="10" name="Rounded Rectangle 9"/>
           <p:cNvSpPr/>
           <p:nvPr/>
         </p:nvSpPr>
@@ -9806,14 +9488,14 @@
               </a:defRPr>
             </a:pPr>
             <a:r>
-              <a:t>【荷蘭、北歐各國】基層與主管平起平坐，人人皆有一票否決權。領導者為「促進者」，追求刻在石碑上的神聖大承諾（大 D）。</a:t>
-            </a:r>
-          </a:p>
-        </p:txBody>
-      </p:sp>
-      <p:sp>
-        <p:nvSpPr>
-          <p:cNvPr id="13" name="Rounded Rectangle 12"/>
+              <a:t>【荷蘭、北歐各國】基層與主管平起平坐，人人皆有一票否決權。領導者為「促進者」，追求刻在石碑上的神聖大承諾（大承諾）。</a:t>
+            </a:r>
+          </a:p>
+        </p:txBody>
+      </p:sp>
+      <p:sp>
+        <p:nvSpPr>
+          <p:cNvPr id="11" name="Rounded Rectangle 10"/>
           <p:cNvSpPr/>
           <p:nvPr/>
         </p:nvSpPr>
@@ -9872,14 +9554,14 @@
               </a:defRPr>
             </a:pPr>
             <a:r>
-              <a:t>【美國矽谷、英國新創】扁平極客文化，鼓勵直抒己見甚至挑戰主管；但決策採「小 d」敏捷速決，先試跑、後續動態修補（Hotfix）。</a:t>
-            </a:r>
-          </a:p>
-        </p:txBody>
-      </p:sp>
-      <p:sp>
-        <p:nvSpPr>
-          <p:cNvPr id="14" name="Rounded Rectangle 13"/>
+              <a:t>【美國矽谷、英國新創】扁平極客文化，鼓勵直抒己見甚至挑戰主管；但決策採「小速決」模式，先試跑、後續動態修補。</a:t>
+            </a:r>
+          </a:p>
+        </p:txBody>
+      </p:sp>
+      <p:sp>
+        <p:nvSpPr>
+          <p:cNvPr id="12" name="Rounded Rectangle 11"/>
           <p:cNvSpPr/>
           <p:nvPr/>
         </p:nvSpPr>
@@ -9938,7 +9620,7 @@
               </a:defRPr>
             </a:pPr>
             <a:r>
-              <a:t>【中國量產基地、法國、印度】強調最高主管威權指揮（Director 模式）。危機時刻基層渴望明確指令，領導者必須一肩扛起成敗責任。</a:t>
+              <a:t>【中國量產基地、法國、印度】強調最高主管威權指揮（最高指揮官模式）。危機時刻基層渴望明確指令，領導者必須一肩扛起成敗責任。</a:t>
             </a:r>
           </a:p>
         </p:txBody>
@@ -10012,8 +9694,8 @@
         </p:nvSpPr>
         <p:spPr>
           <a:xfrm>
-            <a:off x="731520" y="411480"/>
-            <a:ext cx="10698480" cy="320040"/>
+            <a:off x="731520" y="365760"/>
+            <a:ext cx="10698480" cy="274320"/>
           </a:xfrm>
           <a:prstGeom prst="rect">
             <a:avLst/>
@@ -10034,7 +9716,7 @@
               </a:defRPr>
             </a:pPr>
             <a:r>
-              <a:t>RULES &amp; EUCLIDEAN SCORING</a:t>
+              <a:t>規則與計分法</a:t>
             </a:r>
           </a:p>
         </p:txBody>
@@ -10047,8 +9729,8 @@
         </p:nvSpPr>
         <p:spPr>
           <a:xfrm>
-            <a:off x="731520" y="685800"/>
-            <a:ext cx="10698480" cy="594360"/>
+            <a:off x="731520" y="621792"/>
+            <a:ext cx="10698480" cy="548640"/>
           </a:xfrm>
           <a:prstGeom prst="rect">
             <a:avLst/>
@@ -10148,7 +9830,7 @@
               </a:defRPr>
             </a:pPr>
             <a:r>
-              <a:t>• 閱讀衝突現場與對白</a:t>
+              <a:t>• 閱讀現場對白與漫畫情境</a:t>
             </a:r>
           </a:p>
           <a:p>
@@ -10172,7 +9854,7 @@
               </a:defRPr>
             </a:pPr>
             <a:r>
-              <a:t>• 在白紙或象限圖上標出</a:t>
+              <a:t>• 在象限圖上標出</a:t>
             </a:r>
           </a:p>
           <a:p>
@@ -10502,7 +10184,7 @@
               </a:defRPr>
             </a:pPr>
             <a:r>
-              <a:t>📐 歐幾里得距離（Euclidean Distance）計分機制</a:t>
+              <a:t>📐 歐幾里得距離計分機制</a:t>
             </a:r>
           </a:p>
           <a:p>
@@ -10514,7 +10196,7 @@
               </a:defRPr>
             </a:pPr>
             <a:r>
-              <a:t>誤差距離 d = √[ (X_guess - X_target)² + (Y_guess - Y_target)² ]   ｜   本輪得分 = Max(0, 100 - d)</a:t>
+              <a:t>誤差距離 ＝ 根號底下兩軸座標差平方和   ｜   本輪得分 ＝ 100 扣除誤差距離（最低 0 分）</a:t>
             </a:r>
           </a:p>
           <a:p>
@@ -10612,8 +10294,8 @@
         </p:nvSpPr>
         <p:spPr>
           <a:xfrm>
-            <a:off x="731520" y="411480"/>
-            <a:ext cx="10698480" cy="320040"/>
+            <a:off x="731520" y="365760"/>
+            <a:ext cx="10698480" cy="274320"/>
           </a:xfrm>
           <a:prstGeom prst="rect">
             <a:avLst/>
@@ -10634,7 +10316,7 @@
               </a:defRPr>
             </a:pPr>
             <a:r>
-              <a:t>ROUND 1 · SCENARIO CHALLENGE</a:t>
+              <a:t>第一回合 · 情境挑戰</a:t>
             </a:r>
           </a:p>
         </p:txBody>
@@ -10647,8 +10329,8 @@
         </p:nvSpPr>
         <p:spPr>
           <a:xfrm>
-            <a:off x="731520" y="685800"/>
-            <a:ext cx="10698480" cy="594360"/>
+            <a:off x="731520" y="621792"/>
+            <a:ext cx="10698480" cy="548640"/>
           </a:xfrm>
           <a:prstGeom prst="rect">
             <a:avLst/>
@@ -10669,7 +10351,7 @@
               </a:defRPr>
             </a:pPr>
             <a:r>
-              <a:t>CASE 01 · 沉默的正式會議與消失的測試數據</a:t>
+              <a:t>案例一 · 沉默的正式會議與消失的測試數據</a:t>
             </a:r>
           </a:p>
         </p:txBody>
@@ -10682,8 +10364,8 @@
         </p:nvSpPr>
         <p:spPr>
           <a:xfrm>
-            <a:off x="731520" y="1371600"/>
-            <a:ext cx="6217920" cy="3931920"/>
+            <a:off x="676656" y="1179576"/>
+            <a:ext cx="4453128" cy="4453128"/>
           </a:xfrm>
           <a:prstGeom prst="roundRect">
             <a:avLst/>
@@ -10712,72 +10394,47 @@
           </a:fontRef>
         </p:style>
         <p:txBody>
-          <a:bodyPr rtlCol="0" anchor="ctr" wrap="square" lIns="274320" tIns="274320" rIns="274320"/>
-          <a:lstStyle/>
-          <a:p>
-            <a:pPr algn="ctr">
-              <a:defRPr sz="1400" b="1">
-                <a:solidFill>
-                  <a:srgbClr val="D97706"/>
-                </a:solidFill>
-              </a:defRPr>
-            </a:pPr>
-            <a:r>
-              <a:t>📍 地點：海外併購 · Alpha 精密研發中心</a:t>
-            </a:r>
-          </a:p>
-          <a:p>
-            <a:pPr>
-              <a:defRPr sz="1200">
-                <a:solidFill>
-                  <a:srgbClr val="1E293B"/>
-                </a:solidFill>
-              </a:defRPr>
-            </a:pPr>
-            <a:r>
-              <a:t>【衝突現場】</a:t>
-            </a:r>
-            <a:br/>
-            <a:r>
-              <a:t>併購 Alpha 晶圓封裝廠的第三週，你在週一全體正式會議上提出「縮短高溫老練測試 20% 工時」的新方案。</a:t>
-            </a:r>
-          </a:p>
-          <a:p>
-            <a:pPr>
-              <a:defRPr sz="1200">
-                <a:solidFill>
-                  <a:srgbClr val="1E293B"/>
-                </a:solidFill>
-              </a:defRPr>
-            </a:pPr>
-            <a:r>
-              <a:t>會議中你詢問現場主管有無異議，在場 12 位當地主管與資深技師全數低頭抄筆記，資深總工僅微笑點頭說：「我們會盡力研究。」</a:t>
-            </a:r>
-          </a:p>
-          <a:p>
-            <a:pPr>
-              <a:defRPr sz="1200">
-                <a:solidFill>
-                  <a:srgbClr val="1E293B"/>
-                </a:solidFill>
-              </a:defRPr>
-            </a:pPr>
-            <a:r>
-              <a:t>然而到了週三早上，產線一動也沒動；同時你經過茶水間時，聽見資深總工正嚴厲斥責一位昨晚直接寫信給你提供修改建議的年輕工程師「不懂規矩、破壞團隊程序」。</a:t>
-            </a:r>
-          </a:p>
-        </p:txBody>
-      </p:sp>
-      <p:sp>
-        <p:nvSpPr>
-          <p:cNvPr id="6" name="Rounded Rectangle 5"/>
+          <a:bodyPr rtlCol="0" anchor="ctr"/>
+          <a:lstStyle/>
+          <a:p>
+            <a:pPr algn="ctr"/>
+          </a:p>
+        </p:txBody>
+      </p:sp>
+      <p:pic>
+        <p:nvPicPr>
+          <p:cNvPr id="6" name="Picture 5" descr="case1_alpha.png"/>
+          <p:cNvPicPr>
+            <a:picLocks noChangeAspect="1"/>
+          </p:cNvPicPr>
+          <p:nvPr/>
+        </p:nvPicPr>
+        <p:blipFill>
+          <a:blip r:embed="rId2"/>
+          <a:stretch>
+            <a:fillRect/>
+          </a:stretch>
+        </p:blipFill>
+        <p:spPr>
+          <a:xfrm>
+            <a:off x="731520" y="1234440"/>
+            <a:ext cx="4343400" cy="4343400"/>
+          </a:xfrm>
+          <a:prstGeom prst="rect">
+            <a:avLst/>
+          </a:prstGeom>
+        </p:spPr>
+      </p:pic>
+      <p:sp>
+        <p:nvSpPr>
+          <p:cNvPr id="7" name="Rounded Rectangle 6"/>
           <p:cNvSpPr/>
           <p:nvPr/>
         </p:nvSpPr>
         <p:spPr>
           <a:xfrm>
-            <a:off x="7132320" y="1371600"/>
-            <a:ext cx="4327855" cy="3931920"/>
+            <a:off x="5303520" y="1234440"/>
+            <a:ext cx="6156655" cy="3429000"/>
           </a:xfrm>
           <a:prstGeom prst="roundRect">
             <a:avLst/>
@@ -10787,7 +10444,7 @@
           </a:solidFill>
           <a:ln w="19050">
             <a:solidFill>
-              <a:srgbClr val="0284C7"/>
+              <a:srgbClr val="E2E8F0"/>
             </a:solidFill>
           </a:ln>
         </p:spPr>
@@ -10806,34 +10463,40 @@
           </a:fontRef>
         </p:style>
         <p:txBody>
-          <a:bodyPr rtlCol="0" anchor="ctr" wrap="square" lIns="228600" tIns="228600" rIns="228600"/>
+          <a:bodyPr rtlCol="0" anchor="ctr" wrap="square" lIns="256032" rIns="256032" tIns="182880"/>
           <a:lstStyle/>
           <a:p>
             <a:pPr algn="ctr">
-              <a:defRPr sz="1400" b="1">
+              <a:defRPr sz="1300" b="1">
                 <a:solidFill>
                   <a:srgbClr val="0284C7"/>
                 </a:solidFill>
               </a:defRPr>
             </a:pPr>
             <a:r>
-              <a:t>🎙️ 雙方真實對白錄音</a:t>
-            </a:r>
-          </a:p>
-          <a:p>
-            <a:pPr>
-              <a:defRPr b="1" sz="1100">
+              <a:t>📍 海外併購 · 精密研發中心</a:t>
+            </a:r>
+          </a:p>
+          <a:p>
+            <a:pPr>
+              <a:spcBef>
+                <a:spcPts val="600"/>
+              </a:spcBef>
+              <a:defRPr sz="1100" b="1">
                 <a:solidFill>
                   <a:srgbClr val="1E293B"/>
                 </a:solidFill>
               </a:defRPr>
             </a:pPr>
             <a:r>
-              <a:t>• 矽谷主管</a:t>
-            </a:r>
-          </a:p>
-          <a:p>
-            <a:pPr>
+              <a:t>【會議現場】</a:t>
+            </a:r>
+          </a:p>
+          <a:p>
+            <a:pPr>
+              <a:lnSpc>
+                <a:spcPct val="125000"/>
+              </a:lnSpc>
               <a:defRPr sz="1050">
                 <a:solidFill>
                   <a:srgbClr val="475569"/>
@@ -10841,24 +10504,29 @@
               </a:defRPr>
             </a:pPr>
             <a:r>
-              <a:t>「距離發表會只剩三週，我們需要明確承諾。下週五能交出縮減工時的晶圓嗎？」</a:t>
-            </a:r>
-            <a:br/>
-          </a:p>
-          <a:p>
-            <a:pPr>
-              <a:defRPr b="1" sz="1100">
+              <a:t>你：「縮短老練測試工時 20%，大家有沒有異議？」全場低頭抄筆記，一片沉默……</a:t>
+            </a:r>
+          </a:p>
+          <a:p>
+            <a:pPr>
+              <a:spcBef>
+                <a:spcPts val="600"/>
+              </a:spcBef>
+              <a:defRPr sz="1100" b="1">
                 <a:solidFill>
                   <a:srgbClr val="1E293B"/>
                 </a:solidFill>
               </a:defRPr>
             </a:pPr>
             <a:r>
-              <a:t>• 東京高橋總工</a:t>
-            </a:r>
-          </a:p>
-          <a:p>
-            <a:pPr>
+              <a:t>【資深總工】</a:t>
+            </a:r>
+          </a:p>
+          <a:p>
+            <a:pPr>
+              <a:lnSpc>
+                <a:spcPct val="125000"/>
+              </a:lnSpc>
               <a:defRPr sz="1050">
                 <a:solidFill>
                   <a:srgbClr val="475569"/>
@@ -10866,24 +10534,29 @@
               </a:defRPr>
             </a:pPr>
             <a:r>
-              <a:t>「我們明白事情的重要性……但目前製程參數，內部可能還需要再研究一下。」</a:t>
-            </a:r>
-            <a:br/>
-          </a:p>
-          <a:p>
-            <a:pPr>
-              <a:defRPr b="1" sz="1100">
+              <a:t>總工微笑：「我們會盡力研究。」你心想：太好了，大家都同意！</a:t>
+            </a:r>
+          </a:p>
+          <a:p>
+            <a:pPr>
+              <a:spcBef>
+                <a:spcPts val="600"/>
+              </a:spcBef>
+              <a:defRPr sz="1100" b="1">
                 <a:solidFill>
                   <a:srgbClr val="1E293B"/>
                 </a:solidFill>
               </a:defRPr>
             </a:pPr>
             <a:r>
-              <a:t>• 年輕工程師私下私訊</a:t>
-            </a:r>
-          </a:p>
-          <a:p>
-            <a:pPr>
+              <a:t>【週三清晨】</a:t>
+            </a:r>
+          </a:p>
+          <a:p>
+            <a:pPr>
+              <a:lnSpc>
+                <a:spcPct val="125000"/>
+              </a:lnSpc>
               <a:defRPr sz="1050">
                 <a:solidFill>
                   <a:srgbClr val="475569"/>
@@ -10891,22 +10564,51 @@
               </a:defRPr>
             </a:pPr>
             <a:r>
-              <a:t>「其實只要微調熱膨脹參數即可縮減工時，但總工交代在正式稟議通過前，誰都不能直接改。」</a:t>
-            </a:r>
-            <a:br/>
-          </a:p>
-        </p:txBody>
-      </p:sp>
-      <p:sp>
-        <p:nvSpPr>
-          <p:cNvPr id="7" name="Rounded Rectangle 6"/>
+              <a:t>來到產線，測試爐工時仍為 100%，產線完全沒動！</a:t>
+            </a:r>
+          </a:p>
+          <a:p>
+            <a:pPr>
+              <a:spcBef>
+                <a:spcPts val="600"/>
+              </a:spcBef>
+              <a:defRPr sz="1100" b="1">
+                <a:solidFill>
+                  <a:srgbClr val="1E293B"/>
+                </a:solidFill>
+              </a:defRPr>
+            </a:pPr>
+            <a:r>
+              <a:t>【茶水間外】</a:t>
+            </a:r>
+          </a:p>
+          <a:p>
+            <a:pPr>
+              <a:lnSpc>
+                <a:spcPct val="125000"/>
+              </a:lnSpc>
+              <a:defRPr sz="1050">
+                <a:solidFill>
+                  <a:srgbClr val="475569"/>
+                </a:solidFill>
+              </a:defRPr>
+            </a:pPr>
+            <a:r>
+              <a:t>總工嚴斥昨晚寫私信給你的年輕人：「不懂規矩！破壞團隊程序！」</a:t>
+            </a:r>
+          </a:p>
+        </p:txBody>
+      </p:sp>
+      <p:sp>
+        <p:nvSpPr>
+          <p:cNvPr id="8" name="Rounded Rectangle 7"/>
           <p:cNvSpPr/>
           <p:nvPr/>
         </p:nvSpPr>
         <p:spPr>
           <a:xfrm>
-            <a:off x="731520" y="5486400"/>
-            <a:ext cx="10728655" cy="868680"/>
+            <a:off x="5303520" y="4800600"/>
+            <a:ext cx="6156655" cy="868680"/>
           </a:xfrm>
           <a:prstGeom prst="roundRect">
             <a:avLst/>
@@ -10933,18 +10635,18 @@
           </a:fontRef>
         </p:style>
         <p:txBody>
-          <a:bodyPr rtlCol="0" anchor="ctr" wrap="square"/>
+          <a:bodyPr rtlCol="0" anchor="ctr" wrap="square" lIns="228600" rIns="228600" tIns="137160"/>
           <a:lstStyle/>
           <a:p>
             <a:pPr algn="ctr">
-              <a:defRPr sz="1300" b="1">
+              <a:defRPr sz="1200" b="1">
                 <a:solidFill>
                   <a:srgbClr val="FEF3C7"/>
                 </a:solidFill>
               </a:defRPr>
             </a:pPr>
             <a:r>
-              <a:t>⏱️ 小組任務（倒數 3 分鐘）：請根據組織行為線索判斷對方文化類型，並在四象限中釘出你們這組的決策座標 (X, Y)！</a:t>
+              <a:t>⏱️ 決策課題：面對表面和諧、實則嚴守階層與私下共識的團隊，你的領導決策座標在哪裡？</a:t>
             </a:r>
           </a:p>
         </p:txBody>
@@ -11018,8 +10720,8 @@
         </p:nvSpPr>
         <p:spPr>
           <a:xfrm>
-            <a:off x="731520" y="411480"/>
-            <a:ext cx="10698480" cy="320040"/>
+            <a:off x="731520" y="365760"/>
+            <a:ext cx="10698480" cy="274320"/>
           </a:xfrm>
           <a:prstGeom prst="rect">
             <a:avLst/>
@@ -11040,7 +10742,7 @@
               </a:defRPr>
             </a:pPr>
             <a:r>
-              <a:t>ROUND 1 · VERDICT &amp; HBR DEEP DIVE</a:t>
+              <a:t>第一回合 · 答案揭曉與文獻深度解析</a:t>
             </a:r>
           </a:p>
         </p:txBody>
@@ -11053,8 +10755,8 @@
         </p:nvSpPr>
         <p:spPr>
           <a:xfrm>
-            <a:off x="731520" y="685800"/>
-            <a:ext cx="10698480" cy="594360"/>
+            <a:off x="731520" y="621792"/>
+            <a:ext cx="10698480" cy="548640"/>
           </a:xfrm>
           <a:prstGeom prst="rect">
             <a:avLst/>
@@ -11075,7 +10777,7 @@
               </a:defRPr>
             </a:pPr>
             <a:r>
-              <a:t>CASE 01 答案揭曉 · 第一象限（右上：X=78, Y=82）</a:t>
+              <a:t>案例一 答案揭曉 · 第一象限（右上：橫軸 78，縱軸 82）</a:t>
             </a:r>
           </a:p>
         </p:txBody>
@@ -11088,8 +10790,114 @@
         </p:nvSpPr>
         <p:spPr>
           <a:xfrm>
-            <a:off x="731520" y="1554480"/>
-            <a:ext cx="2194560" cy="2194560"/>
+            <a:off x="731520" y="1234440"/>
+            <a:ext cx="4114800" cy="5120640"/>
+          </a:xfrm>
+          <a:prstGeom prst="roundRect">
+            <a:avLst/>
+          </a:prstGeom>
+          <a:solidFill>
+            <a:srgbClr val="1E3A8A"/>
+          </a:solidFill>
+          <a:ln>
+            <a:noFill/>
+          </a:ln>
+        </p:spPr>
+        <p:style>
+          <a:lnRef idx="1">
+            <a:schemeClr val="accent1"/>
+          </a:lnRef>
+          <a:fillRef idx="3">
+            <a:schemeClr val="accent1"/>
+          </a:fillRef>
+          <a:effectRef idx="2">
+            <a:schemeClr val="accent1"/>
+          </a:effectRef>
+          <a:fontRef idx="minor">
+            <a:schemeClr val="lt1"/>
+          </a:fontRef>
+        </p:style>
+        <p:txBody>
+          <a:bodyPr rtlCol="0" anchor="ctr" wrap="square" lIns="228600" rIns="228600" tIns="320040"/>
+          <a:lstStyle/>
+          <a:p>
+            <a:pPr algn="ctr">
+              <a:defRPr sz="1500" b="1">
+                <a:solidFill>
+                  <a:srgbClr val="BFDBFE"/>
+                </a:solidFill>
+              </a:defRPr>
+            </a:pPr>
+            <a:r>
+              <a:t>正確答案（右上）</a:t>
+            </a:r>
+          </a:p>
+          <a:p>
+            <a:pPr algn="ctr">
+              <a:defRPr sz="3600" b="1">
+                <a:solidFill>
+                  <a:srgbClr val="FFFFFF"/>
+                </a:solidFill>
+              </a:defRPr>
+            </a:pPr>
+            <a:r>
+              <a:t>第一象限</a:t>
+            </a:r>
+          </a:p>
+          <a:p>
+            <a:pPr algn="ctr">
+              <a:defRPr sz="1600" b="1">
+                <a:solidFill>
+                  <a:srgbClr val="FEF3C7"/>
+                </a:solidFill>
+              </a:defRPr>
+            </a:pPr>
+            <a:r>
+              <a:t>階層制 × 共識型決策</a:t>
+            </a:r>
+          </a:p>
+          <a:p>
+            <a:pPr algn="ctr">
+              <a:spcBef>
+                <a:spcPts val="600"/>
+              </a:spcBef>
+              <a:defRPr sz="1200">
+                <a:solidFill>
+                  <a:srgbClr val="E2E8F0"/>
+                </a:solidFill>
+              </a:defRPr>
+            </a:pPr>
+            <a:r>
+              <a:t>🎯 靶心座標：(78, 82)</a:t>
+            </a:r>
+          </a:p>
+          <a:p>
+            <a:pPr algn="ctr">
+              <a:spcBef>
+                <a:spcPts val="800"/>
+              </a:spcBef>
+              <a:defRPr sz="1500" b="1">
+                <a:solidFill>
+                  <a:srgbClr val="FACC15"/>
+                </a:solidFill>
+              </a:defRPr>
+            </a:pPr>
+            <a:r>
+              <a:t>選對組別 + 100 分</a:t>
+            </a:r>
+          </a:p>
+        </p:txBody>
+      </p:sp>
+      <p:sp>
+        <p:nvSpPr>
+          <p:cNvPr id="6" name="Rounded Rectangle 5"/>
+          <p:cNvSpPr/>
+          <p:nvPr/>
+        </p:nvSpPr>
+        <p:spPr>
+          <a:xfrm>
+            <a:off x="1645920" y="4114800"/>
+            <a:ext cx="1051560" cy="1051560"/>
           </a:xfrm>
           <a:prstGeom prst="roundRect">
             <a:avLst/>
@@ -11122,7 +10930,7 @@
           <a:lstStyle/>
           <a:p>
             <a:pPr algn="ctr">
-              <a:defRPr sz="1100" b="1">
+              <a:defRPr sz="1000" b="1">
                 <a:solidFill>
                   <a:srgbClr val="1E293B"/>
                 </a:solidFill>
@@ -11134,7 +10942,7 @@
           </a:p>
           <a:p>
             <a:pPr algn="ctr">
-              <a:defRPr sz="1000">
+              <a:defRPr sz="900">
                 <a:solidFill>
                   <a:srgbClr val="475569"/>
                 </a:solidFill>
@@ -11144,30 +10952,18 @@
               <a:t>共識決策 × 平等主義</a:t>
             </a:r>
           </a:p>
-          <a:p>
-            <a:pPr algn="ctr">
-              <a:defRPr sz="950">
-                <a:solidFill>
-                  <a:srgbClr val="D97706"/>
-                </a:solidFill>
-              </a:defRPr>
-            </a:pPr>
-            <a:r>
-              <a:t>【荷蘭 Polder / 北歐】</a:t>
-            </a:r>
-          </a:p>
-        </p:txBody>
-      </p:sp>
-      <p:sp>
-        <p:nvSpPr>
-          <p:cNvPr id="6" name="Rounded Rectangle 5"/>
+        </p:txBody>
+      </p:sp>
+      <p:sp>
+        <p:nvSpPr>
+          <p:cNvPr id="7" name="Rounded Rectangle 6"/>
           <p:cNvSpPr/>
           <p:nvPr/>
         </p:nvSpPr>
         <p:spPr>
           <a:xfrm>
-            <a:off x="2926080" y="1554480"/>
-            <a:ext cx="2194560" cy="2194560"/>
+            <a:off x="2697480" y="4114800"/>
+            <a:ext cx="1051560" cy="1051560"/>
           </a:xfrm>
           <a:prstGeom prst="roundRect">
             <a:avLst/>
@@ -11200,7 +10996,7 @@
           <a:lstStyle/>
           <a:p>
             <a:pPr algn="ctr">
-              <a:defRPr sz="1100" b="1">
+              <a:defRPr sz="1000" b="1">
                 <a:solidFill>
                   <a:srgbClr val="1E293B"/>
                 </a:solidFill>
@@ -11212,7 +11008,7 @@
           </a:p>
           <a:p>
             <a:pPr algn="ctr">
-              <a:defRPr sz="1000">
+              <a:defRPr sz="900">
                 <a:solidFill>
                   <a:srgbClr val="475569"/>
                 </a:solidFill>
@@ -11222,30 +11018,18 @@
               <a:t>共識決策 × 階層制</a:t>
             </a:r>
           </a:p>
-          <a:p>
-            <a:pPr algn="ctr">
-              <a:defRPr sz="950">
-                <a:solidFill>
-                  <a:srgbClr val="D97706"/>
-                </a:solidFill>
-              </a:defRPr>
-            </a:pPr>
-            <a:r>
-              <a:t>【日本根回 / 稟議】</a:t>
-            </a:r>
-          </a:p>
-        </p:txBody>
-      </p:sp>
-      <p:sp>
-        <p:nvSpPr>
-          <p:cNvPr id="7" name="Rounded Rectangle 6"/>
+        </p:txBody>
+      </p:sp>
+      <p:sp>
+        <p:nvSpPr>
+          <p:cNvPr id="8" name="Rounded Rectangle 7"/>
           <p:cNvSpPr/>
           <p:nvPr/>
         </p:nvSpPr>
         <p:spPr>
           <a:xfrm>
-            <a:off x="731520" y="3749040"/>
-            <a:ext cx="2194560" cy="2194560"/>
+            <a:off x="1645920" y="5166360"/>
+            <a:ext cx="1051560" cy="1051560"/>
           </a:xfrm>
           <a:prstGeom prst="roundRect">
             <a:avLst/>
@@ -11278,7 +11062,7 @@
           <a:lstStyle/>
           <a:p>
             <a:pPr algn="ctr">
-              <a:defRPr sz="1100" b="1">
+              <a:defRPr sz="1000" b="1">
                 <a:solidFill>
                   <a:srgbClr val="1E293B"/>
                 </a:solidFill>
@@ -11290,7 +11074,7 @@
           </a:p>
           <a:p>
             <a:pPr algn="ctr">
-              <a:defRPr sz="1000">
+              <a:defRPr sz="900">
                 <a:solidFill>
                   <a:srgbClr val="475569"/>
                 </a:solidFill>
@@ -11300,30 +11084,18 @@
               <a:t>由上而下 × 平等主義</a:t>
             </a:r>
           </a:p>
-          <a:p>
-            <a:pPr algn="ctr">
-              <a:defRPr sz="950">
-                <a:solidFill>
-                  <a:srgbClr val="D97706"/>
-                </a:solidFill>
-              </a:defRPr>
-            </a:pPr>
-            <a:r>
-              <a:t>【矽谷敏捷 / 小 d】</a:t>
-            </a:r>
-          </a:p>
-        </p:txBody>
-      </p:sp>
-      <p:sp>
-        <p:nvSpPr>
-          <p:cNvPr id="8" name="Rounded Rectangle 7"/>
+        </p:txBody>
+      </p:sp>
+      <p:sp>
+        <p:nvSpPr>
+          <p:cNvPr id="9" name="Rounded Rectangle 8"/>
           <p:cNvSpPr/>
           <p:nvPr/>
         </p:nvSpPr>
         <p:spPr>
           <a:xfrm>
-            <a:off x="2926080" y="3749040"/>
-            <a:ext cx="2194560" cy="2194560"/>
+            <a:off x="2697480" y="5166360"/>
+            <a:ext cx="1051560" cy="1051560"/>
           </a:xfrm>
           <a:prstGeom prst="roundRect">
             <a:avLst/>
@@ -11356,7 +11128,7 @@
           <a:lstStyle/>
           <a:p>
             <a:pPr algn="ctr">
-              <a:defRPr sz="1100" b="1">
+              <a:defRPr sz="1000" b="1">
                 <a:solidFill>
                   <a:srgbClr val="1E293B"/>
                 </a:solidFill>
@@ -11368,7 +11140,7 @@
           </a:p>
           <a:p>
             <a:pPr algn="ctr">
-              <a:defRPr sz="1000">
+              <a:defRPr sz="900">
                 <a:solidFill>
                   <a:srgbClr val="475569"/>
                 </a:solidFill>
@@ -11378,100 +11150,18 @@
               <a:t>由上而下 × 階層制</a:t>
             </a:r>
           </a:p>
-          <a:p>
-            <a:pPr algn="ctr">
-              <a:defRPr sz="950">
-                <a:solidFill>
-                  <a:srgbClr val="D97706"/>
-                </a:solidFill>
-              </a:defRPr>
-            </a:pPr>
-            <a:r>
-              <a:t>【中國/法國/導演模式】</a:t>
-            </a:r>
-          </a:p>
-        </p:txBody>
-      </p:sp>
-      <p:sp>
-        <p:nvSpPr>
-          <p:cNvPr id="9" name="TextBox 8"/>
-          <p:cNvSpPr txBox="1"/>
-          <p:nvPr/>
-        </p:nvSpPr>
-        <p:spPr>
-          <a:xfrm>
-            <a:off x="731520" y="1234440"/>
-            <a:ext cx="4389120" cy="274320"/>
-          </a:xfrm>
-          <a:prstGeom prst="rect">
-            <a:avLst/>
-          </a:prstGeom>
-          <a:noFill/>
-        </p:spPr>
-        <p:txBody>
-          <a:bodyPr wrap="none" lIns="0" tIns="0" rIns="0" bIns="0">
-            <a:spAutoFit/>
-          </a:bodyPr>
-          <a:lstStyle/>
-          <a:p>
-            <a:pPr algn="ctr">
-              <a:defRPr sz="950" b="1">
-                <a:solidFill>
-                  <a:srgbClr val="0284C7"/>
-                </a:solidFill>
-              </a:defRPr>
-            </a:pPr>
-            <a:r>
-              <a:t>▲ 共識型決策 Consensual (Y: 100)</a:t>
-            </a:r>
-          </a:p>
-        </p:txBody>
-      </p:sp>
-      <p:sp>
-        <p:nvSpPr>
-          <p:cNvPr id="10" name="TextBox 9"/>
-          <p:cNvSpPr txBox="1"/>
-          <p:nvPr/>
-        </p:nvSpPr>
-        <p:spPr>
-          <a:xfrm>
-            <a:off x="731520" y="5989320"/>
-            <a:ext cx="4389120" cy="274320"/>
-          </a:xfrm>
-          <a:prstGeom prst="rect">
-            <a:avLst/>
-          </a:prstGeom>
-          <a:noFill/>
-        </p:spPr>
-        <p:txBody>
-          <a:bodyPr wrap="none" lIns="0" tIns="0" rIns="0" bIns="0">
-            <a:spAutoFit/>
-          </a:bodyPr>
-          <a:lstStyle/>
-          <a:p>
-            <a:pPr algn="ctr">
-              <a:defRPr sz="900" b="1">
-                <a:solidFill>
-                  <a:srgbClr val="64748B"/>
-                </a:solidFill>
-              </a:defRPr>
-            </a:pPr>
-            <a:r>
-              <a:t>◀ 平等主義 (X:0)   ▼ 由上而下 (Y:0)   階層制 (X:100) ▶</a:t>
-            </a:r>
-          </a:p>
-        </p:txBody>
-      </p:sp>
-      <p:sp>
-        <p:nvSpPr>
-          <p:cNvPr id="11" name="Oval 10"/>
+        </p:txBody>
+      </p:sp>
+      <p:sp>
+        <p:nvSpPr>
+          <p:cNvPr id="10" name="Oval 9"/>
           <p:cNvSpPr/>
           <p:nvPr/>
         </p:nvSpPr>
         <p:spPr>
           <a:xfrm>
-            <a:off x="4027017" y="2216505"/>
-            <a:ext cx="256032" cy="256032"/>
+            <a:off x="3176625" y="4383633"/>
+            <a:ext cx="219456" cy="219456"/>
           </a:xfrm>
           <a:prstGeom prst="ellipse">
             <a:avLst/>
@@ -11479,7 +11169,7 @@
           <a:solidFill>
             <a:srgbClr val="DC2626"/>
           </a:solidFill>
-          <a:ln w="25400">
+          <a:ln w="19050">
             <a:solidFill>
               <a:srgbClr val="FFFFFF"/>
             </a:solidFill>
@@ -11509,49 +11199,14 @@
       </p:sp>
       <p:sp>
         <p:nvSpPr>
-          <p:cNvPr id="12" name="TextBox 11"/>
-          <p:cNvSpPr txBox="1"/>
-          <p:nvPr/>
-        </p:nvSpPr>
-        <p:spPr>
-          <a:xfrm>
-            <a:off x="3423513" y="2509113"/>
-            <a:ext cx="1463040" cy="320040"/>
-          </a:xfrm>
-          <a:prstGeom prst="rect">
-            <a:avLst/>
-          </a:prstGeom>
-          <a:noFill/>
-        </p:spPr>
-        <p:txBody>
-          <a:bodyPr wrap="none" lIns="0" tIns="0" rIns="0" bIns="0">
-            <a:spAutoFit/>
-          </a:bodyPr>
-          <a:lstStyle/>
-          <a:p>
-            <a:pPr algn="ctr">
-              <a:defRPr sz="1000" b="1">
-                <a:solidFill>
-                  <a:srgbClr val="DC2626"/>
-                </a:solidFill>
-              </a:defRPr>
-            </a:pPr>
-            <a:r>
-              <a:t>🎯 靶心 (78, 82)</a:t>
-            </a:r>
-          </a:p>
-        </p:txBody>
-      </p:sp>
-      <p:sp>
-        <p:nvSpPr>
-          <p:cNvPr id="13" name="Rounded Rectangle 12"/>
+          <p:cNvPr id="11" name="Rounded Rectangle 10"/>
           <p:cNvSpPr/>
           <p:nvPr/>
         </p:nvSpPr>
         <p:spPr>
           <a:xfrm>
-            <a:off x="5486400" y="1371600"/>
-            <a:ext cx="5973775" cy="4937760"/>
+            <a:off x="5029200" y="1234440"/>
+            <a:ext cx="6430975" cy="5120640"/>
           </a:xfrm>
           <a:prstGeom prst="roundRect">
             <a:avLst/>
@@ -11580,107 +11235,109 @@
           </a:fontRef>
         </p:style>
         <p:txBody>
-          <a:bodyPr rtlCol="0" anchor="ctr" wrap="square" lIns="274320" tIns="274320" rIns="274320"/>
+          <a:bodyPr rtlCol="0" anchor="ctr" wrap="square" lIns="365760" rIns="365760" tIns="411480"/>
           <a:lstStyle/>
           <a:p>
             <a:pPr algn="ctr">
+              <a:defRPr sz="1900" b="1">
+                <a:solidFill>
+                  <a:srgbClr val="1E293B"/>
+                </a:solidFill>
+              </a:defRPr>
+            </a:pPr>
+            <a:r>
+              <a:t>文獻理論依據與決策盲點解析</a:t>
+            </a:r>
+          </a:p>
+          <a:p>
+            <a:pPr>
+              <a:spcBef>
+                <a:spcPts val="1800"/>
+              </a:spcBef>
               <a:defRPr sz="1600" b="1">
                 <a:solidFill>
-                  <a:srgbClr val="D97706"/>
-                </a:solidFill>
-              </a:defRPr>
-            </a:pPr>
-            <a:r>
-              <a:t>🎯 真實最佳座標：第一象限（右上 X:78, Y:82）</a:t>
-            </a:r>
-          </a:p>
-          <a:p>
-            <a:pPr>
-              <a:defRPr sz="1200" b="1">
-                <a:solidFill>
                   <a:srgbClr val="1E293B"/>
                 </a:solidFill>
               </a:defRPr>
             </a:pPr>
             <a:r>
-              <a:t>判定特質：高權力距離（階層制）× 高共識校準（Consensual）</a:t>
-            </a:r>
-            <a:br/>
-          </a:p>
-          <a:p>
-            <a:pPr>
-              <a:defRPr b="1" sz="1150">
+              <a:t>文化特徵：</a:t>
+            </a:r>
+          </a:p>
+          <a:p>
+            <a:pPr>
+              <a:lnSpc>
+                <a:spcPct val="135000"/>
+              </a:lnSpc>
+              <a:defRPr sz="1300">
+                <a:solidFill>
+                  <a:srgbClr val="475569"/>
+                </a:solidFill>
+              </a:defRPr>
+            </a:pPr>
+            <a:r>
+              <a:t>日本根回與稟議模式，兼具嚴明的職級尊卑與全員深度共識。</a:t>
+            </a:r>
+          </a:p>
+          <a:p>
+            <a:pPr>
+              <a:spcBef>
+                <a:spcPts val="1800"/>
+              </a:spcBef>
+              <a:defRPr sz="1600" b="1">
                 <a:solidFill>
                   <a:srgbClr val="1E293B"/>
                 </a:solidFill>
               </a:defRPr>
             </a:pPr>
             <a:r>
-              <a:t>• 文獻理論原型：日本 Nemawashi 根回與稟議制</a:t>
-            </a:r>
-          </a:p>
-          <a:p>
-            <a:pPr>
-              <a:defRPr sz="1000">
+              <a:t>管理盲點：</a:t>
+            </a:r>
+          </a:p>
+          <a:p>
+            <a:pPr>
+              <a:lnSpc>
+                <a:spcPct val="135000"/>
+              </a:lnSpc>
+              <a:defRPr sz="1300">
                 <a:solidFill>
                   <a:srgbClr val="475569"/>
                 </a:solidFill>
               </a:defRPr>
             </a:pPr>
             <a:r>
-              <a:t>依據 HBR 跨文化領導矩陣，此組織兼具「嚴明的職級尊卑（高 X: 78）」與「全員共識決策（高 Y: 82）」。資深總工嚴斥越級報告者，體現了對既有職級階層秩序的嚴格維護。</a:t>
-            </a:r>
-            <a:br/>
-          </a:p>
-          <a:p>
-            <a:pPr>
-              <a:defRPr b="1" sz="1150">
+              <a:t>誤以為大會能直接討論拍板；在該文化中大會僅為用印儀式，未經會前私下摸底（根回）強推必遭消極抗命。</a:t>
+            </a:r>
+          </a:p>
+          <a:p>
+            <a:pPr>
+              <a:spcBef>
+                <a:spcPts val="1800"/>
+              </a:spcBef>
+              <a:defRPr sz="1600" b="1">
                 <a:solidFill>
                   <a:srgbClr val="1E293B"/>
                 </a:solidFill>
               </a:defRPr>
             </a:pPr>
             <a:r>
-              <a:t>• 常見管理盲點覆盤</a:t>
-            </a:r>
-          </a:p>
-          <a:p>
-            <a:pPr>
-              <a:defRPr sz="1000">
+              <a:t>正確對策：</a:t>
+            </a:r>
+          </a:p>
+          <a:p>
+            <a:pPr>
+              <a:lnSpc>
+                <a:spcPct val="135000"/>
+              </a:lnSpc>
+              <a:defRPr sz="1300">
                 <a:solidFill>
                   <a:srgbClr val="475569"/>
                 </a:solidFill>
               </a:defRPr>
             </a:pPr>
             <a:r>
-              <a:t>在該文化中，正式大會不是「辯論場所」，而僅是各方私下達成協議後的「最終蓋章用印儀式」。如果會前沒有經過各部門幹部的非正式私下對齊（根回），任何新提案在大會上都不會得到實質執行。</a:t>
-            </a:r>
-            <a:br/>
-          </a:p>
-          <a:p>
-            <a:pPr>
-              <a:defRPr b="1" sz="1150">
-                <a:solidFill>
-                  <a:srgbClr val="1E293B"/>
-                </a:solidFill>
-              </a:defRPr>
-            </a:pPr>
-            <a:r>
-              <a:t>• 卓越領導者的因地制宜行動</a:t>
-            </a:r>
-          </a:p>
-          <a:p>
-            <a:pPr>
-              <a:defRPr sz="1000">
-                <a:solidFill>
-                  <a:srgbClr val="475569"/>
-                </a:solidFill>
-              </a:defRPr>
-            </a:pPr>
-            <a:r>
-              <a:t>切忌在大會上強推多數決或由上而下施壓！正確作法是先透過資深總工，在會前由下而上與各課長私下摸底、分擔驗證，待全員完成稟議背書後再召開正式會議。</a:t>
-            </a:r>
-            <a:br/>
+              <a:t>尊重既有職級序列，會前透過資深幹部由下而上私下溝通、全員完成會簽後再開會確認。</a:t>
+            </a:r>
           </a:p>
         </p:txBody>
       </p:sp>
@@ -11753,8 +11410,8 @@
         </p:nvSpPr>
         <p:spPr>
           <a:xfrm>
-            <a:off x="731520" y="411480"/>
-            <a:ext cx="10698480" cy="320040"/>
+            <a:off x="731520" y="365760"/>
+            <a:ext cx="10698480" cy="274320"/>
           </a:xfrm>
           <a:prstGeom prst="rect">
             <a:avLst/>
@@ -11775,7 +11432,7 @@
               </a:defRPr>
             </a:pPr>
             <a:r>
-              <a:t>ROUND 2 · SCENARIO CHALLENGE</a:t>
+              <a:t>第二回合 · 情境挑戰</a:t>
             </a:r>
           </a:p>
         </p:txBody>
@@ -11788,8 +11445,8 @@
         </p:nvSpPr>
         <p:spPr>
           <a:xfrm>
-            <a:off x="731520" y="685800"/>
-            <a:ext cx="10698480" cy="594360"/>
+            <a:off x="731520" y="621792"/>
+            <a:ext cx="10698480" cy="548640"/>
           </a:xfrm>
           <a:prstGeom prst="rect">
             <a:avLst/>
@@ -11810,7 +11467,7 @@
               </a:defRPr>
             </a:pPr>
             <a:r>
-              <a:t>CASE 02 · 良率暴跌夜的群組風暴</a:t>
+              <a:t>案例二 · 良率暴跌夜的群組風暴</a:t>
             </a:r>
           </a:p>
         </p:txBody>
@@ -11823,8 +11480,8 @@
         </p:nvSpPr>
         <p:spPr>
           <a:xfrm>
-            <a:off x="731520" y="1371600"/>
-            <a:ext cx="6217920" cy="3931920"/>
+            <a:off x="676656" y="1179576"/>
+            <a:ext cx="4453128" cy="4453128"/>
           </a:xfrm>
           <a:prstGeom prst="roundRect">
             <a:avLst/>
@@ -11853,72 +11510,47 @@
           </a:fontRef>
         </p:style>
         <p:txBody>
-          <a:bodyPr rtlCol="0" anchor="ctr" wrap="square" lIns="274320" tIns="274320" rIns="274320"/>
-          <a:lstStyle/>
-          <a:p>
-            <a:pPr algn="ctr">
-              <a:defRPr sz="1400" b="1">
-                <a:solidFill>
-                  <a:srgbClr val="0284C7"/>
-                </a:solidFill>
-              </a:defRPr>
-            </a:pPr>
-            <a:r>
-              <a:t>📍 地點：海外量產 · Beta 核心試產基地</a:t>
-            </a:r>
-          </a:p>
-          <a:p>
-            <a:pPr>
-              <a:defRPr sz="1200">
-                <a:solidFill>
-                  <a:srgbClr val="1E293B"/>
-                </a:solidFill>
-              </a:defRPr>
-            </a:pPr>
-            <a:r>
-              <a:t>【衝突現場】</a:t>
-            </a:r>
-            <a:br/>
-            <a:r>
-              <a:t>Beta 廠夜班試產發生塗佈異常，良率瞬間暴跌至 48%。資深廠長主張立刻停線洗機，但試產組幾位工程師在工作群組裡激烈爭辯，雙方互相指責誰該為交貨延誤負全責。</a:t>
-            </a:r>
-          </a:p>
-          <a:p>
-            <a:pPr>
-              <a:defRPr sz="1200">
-                <a:solidFill>
-                  <a:srgbClr val="1E293B"/>
-                </a:solidFill>
-              </a:defRPr>
-            </a:pPr>
-            <a:r>
-              <a:t>產線領班站在機台旁不知所措，私訊問你：「現在到底該聽誰的？請給我們一個明確的裁示，否則沒人敢動手！」</a:t>
-            </a:r>
-          </a:p>
-          <a:p>
-            <a:pPr>
-              <a:defRPr sz="1200">
-                <a:solidFill>
-                  <a:srgbClr val="1E293B"/>
-                </a:solidFill>
-              </a:defRPr>
-            </a:pPr>
-            <a:r>
-              <a:t>距離向波士頓總部與全球大客戶交貨僅剩最後 4 小時，產線每停擺 10 分鐘，公司就面臨巨額違約罰金。</a:t>
-            </a:r>
-          </a:p>
-        </p:txBody>
-      </p:sp>
-      <p:sp>
-        <p:nvSpPr>
-          <p:cNvPr id="6" name="Rounded Rectangle 5"/>
+          <a:bodyPr rtlCol="0" anchor="ctr"/>
+          <a:lstStyle/>
+          <a:p>
+            <a:pPr algn="ctr"/>
+          </a:p>
+        </p:txBody>
+      </p:sp>
+      <p:pic>
+        <p:nvPicPr>
+          <p:cNvPr id="6" name="Picture 5" descr="case2_beta.png"/>
+          <p:cNvPicPr>
+            <a:picLocks noChangeAspect="1"/>
+          </p:cNvPicPr>
+          <p:nvPr/>
+        </p:nvPicPr>
+        <p:blipFill>
+          <a:blip r:embed="rId2"/>
+          <a:stretch>
+            <a:fillRect/>
+          </a:stretch>
+        </p:blipFill>
+        <p:spPr>
+          <a:xfrm>
+            <a:off x="731520" y="1234440"/>
+            <a:ext cx="4343400" cy="4343400"/>
+          </a:xfrm>
+          <a:prstGeom prst="rect">
+            <a:avLst/>
+          </a:prstGeom>
+        </p:spPr>
+      </p:pic>
+      <p:sp>
+        <p:nvSpPr>
+          <p:cNvPr id="7" name="Rounded Rectangle 6"/>
           <p:cNvSpPr/>
           <p:nvPr/>
         </p:nvSpPr>
         <p:spPr>
           <a:xfrm>
-            <a:off x="7132320" y="1371600"/>
-            <a:ext cx="4327855" cy="3931920"/>
+            <a:off x="5303520" y="1234440"/>
+            <a:ext cx="6156655" cy="3429000"/>
           </a:xfrm>
           <a:prstGeom prst="roundRect">
             <a:avLst/>
@@ -11928,7 +11560,7 @@
           </a:solidFill>
           <a:ln w="19050">
             <a:solidFill>
-              <a:srgbClr val="DC2626"/>
+              <a:srgbClr val="E2E8F0"/>
             </a:solidFill>
           </a:ln>
         </p:spPr>
@@ -11947,34 +11579,40 @@
           </a:fontRef>
         </p:style>
         <p:txBody>
-          <a:bodyPr rtlCol="0" anchor="ctr" wrap="square" lIns="228600" tIns="228600" rIns="228600"/>
+          <a:bodyPr rtlCol="0" anchor="ctr" wrap="square" lIns="256032" rIns="256032" tIns="182880"/>
           <a:lstStyle/>
           <a:p>
             <a:pPr algn="ctr">
-              <a:defRPr sz="1400" b="1">
-                <a:solidFill>
-                  <a:srgbClr val="DC2626"/>
-                </a:solidFill>
-              </a:defRPr>
-            </a:pPr>
-            <a:r>
-              <a:t>🎙️ 現場真實對白錄音</a:t>
-            </a:r>
-          </a:p>
-          <a:p>
-            <a:pPr>
-              <a:defRPr b="1" sz="1100">
+              <a:defRPr sz="1300" b="1">
+                <a:solidFill>
+                  <a:srgbClr val="0284C7"/>
+                </a:solidFill>
+              </a:defRPr>
+            </a:pPr>
+            <a:r>
+              <a:t>📍 海外量產 · 核心試產基地</a:t>
+            </a:r>
+          </a:p>
+          <a:p>
+            <a:pPr>
+              <a:spcBef>
+                <a:spcPts val="600"/>
+              </a:spcBef>
+              <a:defRPr sz="1100" b="1">
                 <a:solidFill>
                   <a:srgbClr val="1E293B"/>
                 </a:solidFill>
               </a:defRPr>
             </a:pPr>
             <a:r>
-              <a:t>• 產線領班私訊</a:t>
-            </a:r>
-          </a:p>
-          <a:p>
-            <a:pPr>
+              <a:t>【夜班 02:10】</a:t>
+            </a:r>
+          </a:p>
+          <a:p>
+            <a:pPr>
+              <a:lnSpc>
+                <a:spcPct val="125000"/>
+              </a:lnSpc>
               <a:defRPr sz="1050">
                 <a:solidFill>
                   <a:srgbClr val="475569"/>
@@ -11982,24 +11620,29 @@
               </a:defRPr>
             </a:pPr>
             <a:r>
-              <a:t>「廠長跟試產組工程師各執一詞，沒人敢承擔停機責任！請主管直接下指令，否則現場沒人敢動！」</a:t>
-            </a:r>
-            <a:br/>
-          </a:p>
-          <a:p>
-            <a:pPr>
-              <a:defRPr b="1" sz="1100">
+              <a:t>塗佈機良率暴跌至 48%！產線領班大驚失色。</a:t>
+            </a:r>
+          </a:p>
+          <a:p>
+            <a:pPr>
+              <a:spcBef>
+                <a:spcPts val="600"/>
+              </a:spcBef>
+              <a:defRPr sz="1100" b="1">
                 <a:solidFill>
                   <a:srgbClr val="1E293B"/>
                 </a:solidFill>
               </a:defRPr>
             </a:pPr>
             <a:r>
-              <a:t>• 爭執工程師群組</a:t>
-            </a:r>
-          </a:p>
-          <a:p>
-            <a:pPr>
+              <a:t>【現場下令】</a:t>
+            </a:r>
+          </a:p>
+          <a:p>
+            <a:pPr>
+              <a:lnSpc>
+                <a:spcPct val="125000"/>
+              </a:lnSpc>
               <a:defRPr sz="1050">
                 <a:solidFill>
                   <a:srgbClr val="475569"/>
@@ -12007,24 +11650,29 @@
               </a:defRPr>
             </a:pPr>
             <a:r>
-              <a:t>「這明明是配方問題，憑什麼叫我們試產組背黑鍋？萬一停線交不出貨誰負責？」</a:t>
-            </a:r>
-            <a:br/>
-          </a:p>
-          <a:p>
-            <a:pPr>
-              <a:defRPr b="1" sz="1100">
+              <a:t>資深廠長：「立刻停線，把機台洗乾淨！」機台強制按下停機。</a:t>
+            </a:r>
+          </a:p>
+          <a:p>
+            <a:pPr>
+              <a:spcBef>
+                <a:spcPts val="600"/>
+              </a:spcBef>
+              <a:defRPr sz="1100" b="1">
                 <a:solidFill>
                   <a:srgbClr val="1E293B"/>
                 </a:solidFill>
               </a:defRPr>
             </a:pPr>
             <a:r>
-              <a:t>• 資深廠長</a:t>
-            </a:r>
-          </a:p>
-          <a:p>
-            <a:pPr>
+              <a:t>【群組爭吵】</a:t>
+            </a:r>
+          </a:p>
+          <a:p>
+            <a:pPr>
+              <a:lnSpc>
+                <a:spcPct val="125000"/>
+              </a:lnSpc>
               <a:defRPr sz="1050">
                 <a:solidFill>
                   <a:srgbClr val="475569"/>
@@ -12032,22 +11680,51 @@
               </a:defRPr>
             </a:pPr>
             <a:r>
-              <a:t>「我是現場負責人，但上面沒有白紙黑字明確授權，我不能擅自停線承擔產能損失。」</a:t>
-            </a:r>
-            <a:br/>
-          </a:p>
-        </p:txBody>
-      </p:sp>
-      <p:sp>
-        <p:nvSpPr>
-          <p:cNvPr id="7" name="Rounded Rectangle 6"/>
+              <a:t>試產組工程師在群組內激烈甩鍋：「是塗佈液的問題！」「延誤你們扛！」</a:t>
+            </a:r>
+          </a:p>
+          <a:p>
+            <a:pPr>
+              <a:spcBef>
+                <a:spcPts val="600"/>
+              </a:spcBef>
+              <a:defRPr sz="1100" b="1">
+                <a:solidFill>
+                  <a:srgbClr val="1E293B"/>
+                </a:solidFill>
+              </a:defRPr>
+            </a:pPr>
+            <a:r>
+              <a:t>【領班求救】</a:t>
+            </a:r>
+          </a:p>
+          <a:p>
+            <a:pPr>
+              <a:lnSpc>
+                <a:spcPct val="125000"/>
+              </a:lnSpc>
+              <a:defRPr sz="1050">
+                <a:solidFill>
+                  <a:srgbClr val="475569"/>
+                </a:solidFill>
+              </a:defRPr>
+            </a:pPr>
+            <a:r>
+              <a:t>領班私訊：「現在到底該聽誰的？請給我們明確裁示，否則沒人敢動手！」</a:t>
+            </a:r>
+          </a:p>
+        </p:txBody>
+      </p:sp>
+      <p:sp>
+        <p:nvSpPr>
+          <p:cNvPr id="8" name="Rounded Rectangle 7"/>
           <p:cNvSpPr/>
           <p:nvPr/>
         </p:nvSpPr>
         <p:spPr>
           <a:xfrm>
-            <a:off x="731520" y="5486400"/>
-            <a:ext cx="10728655" cy="868680"/>
+            <a:off x="5303520" y="4800600"/>
+            <a:ext cx="6156655" cy="868680"/>
           </a:xfrm>
           <a:prstGeom prst="roundRect">
             <a:avLst/>
@@ -12074,18 +11751,18 @@
           </a:fontRef>
         </p:style>
         <p:txBody>
-          <a:bodyPr rtlCol="0" anchor="ctr" wrap="square"/>
+          <a:bodyPr rtlCol="0" anchor="ctr" wrap="square" lIns="228600" rIns="228600" tIns="137160"/>
           <a:lstStyle/>
           <a:p>
             <a:pPr algn="ctr">
-              <a:defRPr sz="1300" b="1">
+              <a:defRPr sz="1200" b="1">
                 <a:solidFill>
                   <a:srgbClr val="FEF3C7"/>
                 </a:solidFill>
               </a:defRPr>
             </a:pPr>
             <a:r>
-              <a:t>⏱️ 小組任務（倒數 3 分鐘）：面對倒數 4 小時的交貨危機與團隊對權責歸屬的焦慮，你們這組的決策座標應落在哪裡？</a:t>
+              <a:t>⏱️ 決策課題：距離交貨剩 4 小時，團隊恐懼承擔責任，你的領導決策座標應落在哪裡？</a:t>
             </a:r>
           </a:p>
         </p:txBody>
@@ -12159,8 +11836,8 @@
         </p:nvSpPr>
         <p:spPr>
           <a:xfrm>
-            <a:off x="731520" y="411480"/>
-            <a:ext cx="10698480" cy="320040"/>
+            <a:off x="731520" y="365760"/>
+            <a:ext cx="10698480" cy="274320"/>
           </a:xfrm>
           <a:prstGeom prst="rect">
             <a:avLst/>
@@ -12181,7 +11858,7 @@
               </a:defRPr>
             </a:pPr>
             <a:r>
-              <a:t>ROUND 2 · VERDICT &amp; HBR DEEP DIVE</a:t>
+              <a:t>第二回合 · 答案揭曉與文獻深度解析</a:t>
             </a:r>
           </a:p>
         </p:txBody>
@@ -12194,8 +11871,8 @@
         </p:nvSpPr>
         <p:spPr>
           <a:xfrm>
-            <a:off x="731520" y="685800"/>
-            <a:ext cx="10698480" cy="594360"/>
+            <a:off x="731520" y="621792"/>
+            <a:ext cx="10698480" cy="548640"/>
           </a:xfrm>
           <a:prstGeom prst="rect">
             <a:avLst/>
@@ -12216,7 +11893,7 @@
               </a:defRPr>
             </a:pPr>
             <a:r>
-              <a:t>CASE 02 答案揭曉 · 第四象限（右下：X=84, Y=18）</a:t>
+              <a:t>案例二 答案揭曉 · 第四象限（右下：橫軸 84，縱軸 18）</a:t>
             </a:r>
           </a:p>
         </p:txBody>
@@ -12229,8 +11906,114 @@
         </p:nvSpPr>
         <p:spPr>
           <a:xfrm>
-            <a:off x="731520" y="1554480"/>
-            <a:ext cx="2194560" cy="2194560"/>
+            <a:off x="731520" y="1234440"/>
+            <a:ext cx="4114800" cy="5120640"/>
+          </a:xfrm>
+          <a:prstGeom prst="roundRect">
+            <a:avLst/>
+          </a:prstGeom>
+          <a:solidFill>
+            <a:srgbClr val="1E3A8A"/>
+          </a:solidFill>
+          <a:ln>
+            <a:noFill/>
+          </a:ln>
+        </p:spPr>
+        <p:style>
+          <a:lnRef idx="1">
+            <a:schemeClr val="accent1"/>
+          </a:lnRef>
+          <a:fillRef idx="3">
+            <a:schemeClr val="accent1"/>
+          </a:fillRef>
+          <a:effectRef idx="2">
+            <a:schemeClr val="accent1"/>
+          </a:effectRef>
+          <a:fontRef idx="minor">
+            <a:schemeClr val="lt1"/>
+          </a:fontRef>
+        </p:style>
+        <p:txBody>
+          <a:bodyPr rtlCol="0" anchor="ctr" wrap="square" lIns="228600" rIns="228600" tIns="320040"/>
+          <a:lstStyle/>
+          <a:p>
+            <a:pPr algn="ctr">
+              <a:defRPr sz="1500" b="1">
+                <a:solidFill>
+                  <a:srgbClr val="BFDBFE"/>
+                </a:solidFill>
+              </a:defRPr>
+            </a:pPr>
+            <a:r>
+              <a:t>正確答案（右下）</a:t>
+            </a:r>
+          </a:p>
+          <a:p>
+            <a:pPr algn="ctr">
+              <a:defRPr sz="3600" b="1">
+                <a:solidFill>
+                  <a:srgbClr val="FFFFFF"/>
+                </a:solidFill>
+              </a:defRPr>
+            </a:pPr>
+            <a:r>
+              <a:t>第四象限</a:t>
+            </a:r>
+          </a:p>
+          <a:p>
+            <a:pPr algn="ctr">
+              <a:defRPr sz="1600" b="1">
+                <a:solidFill>
+                  <a:srgbClr val="FEF3C7"/>
+                </a:solidFill>
+              </a:defRPr>
+            </a:pPr>
+            <a:r>
+              <a:t>階層制 × 由上而下速決</a:t>
+            </a:r>
+          </a:p>
+          <a:p>
+            <a:pPr algn="ctr">
+              <a:spcBef>
+                <a:spcPts val="600"/>
+              </a:spcBef>
+              <a:defRPr sz="1200">
+                <a:solidFill>
+                  <a:srgbClr val="E2E8F0"/>
+                </a:solidFill>
+              </a:defRPr>
+            </a:pPr>
+            <a:r>
+              <a:t>🎯 靶心座標：(84, 18)</a:t>
+            </a:r>
+          </a:p>
+          <a:p>
+            <a:pPr algn="ctr">
+              <a:spcBef>
+                <a:spcPts val="800"/>
+              </a:spcBef>
+              <a:defRPr sz="1500" b="1">
+                <a:solidFill>
+                  <a:srgbClr val="FACC15"/>
+                </a:solidFill>
+              </a:defRPr>
+            </a:pPr>
+            <a:r>
+              <a:t>選對組別 + 100 分</a:t>
+            </a:r>
+          </a:p>
+        </p:txBody>
+      </p:sp>
+      <p:sp>
+        <p:nvSpPr>
+          <p:cNvPr id="6" name="Rounded Rectangle 5"/>
+          <p:cNvSpPr/>
+          <p:nvPr/>
+        </p:nvSpPr>
+        <p:spPr>
+          <a:xfrm>
+            <a:off x="1645920" y="4114800"/>
+            <a:ext cx="1051560" cy="1051560"/>
           </a:xfrm>
           <a:prstGeom prst="roundRect">
             <a:avLst/>
@@ -12263,7 +12046,7 @@
           <a:lstStyle/>
           <a:p>
             <a:pPr algn="ctr">
-              <a:defRPr sz="1100" b="1">
+              <a:defRPr sz="1000" b="1">
                 <a:solidFill>
                   <a:srgbClr val="1E293B"/>
                 </a:solidFill>
@@ -12275,7 +12058,7 @@
           </a:p>
           <a:p>
             <a:pPr algn="ctr">
-              <a:defRPr sz="1000">
+              <a:defRPr sz="900">
                 <a:solidFill>
                   <a:srgbClr val="475569"/>
                 </a:solidFill>
@@ -12285,30 +12068,18 @@
               <a:t>共識決策 × 平等主義</a:t>
             </a:r>
           </a:p>
-          <a:p>
-            <a:pPr algn="ctr">
-              <a:defRPr sz="950">
-                <a:solidFill>
-                  <a:srgbClr val="D97706"/>
-                </a:solidFill>
-              </a:defRPr>
-            </a:pPr>
-            <a:r>
-              <a:t>【荷蘭 Polder / 北歐】</a:t>
-            </a:r>
-          </a:p>
-        </p:txBody>
-      </p:sp>
-      <p:sp>
-        <p:nvSpPr>
-          <p:cNvPr id="6" name="Rounded Rectangle 5"/>
+        </p:txBody>
+      </p:sp>
+      <p:sp>
+        <p:nvSpPr>
+          <p:cNvPr id="7" name="Rounded Rectangle 6"/>
           <p:cNvSpPr/>
           <p:nvPr/>
         </p:nvSpPr>
         <p:spPr>
           <a:xfrm>
-            <a:off x="2926080" y="1554480"/>
-            <a:ext cx="2194560" cy="2194560"/>
+            <a:off x="2697480" y="4114800"/>
+            <a:ext cx="1051560" cy="1051560"/>
           </a:xfrm>
           <a:prstGeom prst="roundRect">
             <a:avLst/>
@@ -12341,7 +12112,7 @@
           <a:lstStyle/>
           <a:p>
             <a:pPr algn="ctr">
-              <a:defRPr sz="1100" b="1">
+              <a:defRPr sz="1000" b="1">
                 <a:solidFill>
                   <a:srgbClr val="1E293B"/>
                 </a:solidFill>
@@ -12353,7 +12124,7 @@
           </a:p>
           <a:p>
             <a:pPr algn="ctr">
-              <a:defRPr sz="1000">
+              <a:defRPr sz="900">
                 <a:solidFill>
                   <a:srgbClr val="475569"/>
                 </a:solidFill>
@@ -12363,30 +12134,18 @@
               <a:t>共識決策 × 階層制</a:t>
             </a:r>
           </a:p>
-          <a:p>
-            <a:pPr algn="ctr">
-              <a:defRPr sz="950">
-                <a:solidFill>
-                  <a:srgbClr val="D97706"/>
-                </a:solidFill>
-              </a:defRPr>
-            </a:pPr>
-            <a:r>
-              <a:t>【日本根回 / 稟議】</a:t>
-            </a:r>
-          </a:p>
-        </p:txBody>
-      </p:sp>
-      <p:sp>
-        <p:nvSpPr>
-          <p:cNvPr id="7" name="Rounded Rectangle 6"/>
+        </p:txBody>
+      </p:sp>
+      <p:sp>
+        <p:nvSpPr>
+          <p:cNvPr id="8" name="Rounded Rectangle 7"/>
           <p:cNvSpPr/>
           <p:nvPr/>
         </p:nvSpPr>
         <p:spPr>
           <a:xfrm>
-            <a:off x="731520" y="3749040"/>
-            <a:ext cx="2194560" cy="2194560"/>
+            <a:off x="1645920" y="5166360"/>
+            <a:ext cx="1051560" cy="1051560"/>
           </a:xfrm>
           <a:prstGeom prst="roundRect">
             <a:avLst/>
@@ -12419,7 +12178,7 @@
           <a:lstStyle/>
           <a:p>
             <a:pPr algn="ctr">
-              <a:defRPr sz="1100" b="1">
+              <a:defRPr sz="1000" b="1">
                 <a:solidFill>
                   <a:srgbClr val="1E293B"/>
                 </a:solidFill>
@@ -12431,7 +12190,7 @@
           </a:p>
           <a:p>
             <a:pPr algn="ctr">
-              <a:defRPr sz="1000">
+              <a:defRPr sz="900">
                 <a:solidFill>
                   <a:srgbClr val="475569"/>
                 </a:solidFill>
@@ -12441,30 +12200,18 @@
               <a:t>由上而下 × 平等主義</a:t>
             </a:r>
           </a:p>
-          <a:p>
-            <a:pPr algn="ctr">
-              <a:defRPr sz="950">
-                <a:solidFill>
-                  <a:srgbClr val="D97706"/>
-                </a:solidFill>
-              </a:defRPr>
-            </a:pPr>
-            <a:r>
-              <a:t>【矽谷敏捷 / 小 d】</a:t>
-            </a:r>
-          </a:p>
-        </p:txBody>
-      </p:sp>
-      <p:sp>
-        <p:nvSpPr>
-          <p:cNvPr id="8" name="Rounded Rectangle 7"/>
+        </p:txBody>
+      </p:sp>
+      <p:sp>
+        <p:nvSpPr>
+          <p:cNvPr id="9" name="Rounded Rectangle 8"/>
           <p:cNvSpPr/>
           <p:nvPr/>
         </p:nvSpPr>
         <p:spPr>
           <a:xfrm>
-            <a:off x="2926080" y="3749040"/>
-            <a:ext cx="2194560" cy="2194560"/>
+            <a:off x="2697480" y="5166360"/>
+            <a:ext cx="1051560" cy="1051560"/>
           </a:xfrm>
           <a:prstGeom prst="roundRect">
             <a:avLst/>
@@ -12497,7 +12244,7 @@
           <a:lstStyle/>
           <a:p>
             <a:pPr algn="ctr">
-              <a:defRPr sz="1100" b="1">
+              <a:defRPr sz="1000" b="1">
                 <a:solidFill>
                   <a:srgbClr val="1E293B"/>
                 </a:solidFill>
@@ -12509,7 +12256,7 @@
           </a:p>
           <a:p>
             <a:pPr algn="ctr">
-              <a:defRPr sz="1000">
+              <a:defRPr sz="900">
                 <a:solidFill>
                   <a:srgbClr val="475569"/>
                 </a:solidFill>
@@ -12519,100 +12266,18 @@
               <a:t>由上而下 × 階層制</a:t>
             </a:r>
           </a:p>
-          <a:p>
-            <a:pPr algn="ctr">
-              <a:defRPr sz="950">
-                <a:solidFill>
-                  <a:srgbClr val="D97706"/>
-                </a:solidFill>
-              </a:defRPr>
-            </a:pPr>
-            <a:r>
-              <a:t>【中國/法國/導演模式】</a:t>
-            </a:r>
-          </a:p>
-        </p:txBody>
-      </p:sp>
-      <p:sp>
-        <p:nvSpPr>
-          <p:cNvPr id="9" name="TextBox 8"/>
-          <p:cNvSpPr txBox="1"/>
-          <p:nvPr/>
-        </p:nvSpPr>
-        <p:spPr>
-          <a:xfrm>
-            <a:off x="731520" y="1234440"/>
-            <a:ext cx="4389120" cy="274320"/>
-          </a:xfrm>
-          <a:prstGeom prst="rect">
-            <a:avLst/>
-          </a:prstGeom>
-          <a:noFill/>
-        </p:spPr>
-        <p:txBody>
-          <a:bodyPr wrap="none" lIns="0" tIns="0" rIns="0" bIns="0">
-            <a:spAutoFit/>
-          </a:bodyPr>
-          <a:lstStyle/>
-          <a:p>
-            <a:pPr algn="ctr">
-              <a:defRPr sz="950" b="1">
-                <a:solidFill>
-                  <a:srgbClr val="0284C7"/>
-                </a:solidFill>
-              </a:defRPr>
-            </a:pPr>
-            <a:r>
-              <a:t>▲ 共識型決策 Consensual (Y: 100)</a:t>
-            </a:r>
-          </a:p>
-        </p:txBody>
-      </p:sp>
-      <p:sp>
-        <p:nvSpPr>
-          <p:cNvPr id="10" name="TextBox 9"/>
-          <p:cNvSpPr txBox="1"/>
-          <p:nvPr/>
-        </p:nvSpPr>
-        <p:spPr>
-          <a:xfrm>
-            <a:off x="731520" y="5989320"/>
-            <a:ext cx="4389120" cy="274320"/>
-          </a:xfrm>
-          <a:prstGeom prst="rect">
-            <a:avLst/>
-          </a:prstGeom>
-          <a:noFill/>
-        </p:spPr>
-        <p:txBody>
-          <a:bodyPr wrap="none" lIns="0" tIns="0" rIns="0" bIns="0">
-            <a:spAutoFit/>
-          </a:bodyPr>
-          <a:lstStyle/>
-          <a:p>
-            <a:pPr algn="ctr">
-              <a:defRPr sz="900" b="1">
-                <a:solidFill>
-                  <a:srgbClr val="64748B"/>
-                </a:solidFill>
-              </a:defRPr>
-            </a:pPr>
-            <a:r>
-              <a:t>◀ 平等主義 (X:0)   ▼ 由上而下 (Y:0)   階層制 (X:100) ▶</a:t>
-            </a:r>
-          </a:p>
-        </p:txBody>
-      </p:sp>
-      <p:sp>
-        <p:nvSpPr>
-          <p:cNvPr id="11" name="Oval 10"/>
+        </p:txBody>
+      </p:sp>
+      <p:sp>
+        <p:nvSpPr>
+          <p:cNvPr id="10" name="Oval 9"/>
           <p:cNvSpPr/>
           <p:nvPr/>
         </p:nvSpPr>
         <p:spPr>
           <a:xfrm>
-            <a:off x="4290364" y="5025542"/>
-            <a:ext cx="256032" cy="256032"/>
+            <a:off x="3302812" y="5729630"/>
+            <a:ext cx="219456" cy="219456"/>
           </a:xfrm>
           <a:prstGeom prst="ellipse">
             <a:avLst/>
@@ -12620,7 +12285,7 @@
           <a:solidFill>
             <a:srgbClr val="DC2626"/>
           </a:solidFill>
-          <a:ln w="25400">
+          <a:ln w="19050">
             <a:solidFill>
               <a:srgbClr val="FFFFFF"/>
             </a:solidFill>
@@ -12650,49 +12315,14 @@
       </p:sp>
       <p:sp>
         <p:nvSpPr>
-          <p:cNvPr id="12" name="TextBox 11"/>
-          <p:cNvSpPr txBox="1"/>
-          <p:nvPr/>
-        </p:nvSpPr>
-        <p:spPr>
-          <a:xfrm>
-            <a:off x="3686860" y="5318150"/>
-            <a:ext cx="1463040" cy="320040"/>
-          </a:xfrm>
-          <a:prstGeom prst="rect">
-            <a:avLst/>
-          </a:prstGeom>
-          <a:noFill/>
-        </p:spPr>
-        <p:txBody>
-          <a:bodyPr wrap="none" lIns="0" tIns="0" rIns="0" bIns="0">
-            <a:spAutoFit/>
-          </a:bodyPr>
-          <a:lstStyle/>
-          <a:p>
-            <a:pPr algn="ctr">
-              <a:defRPr sz="1000" b="1">
-                <a:solidFill>
-                  <a:srgbClr val="DC2626"/>
-                </a:solidFill>
-              </a:defRPr>
-            </a:pPr>
-            <a:r>
-              <a:t>🎯 靶心 (84, 18)</a:t>
-            </a:r>
-          </a:p>
-        </p:txBody>
-      </p:sp>
-      <p:sp>
-        <p:nvSpPr>
-          <p:cNvPr id="13" name="Rounded Rectangle 12"/>
+          <p:cNvPr id="11" name="Rounded Rectangle 10"/>
           <p:cNvSpPr/>
           <p:nvPr/>
         </p:nvSpPr>
         <p:spPr>
           <a:xfrm>
-            <a:off x="5486400" y="1371600"/>
-            <a:ext cx="5973775" cy="4937760"/>
+            <a:off x="5029200" y="1234440"/>
+            <a:ext cx="6430975" cy="5120640"/>
           </a:xfrm>
           <a:prstGeom prst="roundRect">
             <a:avLst/>
@@ -12721,107 +12351,109 @@
           </a:fontRef>
         </p:style>
         <p:txBody>
-          <a:bodyPr rtlCol="0" anchor="ctr" wrap="square" lIns="274320" tIns="274320" rIns="274320"/>
+          <a:bodyPr rtlCol="0" anchor="ctr" wrap="square" lIns="365760" rIns="365760" tIns="411480"/>
           <a:lstStyle/>
           <a:p>
             <a:pPr algn="ctr">
+              <a:defRPr sz="1900" b="1">
+                <a:solidFill>
+                  <a:srgbClr val="1E293B"/>
+                </a:solidFill>
+              </a:defRPr>
+            </a:pPr>
+            <a:r>
+              <a:t>文獻理論依據與決策盲點解析</a:t>
+            </a:r>
+          </a:p>
+          <a:p>
+            <a:pPr>
+              <a:spcBef>
+                <a:spcPts val="1800"/>
+              </a:spcBef>
               <a:defRPr sz="1600" b="1">
                 <a:solidFill>
-                  <a:srgbClr val="0284C7"/>
-                </a:solidFill>
-              </a:defRPr>
-            </a:pPr>
-            <a:r>
-              <a:t>🎯 真實最佳座標：第四象限（右下 X:84, Y:18）</a:t>
-            </a:r>
-          </a:p>
-          <a:p>
-            <a:pPr>
-              <a:defRPr sz="1200" b="1">
-                <a:solidFill>
                   <a:srgbClr val="1E293B"/>
                 </a:solidFill>
               </a:defRPr>
             </a:pPr>
             <a:r>
-              <a:t>判定特質：高權力距離（階層制）× 由上而下速決（Top-Down Director 模式）</a:t>
-            </a:r>
-            <a:br/>
-          </a:p>
-          <a:p>
-            <a:pPr>
-              <a:defRPr b="1" sz="1150">
+              <a:t>文化特徵：</a:t>
+            </a:r>
+          </a:p>
+          <a:p>
+            <a:pPr>
+              <a:lnSpc>
+                <a:spcPct val="135000"/>
+              </a:lnSpc>
+              <a:defRPr sz="1300">
+                <a:solidFill>
+                  <a:srgbClr val="475569"/>
+                </a:solidFill>
+              </a:defRPr>
+            </a:pPr>
+            <a:r>
+              <a:t>導演式指揮模式，高度重視階級秩序，危機時刻基層仰賴最高主管明確指令。</a:t>
+            </a:r>
+          </a:p>
+          <a:p>
+            <a:pPr>
+              <a:spcBef>
+                <a:spcPts val="1800"/>
+              </a:spcBef>
+              <a:defRPr sz="1600" b="1">
                 <a:solidFill>
                   <a:srgbClr val="1E293B"/>
                 </a:solidFill>
               </a:defRPr>
             </a:pPr>
             <a:r>
-              <a:t>• 文獻理論原型：Director 指揮官／導演模式</a:t>
-            </a:r>
-          </a:p>
-          <a:p>
-            <a:pPr>
-              <a:defRPr sz="1000">
+              <a:t>管理盲點：</a:t>
+            </a:r>
+          </a:p>
+          <a:p>
+            <a:pPr>
+              <a:lnSpc>
+                <a:spcPct val="135000"/>
+              </a:lnSpc>
+              <a:defRPr sz="1300">
                 <a:solidFill>
                   <a:srgbClr val="475569"/>
                 </a:solidFill>
               </a:defRPr>
             </a:pPr>
             <a:r>
-              <a:t>依據 HBR 跨文化矩陣，此情境屬於第四象限（高階層制 X: 84 × 由上而下速決 Y: 18，文獻原型如中國、法國、印度企業）。基層在危機中極度需要明確職權劃分與指令，由最高管理者承擔最終風險。</a:t>
-            </a:r>
-            <a:br/>
-          </a:p>
-          <a:p>
-            <a:pPr>
-              <a:defRPr b="1" sz="1150">
+              <a:t>在危機時刻若尋求民主討論凝聚共識，會被基層視為軟弱、無能且推卸責任。</a:t>
+            </a:r>
+          </a:p>
+          <a:p>
+            <a:pPr>
+              <a:spcBef>
+                <a:spcPts val="1800"/>
+              </a:spcBef>
+              <a:defRPr sz="1600" b="1">
                 <a:solidFill>
                   <a:srgbClr val="1E293B"/>
                 </a:solidFill>
               </a:defRPr>
             </a:pPr>
             <a:r>
-              <a:t>• 常見管理盲點覆盤</a:t>
-            </a:r>
-          </a:p>
-          <a:p>
-            <a:pPr>
-              <a:defRPr sz="1000">
+              <a:t>正確對策：</a:t>
+            </a:r>
+          </a:p>
+          <a:p>
+            <a:pPr>
+              <a:lnSpc>
+                <a:spcPct val="135000"/>
+              </a:lnSpc>
+              <a:defRPr sz="1300">
                 <a:solidFill>
                   <a:srgbClr val="475569"/>
                 </a:solidFill>
               </a:defRPr>
             </a:pPr>
             <a:r>
-              <a:t>許多受西方管理訓練的主管在此時會試圖「召開全員民主討論凝聚共識」，但在該文化視角下，這種行為會被解讀為「主管軟弱、毫無擔當、企圖找基層墊背」。</a:t>
-            </a:r>
-            <a:br/>
-          </a:p>
-          <a:p>
-            <a:pPr>
-              <a:defRPr b="1" sz="1150">
-                <a:solidFill>
-                  <a:srgbClr val="1E293B"/>
-                </a:solidFill>
-              </a:defRPr>
-            </a:pPr>
-            <a:r>
-              <a:t>• 卓越領導者的因地制宜行動</a:t>
-            </a:r>
-          </a:p>
-          <a:p>
-            <a:pPr>
-              <a:defRPr sz="1000">
-                <a:solidFill>
-                  <a:srgbClr val="475569"/>
-                </a:solidFill>
-              </a:defRPr>
-            </a:pPr>
-            <a:r>
-              <a:t>迅速聽取雙方關鍵數據，果斷做出明確裁示（Director 模式），下達清晰步驟並向全場宣告：「責任由我全權承擔，全體按指引執行！」軍心才能瞬間穩定。</a:t>
-            </a:r>
-            <a:br/>
+              <a:t>主管迅速聽取關鍵資訊後果斷拍板，下達清晰執行步驟，並由最高主管親自扛起成敗責任。</a:t>
+            </a:r>
           </a:p>
         </p:txBody>
       </p:sp>
@@ -12894,8 +12526,8 @@
         </p:nvSpPr>
         <p:spPr>
           <a:xfrm>
-            <a:off x="731520" y="411480"/>
-            <a:ext cx="10698480" cy="320040"/>
+            <a:off x="731520" y="365760"/>
+            <a:ext cx="10698480" cy="274320"/>
           </a:xfrm>
           <a:prstGeom prst="rect">
             <a:avLst/>
@@ -12916,7 +12548,7 @@
               </a:defRPr>
             </a:pPr>
             <a:r>
-              <a:t>ROUND 3 · SCENARIO CHALLENGE</a:t>
+              <a:t>第三回合 · 情境挑戰</a:t>
             </a:r>
           </a:p>
         </p:txBody>
@@ -12929,8 +12561,8 @@
         </p:nvSpPr>
         <p:spPr>
           <a:xfrm>
-            <a:off x="731520" y="685800"/>
-            <a:ext cx="10698480" cy="594360"/>
+            <a:off x="731520" y="621792"/>
+            <a:ext cx="10698480" cy="548640"/>
           </a:xfrm>
           <a:prstGeom prst="rect">
             <a:avLst/>
@@ -12951,7 +12583,7 @@
               </a:defRPr>
             </a:pPr>
             <a:r>
-              <a:t>CASE 03 · 被工程師直接推翻的封版時程</a:t>
+              <a:t>案例三 · 被工程師直接推翻的封版時程</a:t>
             </a:r>
           </a:p>
         </p:txBody>
@@ -12964,8 +12596,8 @@
         </p:nvSpPr>
         <p:spPr>
           <a:xfrm>
-            <a:off x="731520" y="1371600"/>
-            <a:ext cx="6217920" cy="3931920"/>
+            <a:off x="676656" y="1179576"/>
+            <a:ext cx="4453128" cy="4453128"/>
           </a:xfrm>
           <a:prstGeom prst="roundRect">
             <a:avLst/>
@@ -12994,72 +12626,47 @@
           </a:fontRef>
         </p:style>
         <p:txBody>
-          <a:bodyPr rtlCol="0" anchor="ctr" wrap="square" lIns="274320" tIns="274320" rIns="274320"/>
-          <a:lstStyle/>
-          <a:p>
-            <a:pPr algn="ctr">
-              <a:defRPr sz="1400" b="1">
-                <a:solidFill>
-                  <a:srgbClr val="059669"/>
-                </a:solidFill>
-              </a:defRPr>
-            </a:pPr>
-            <a:r>
-              <a:t>📍 地點：新創研發 · Gamma 高速運算實驗室</a:t>
-            </a:r>
-          </a:p>
-          <a:p>
-            <a:pPr>
-              <a:defRPr sz="1200">
-                <a:solidFill>
-                  <a:srgbClr val="1E293B"/>
-                </a:solidFill>
-              </a:defRPr>
-            </a:pPr>
-            <a:r>
-              <a:t>【衝突現場】</a:t>
-            </a:r>
-            <a:br/>
-            <a:r>
-              <a:t>距離雲端晶片韌體封版只剩 36 小時。Gamma 實驗室的一名年輕核心工程師在站立會議（Stand-up Meeting）上直接對你說：</a:t>
-            </a:r>
-          </a:p>
-          <a:p>
-            <a:pPr>
-              <a:defRPr sz="1200">
-                <a:solidFill>
-                  <a:srgbClr val="1E293B"/>
-                </a:solidFill>
-              </a:defRPr>
-            </a:pPr>
-            <a:r>
-              <a:t>「你昨天定的架構太保守了！我昨晚自己寫了一個新演算法原型，雖然還有 15% 邊界條件沒測完，但效能可以提升兩倍！我們現在就先推上線試跑，有問題明天再動態修補（Hotfix）！」</a:t>
-            </a:r>
-          </a:p>
-          <a:p>
-            <a:pPr>
-              <a:defRPr sz="1200">
-                <a:solidFill>
-                  <a:srgbClr val="1E293B"/>
-                </a:solidFill>
-              </a:defRPr>
-            </a:pPr>
-            <a:r>
-              <a:t>在場其他成員紛紛附和說值得賭一把，但品保主管則看向你等待定奪。團隊崇尚敏捷與快速試錯，但也面臨品質穩定性的巨大未知數。</a:t>
-            </a:r>
-          </a:p>
-        </p:txBody>
-      </p:sp>
-      <p:sp>
-        <p:nvSpPr>
-          <p:cNvPr id="6" name="Rounded Rectangle 5"/>
+          <a:bodyPr rtlCol="0" anchor="ctr"/>
+          <a:lstStyle/>
+          <a:p>
+            <a:pPr algn="ctr"/>
+          </a:p>
+        </p:txBody>
+      </p:sp>
+      <p:pic>
+        <p:nvPicPr>
+          <p:cNvPr id="6" name="Picture 5" descr="case3_gamma.png"/>
+          <p:cNvPicPr>
+            <a:picLocks noChangeAspect="1"/>
+          </p:cNvPicPr>
+          <p:nvPr/>
+        </p:nvPicPr>
+        <p:blipFill>
+          <a:blip r:embed="rId2"/>
+          <a:stretch>
+            <a:fillRect/>
+          </a:stretch>
+        </p:blipFill>
+        <p:spPr>
+          <a:xfrm>
+            <a:off x="731520" y="1234440"/>
+            <a:ext cx="4343400" cy="4343400"/>
+          </a:xfrm>
+          <a:prstGeom prst="rect">
+            <a:avLst/>
+          </a:prstGeom>
+        </p:spPr>
+      </p:pic>
+      <p:sp>
+        <p:nvSpPr>
+          <p:cNvPr id="7" name="Rounded Rectangle 6"/>
           <p:cNvSpPr/>
           <p:nvPr/>
         </p:nvSpPr>
         <p:spPr>
           <a:xfrm>
-            <a:off x="7132320" y="1371600"/>
-            <a:ext cx="4327855" cy="3931920"/>
+            <a:off x="5303520" y="1234440"/>
+            <a:ext cx="6156655" cy="3429000"/>
           </a:xfrm>
           <a:prstGeom prst="roundRect">
             <a:avLst/>
@@ -13069,7 +12676,7 @@
           </a:solidFill>
           <a:ln w="19050">
             <a:solidFill>
-              <a:srgbClr val="059669"/>
+              <a:srgbClr val="E2E8F0"/>
             </a:solidFill>
           </a:ln>
         </p:spPr>
@@ -13088,34 +12695,40 @@
           </a:fontRef>
         </p:style>
         <p:txBody>
-          <a:bodyPr rtlCol="0" anchor="ctr" wrap="square" lIns="228600" tIns="228600" rIns="228600"/>
+          <a:bodyPr rtlCol="0" anchor="ctr" wrap="square" lIns="256032" rIns="256032" tIns="182880"/>
           <a:lstStyle/>
           <a:p>
             <a:pPr algn="ctr">
-              <a:defRPr sz="1400" b="1">
-                <a:solidFill>
-                  <a:srgbClr val="059669"/>
-                </a:solidFill>
-              </a:defRPr>
-            </a:pPr>
-            <a:r>
-              <a:t>🎙️ 現場真實對白錄音</a:t>
-            </a:r>
-          </a:p>
-          <a:p>
-            <a:pPr>
-              <a:defRPr b="1" sz="1100">
+              <a:defRPr sz="1300" b="1">
+                <a:solidFill>
+                  <a:srgbClr val="0284C7"/>
+                </a:solidFill>
+              </a:defRPr>
+            </a:pPr>
+            <a:r>
+              <a:t>📍 新創研發 · 高速運算實驗室</a:t>
+            </a:r>
+          </a:p>
+          <a:p>
+            <a:pPr>
+              <a:spcBef>
+                <a:spcPts val="600"/>
+              </a:spcBef>
+              <a:defRPr sz="1100" b="1">
                 <a:solidFill>
                   <a:srgbClr val="1E293B"/>
                 </a:solidFill>
               </a:defRPr>
             </a:pPr>
             <a:r>
-              <a:t>• 年輕工程師</a:t>
-            </a:r>
-          </a:p>
-          <a:p>
-            <a:pPr>
+              <a:t>【封版倒數 36h】</a:t>
+            </a:r>
+          </a:p>
+          <a:p>
+            <a:pPr>
+              <a:lnSpc>
+                <a:spcPct val="125000"/>
+              </a:lnSpc>
               <a:defRPr sz="1050">
                 <a:solidFill>
                   <a:srgbClr val="475569"/>
@@ -13123,24 +12736,29 @@
               </a:defRPr>
             </a:pPr>
             <a:r>
-              <a:t>「守舊架構只會讓我們落後競品。先上了再說，明天真有 Bug 我通宵 Hotfix！」</a:t>
-            </a:r>
-            <a:br/>
-          </a:p>
-          <a:p>
-            <a:pPr>
-              <a:defRPr b="1" sz="1100">
+              <a:t>站立會議上，年輕核心工程師直接對你嗆聲：「你昨天定的架構太保守了！」</a:t>
+            </a:r>
+          </a:p>
+          <a:p>
+            <a:pPr>
+              <a:spcBef>
+                <a:spcPts val="600"/>
+              </a:spcBef>
+              <a:defRPr sz="1100" b="1">
                 <a:solidFill>
                   <a:srgbClr val="1E293B"/>
                 </a:solidFill>
               </a:defRPr>
             </a:pPr>
             <a:r>
-              <a:t>• 品保主管</a:t>
-            </a:r>
-          </a:p>
-          <a:p>
-            <a:pPr>
+              <a:t>【激進提案】</a:t>
+            </a:r>
+          </a:p>
+          <a:p>
+            <a:pPr>
+              <a:lnSpc>
+                <a:spcPct val="125000"/>
+              </a:lnSpc>
               <a:defRPr sz="1050">
                 <a:solidFill>
                   <a:srgbClr val="475569"/>
@@ -13148,24 +12766,29 @@
               </a:defRPr>
             </a:pPr>
             <a:r>
-              <a:t>「還有 15% 邊界測試沒跑完，直接上線有風險，但這確實是我們團隊一貫的極客試錯作風……」</a:t>
-            </a:r>
-            <a:br/>
-          </a:p>
-          <a:p>
-            <a:pPr>
-              <a:defRPr b="1" sz="1100">
+              <a:t>他拿出私下寫的新演算法原型：「效能提升兩倍！現在就推上線，有問題明天再線上修補！」（邊界條件一成五未測）</a:t>
+            </a:r>
+          </a:p>
+          <a:p>
+            <a:pPr>
+              <a:spcBef>
+                <a:spcPts val="600"/>
+              </a:spcBef>
+              <a:defRPr sz="1100" b="1">
                 <a:solidFill>
                   <a:srgbClr val="1E293B"/>
                 </a:solidFill>
               </a:defRPr>
             </a:pPr>
             <a:r>
-              <a:t>• 團隊其他工程師</a:t>
-            </a:r>
-          </a:p>
-          <a:p>
-            <a:pPr>
+              <a:t>【全員起鬨】</a:t>
+            </a:r>
+          </a:p>
+          <a:p>
+            <a:pPr>
+              <a:lnSpc>
+                <a:spcPct val="125000"/>
+              </a:lnSpc>
               <a:defRPr sz="1050">
                 <a:solidFill>
                   <a:srgbClr val="475569"/>
@@ -13173,22 +12796,51 @@
               </a:defRPr>
             </a:pPr>
             <a:r>
-              <a:t>「我同意，在矽谷速度大於完美，等跑完所有測試市場早就被搶走了！」</a:t>
-            </a:r>
-            <a:br/>
-          </a:p>
-        </p:txBody>
-      </p:sp>
-      <p:sp>
-        <p:nvSpPr>
-          <p:cNvPr id="7" name="Rounded Rectangle 6"/>
+              <a:t>團隊成員紛紛附和：「值得賭一把！」「先上了再說！」</a:t>
+            </a:r>
+          </a:p>
+          <a:p>
+            <a:pPr>
+              <a:spcBef>
+                <a:spcPts val="600"/>
+              </a:spcBef>
+              <a:defRPr sz="1100" b="1">
+                <a:solidFill>
+                  <a:srgbClr val="1E293B"/>
+                </a:solidFill>
+              </a:defRPr>
+            </a:pPr>
+            <a:r>
+              <a:t>【品保沉默】</a:t>
+            </a:r>
+          </a:p>
+          <a:p>
+            <a:pPr>
+              <a:lnSpc>
+                <a:spcPct val="125000"/>
+              </a:lnSpc>
+              <a:defRPr sz="1050">
+                <a:solidFill>
+                  <a:srgbClr val="475569"/>
+                </a:solidFill>
+              </a:defRPr>
+            </a:pPr>
+            <a:r>
+              <a:t>品保主管面色凝重，沉默看向你等待定奪……倒數只剩 35:58:40！</a:t>
+            </a:r>
+          </a:p>
+        </p:txBody>
+      </p:sp>
+      <p:sp>
+        <p:nvSpPr>
+          <p:cNvPr id="8" name="Rounded Rectangle 7"/>
           <p:cNvSpPr/>
           <p:nvPr/>
         </p:nvSpPr>
         <p:spPr>
           <a:xfrm>
-            <a:off x="731520" y="5486400"/>
-            <a:ext cx="10728655" cy="868680"/>
+            <a:off x="5303520" y="4800600"/>
+            <a:ext cx="6156655" cy="868680"/>
           </a:xfrm>
           <a:prstGeom prst="roundRect">
             <a:avLst/>
@@ -13215,18 +12867,18 @@
           </a:fontRef>
         </p:style>
         <p:txBody>
-          <a:bodyPr rtlCol="0" anchor="ctr" wrap="square"/>
+          <a:bodyPr rtlCol="0" anchor="ctr" wrap="square" lIns="228600" rIns="228600" tIns="137160"/>
           <a:lstStyle/>
           <a:p>
             <a:pPr algn="ctr">
-              <a:defRPr sz="1300" b="1">
+              <a:defRPr sz="1200" b="1">
                 <a:solidFill>
                   <a:srgbClr val="FEF3C7"/>
                 </a:solidFill>
               </a:defRPr>
             </a:pPr>
             <a:r>
-              <a:t>⏱️ 小組任務（倒數 3 分鐘）：面對扁平直接、崇尚快速試錯的團隊文化，你們這組的決策座標應釘在哪裡？</a:t>
+              <a:t>⏱️ 決策課題：面對扁平直接、崇尚速度勝於完美的團隊，你的決策座標落點在哪裡？</a:t>
             </a:r>
           </a:p>
         </p:txBody>

--- a/誰是文化王_備案簡報_Who_Is_Culture_King.pptx
+++ b/誰是文化王_備案簡報_Who_Is_Culture_King.pptx
@@ -5853,7 +5853,7 @@
         <p:spPr>
           <a:xfrm>
             <a:off x="676656" y="1179576"/>
-            <a:ext cx="4453128" cy="4453128"/>
+            <a:ext cx="5138928" cy="5138928"/>
           </a:xfrm>
           <a:prstGeom prst="roundRect">
             <a:avLst/>
@@ -5906,7 +5906,7 @@
         <p:spPr>
           <a:xfrm>
             <a:off x="731520" y="1234440"/>
-            <a:ext cx="4343400" cy="4343400"/>
+            <a:ext cx="5029200" cy="5029200"/>
           </a:xfrm>
           <a:prstGeom prst="rect">
             <a:avLst/>
@@ -5921,8 +5921,8 @@
         </p:nvSpPr>
         <p:spPr>
           <a:xfrm>
-            <a:off x="5303520" y="1234440"/>
-            <a:ext cx="6156655" cy="3429000"/>
+            <a:off x="5989320" y="1234440"/>
+            <a:ext cx="5468112" cy="3886200"/>
           </a:xfrm>
           <a:prstGeom prst="roundRect">
             <a:avLst/>
@@ -5951,7 +5951,7 @@
           </a:fontRef>
         </p:style>
         <p:txBody>
-          <a:bodyPr rtlCol="0" anchor="ctr" wrap="square" lIns="256032" rIns="256032" tIns="182880"/>
+          <a:bodyPr rtlCol="0" anchor="ctr" wrap="square" lIns="256032" rIns="256032" tIns="201168"/>
           <a:lstStyle/>
           <a:p>
             <a:pPr algn="ctr">
@@ -6095,8 +6095,8 @@
         </p:nvSpPr>
         <p:spPr>
           <a:xfrm>
-            <a:off x="5303520" y="4800600"/>
-            <a:ext cx="6156655" cy="868680"/>
+            <a:off x="5989320" y="5257800"/>
+            <a:ext cx="5468112" cy="1005840"/>
           </a:xfrm>
           <a:prstGeom prst="roundRect">
             <a:avLst/>
@@ -10365,7 +10365,7 @@
         <p:spPr>
           <a:xfrm>
             <a:off x="676656" y="1179576"/>
-            <a:ext cx="4453128" cy="4453128"/>
+            <a:ext cx="5138928" cy="5138928"/>
           </a:xfrm>
           <a:prstGeom prst="roundRect">
             <a:avLst/>
@@ -10418,7 +10418,7 @@
         <p:spPr>
           <a:xfrm>
             <a:off x="731520" y="1234440"/>
-            <a:ext cx="4343400" cy="4343400"/>
+            <a:ext cx="5029200" cy="5029200"/>
           </a:xfrm>
           <a:prstGeom prst="rect">
             <a:avLst/>
@@ -10433,8 +10433,8 @@
         </p:nvSpPr>
         <p:spPr>
           <a:xfrm>
-            <a:off x="5303520" y="1234440"/>
-            <a:ext cx="6156655" cy="3429000"/>
+            <a:off x="5989320" y="1234440"/>
+            <a:ext cx="5468112" cy="3886200"/>
           </a:xfrm>
           <a:prstGeom prst="roundRect">
             <a:avLst/>
@@ -10463,7 +10463,7 @@
           </a:fontRef>
         </p:style>
         <p:txBody>
-          <a:bodyPr rtlCol="0" anchor="ctr" wrap="square" lIns="256032" rIns="256032" tIns="182880"/>
+          <a:bodyPr rtlCol="0" anchor="ctr" wrap="square" lIns="256032" rIns="256032" tIns="201168"/>
           <a:lstStyle/>
           <a:p>
             <a:pPr algn="ctr">
@@ -10607,8 +10607,8 @@
         </p:nvSpPr>
         <p:spPr>
           <a:xfrm>
-            <a:off x="5303520" y="4800600"/>
-            <a:ext cx="6156655" cy="868680"/>
+            <a:off x="5989320" y="5257800"/>
+            <a:ext cx="5468112" cy="1005840"/>
           </a:xfrm>
           <a:prstGeom prst="roundRect">
             <a:avLst/>
@@ -11481,7 +11481,7 @@
         <p:spPr>
           <a:xfrm>
             <a:off x="676656" y="1179576"/>
-            <a:ext cx="4453128" cy="4453128"/>
+            <a:ext cx="5138928" cy="5138928"/>
           </a:xfrm>
           <a:prstGeom prst="roundRect">
             <a:avLst/>
@@ -11534,7 +11534,7 @@
         <p:spPr>
           <a:xfrm>
             <a:off x="731520" y="1234440"/>
-            <a:ext cx="4343400" cy="4343400"/>
+            <a:ext cx="5029200" cy="5029200"/>
           </a:xfrm>
           <a:prstGeom prst="rect">
             <a:avLst/>
@@ -11549,8 +11549,8 @@
         </p:nvSpPr>
         <p:spPr>
           <a:xfrm>
-            <a:off x="5303520" y="1234440"/>
-            <a:ext cx="6156655" cy="3429000"/>
+            <a:off x="5989320" y="1234440"/>
+            <a:ext cx="5468112" cy="3886200"/>
           </a:xfrm>
           <a:prstGeom prst="roundRect">
             <a:avLst/>
@@ -11579,7 +11579,7 @@
           </a:fontRef>
         </p:style>
         <p:txBody>
-          <a:bodyPr rtlCol="0" anchor="ctr" wrap="square" lIns="256032" rIns="256032" tIns="182880"/>
+          <a:bodyPr rtlCol="0" anchor="ctr" wrap="square" lIns="256032" rIns="256032" tIns="201168"/>
           <a:lstStyle/>
           <a:p>
             <a:pPr algn="ctr">
@@ -11723,8 +11723,8 @@
         </p:nvSpPr>
         <p:spPr>
           <a:xfrm>
-            <a:off x="5303520" y="4800600"/>
-            <a:ext cx="6156655" cy="868680"/>
+            <a:off x="5989320" y="5257800"/>
+            <a:ext cx="5468112" cy="1005840"/>
           </a:xfrm>
           <a:prstGeom prst="roundRect">
             <a:avLst/>
@@ -12597,7 +12597,7 @@
         <p:spPr>
           <a:xfrm>
             <a:off x="676656" y="1179576"/>
-            <a:ext cx="4453128" cy="4453128"/>
+            <a:ext cx="5138928" cy="5138928"/>
           </a:xfrm>
           <a:prstGeom prst="roundRect">
             <a:avLst/>
@@ -12650,7 +12650,7 @@
         <p:spPr>
           <a:xfrm>
             <a:off x="731520" y="1234440"/>
-            <a:ext cx="4343400" cy="4343400"/>
+            <a:ext cx="5029200" cy="5029200"/>
           </a:xfrm>
           <a:prstGeom prst="rect">
             <a:avLst/>
@@ -12665,8 +12665,8 @@
         </p:nvSpPr>
         <p:spPr>
           <a:xfrm>
-            <a:off x="5303520" y="1234440"/>
-            <a:ext cx="6156655" cy="3429000"/>
+            <a:off x="5989320" y="1234440"/>
+            <a:ext cx="5468112" cy="3886200"/>
           </a:xfrm>
           <a:prstGeom prst="roundRect">
             <a:avLst/>
@@ -12695,7 +12695,7 @@
           </a:fontRef>
         </p:style>
         <p:txBody>
-          <a:bodyPr rtlCol="0" anchor="ctr" wrap="square" lIns="256032" rIns="256032" tIns="182880"/>
+          <a:bodyPr rtlCol="0" anchor="ctr" wrap="square" lIns="256032" rIns="256032" tIns="201168"/>
           <a:lstStyle/>
           <a:p>
             <a:pPr algn="ctr">
@@ -12839,8 +12839,8 @@
         </p:nvSpPr>
         <p:spPr>
           <a:xfrm>
-            <a:off x="5303520" y="4800600"/>
-            <a:ext cx="6156655" cy="868680"/>
+            <a:off x="5989320" y="5257800"/>
+            <a:ext cx="5468112" cy="1005840"/>
           </a:xfrm>
           <a:prstGeom prst="roundRect">
             <a:avLst/>

--- a/誰是文化王_備案簡報_Who_Is_Culture_King.pptx
+++ b/誰是文化王_備案簡報_Who_Is_Culture_King.pptx
@@ -1287,7 +1287,7 @@
           <a:lstStyle/>
           <a:p>
             <a:r>
-              <a:t>【引導提示】為什麼總工會上不反對會後不動？為什麼總工要嚴懲越級寫信的年輕工程師？</a:t>
+              <a:t>【引導提示】為什麼技術主管會上不反對會後不動？為什麼技術主管要嚴懲越級寫信的年輕工程師？</a:t>
             </a:r>
           </a:p>
         </p:txBody>
@@ -10489,7 +10489,7 @@
               </a:defRPr>
             </a:pPr>
             <a:r>
-              <a:t>【會議現場】</a:t>
+              <a:t>【週一全體大會】</a:t>
             </a:r>
           </a:p>
           <a:p>
@@ -10504,7 +10504,7 @@
               </a:defRPr>
             </a:pPr>
             <a:r>
-              <a:t>你：「縮短老練測試工時 20%，大家有沒有異議？」全場低頭抄筆記，一片沉默……</a:t>
+              <a:t>你：「提議縮短高溫測試工時兩成，大家有無異議？」全場低頭抄筆記，一片沉默……</a:t>
             </a:r>
           </a:p>
           <a:p>
@@ -10519,7 +10519,7 @@
               </a:defRPr>
             </a:pPr>
             <a:r>
-              <a:t>【資深總工】</a:t>
+              <a:t>【技術主管態度】</a:t>
             </a:r>
           </a:p>
           <a:p>
@@ -10534,7 +10534,7 @@
               </a:defRPr>
             </a:pPr>
             <a:r>
-              <a:t>總工微笑：「我們會盡力研究。」你心想：太好了，大家都同意！</a:t>
+              <a:t>技術主管微笑：「我們會盡力研究。」你心想：太好了，大家都同意！</a:t>
             </a:r>
           </a:p>
           <a:p>
@@ -10549,7 +10549,7 @@
               </a:defRPr>
             </a:pPr>
             <a:r>
-              <a:t>【週三清晨】</a:t>
+              <a:t>【週三產線現場】</a:t>
             </a:r>
           </a:p>
           <a:p>
@@ -10564,7 +10564,7 @@
               </a:defRPr>
             </a:pPr>
             <a:r>
-              <a:t>來到產線，測試爐工時仍為 100%，產線完全沒動！</a:t>
+              <a:t>來到產線，測試爐工時仍為百分之百，產線完全沒動！</a:t>
             </a:r>
           </a:p>
           <a:p>
@@ -10579,7 +10579,7 @@
               </a:defRPr>
             </a:pPr>
             <a:r>
-              <a:t>【茶水間外】</a:t>
+              <a:t>【茶水間外衝突】</a:t>
             </a:r>
           </a:p>
           <a:p>
@@ -10594,7 +10594,7 @@
               </a:defRPr>
             </a:pPr>
             <a:r>
-              <a:t>總工嚴斥昨晚寫私信給你的年輕人：「不懂規矩！破壞團隊程序！」</a:t>
+              <a:t>技術主管嚴厲斥責昨晚寫私信給你的年輕人：「不懂規矩！破壞團隊程序！」</a:t>
             </a:r>
           </a:p>
         </p:txBody>

--- a/誰是文化王_備案簡報_Who_Is_Culture_King.pptx
+++ b/誰是文化王_備案簡報_Who_Is_Culture_King.pptx
@@ -1497,7 +1497,7 @@
           <a:lstStyle/>
           <a:p>
             <a:r>
-              <a:t>【計分引導】靶心座標為 (84, 18)。交期只剩 4 小時的危機中，尋求共識會被視為卸責。</a:t>
+              <a:t>【計分引導】靶心座標為 (84, 18)。交期只剩四小時的危機中，尋求共識會被視為卸責。</a:t>
             </a:r>
           </a:p>
         </p:txBody>
@@ -1567,7 +1567,7 @@
           <a:lstStyle/>
           <a:p>
             <a:r>
-              <a:t>【引導提示】年輕人敢當面挑戰主管反映極低權力距離；先上線有問題再修補反映小 d 速決思維。</a:t>
+              <a:t>【引導提示】年輕人敢當面挑戰主管反映極低權力距離；先上線有問題再修補反映小速決思維。</a:t>
             </a:r>
           </a:p>
         </p:txBody>
@@ -5648,7 +5648,7 @@
               </a:defRPr>
             </a:pPr>
             <a:r>
-              <a:t>矽谷敏捷試錯模式，組織極度扁平，決策採小寫 d 快速推進與動態修補。</a:t>
+              <a:t>矽谷敏捷試錯模式，組織極度扁平，決策採快速推進與動態修補。</a:t>
             </a:r>
           </a:p>
           <a:p>
@@ -5977,7 +5977,7 @@
               </a:defRPr>
             </a:pPr>
             <a:r>
-              <a:t>【後台突發】</a:t>
+              <a:t>【發表會前兩小時】</a:t>
             </a:r>
           </a:p>
           <a:p>
@@ -5992,7 +5992,7 @@
               </a:defRPr>
             </a:pPr>
             <a:r>
-              <a:t>全球發表會倒數 02:00:00，最大客戶技術長帶著兩名年輕測試員突然直接走進後台。</a:t>
+              <a:t>全球發表會倒數兩小時，最大客戶技術長帶著兩名年輕測試員突然直接走進後台。</a:t>
             </a:r>
           </a:p>
           <a:p>
@@ -6007,7 +6007,7 @@
               </a:defRPr>
             </a:pPr>
             <a:r>
-              <a:t>【報告攤牌】</a:t>
+              <a:t>【現場攤牌報告】</a:t>
             </a:r>
           </a:p>
           <a:p>
@@ -6037,7 +6037,7 @@
               </a:defRPr>
             </a:pPr>
             <a:r>
-              <a:t>【基層聲明】</a:t>
+              <a:t>【基層堅持把關】</a:t>
             </a:r>
           </a:p>
           <a:p>
@@ -6067,7 +6067,7 @@
               </a:defRPr>
             </a:pPr>
             <a:r>
-              <a:t>【拒絕妥協】</a:t>
+              <a:t>【拒絕私下妥協】</a:t>
             </a:r>
           </a:p>
           <a:p>
@@ -6134,7 +6134,7 @@
               </a:defRPr>
             </a:pPr>
             <a:r>
-              <a:t>⏱️ 決策課題：面對基層擁有完全否決權、堅持透明共審的團隊，你的領導決策座標應落在哪裡？</a:t>
+              <a:t>⏱️ 決策課題：發表會倒數兩小時，面對客戶技術員在後台強硬阻擋放行，你的領導決策座標落點在哪裡？</a:t>
             </a:r>
           </a:p>
         </p:txBody>
@@ -10646,7 +10646,7 @@
               </a:defRPr>
             </a:pPr>
             <a:r>
-              <a:t>⏱️ 決策課題：面對表面和諧、實則嚴守階層與私下共識的團隊，你的領導決策座標在哪裡？</a:t>
+              <a:t>⏱️ 決策課題：面對會議全員沉默抄筆記、會後產線完全不動的局面，你的領導決策座標落點在哪裡？</a:t>
             </a:r>
           </a:p>
         </p:txBody>
@@ -11605,7 +11605,7 @@
               </a:defRPr>
             </a:pPr>
             <a:r>
-              <a:t>【夜班 02:10】</a:t>
+              <a:t>【凌晨兩點十分】</a:t>
             </a:r>
           </a:p>
           <a:p>
@@ -11620,7 +11620,7 @@
               </a:defRPr>
             </a:pPr>
             <a:r>
-              <a:t>塗佈機良率暴跌至 48%！產線領班大驚失色。</a:t>
+              <a:t>塗佈機良率雪崩跌至四成八！產線領班大驚失色。</a:t>
             </a:r>
           </a:p>
           <a:p>
@@ -11635,7 +11635,7 @@
               </a:defRPr>
             </a:pPr>
             <a:r>
-              <a:t>【現場下令】</a:t>
+              <a:t>【廠長強制停機】</a:t>
             </a:r>
           </a:p>
           <a:p>
@@ -11665,7 +11665,7 @@
               </a:defRPr>
             </a:pPr>
             <a:r>
-              <a:t>【群組爭吵】</a:t>
+              <a:t>【群組爭吵甩鍋】</a:t>
             </a:r>
           </a:p>
           <a:p>
@@ -11695,7 +11695,7 @@
               </a:defRPr>
             </a:pPr>
             <a:r>
-              <a:t>【領班求救】</a:t>
+              <a:t>【產線領班求救】</a:t>
             </a:r>
           </a:p>
           <a:p>
@@ -11762,7 +11762,7 @@
               </a:defRPr>
             </a:pPr>
             <a:r>
-              <a:t>⏱️ 決策課題：距離交貨剩 4 小時，團隊恐懼承擔責任，你的領導決策座標應落在哪裡？</a:t>
+              <a:t>⏱️ 決策課題：距離交貨剩四小時，面對團隊恐懼責任且無人敢動手，你的領導決策座標落點在哪裡？</a:t>
             </a:r>
           </a:p>
         </p:txBody>
@@ -12721,7 +12721,7 @@
               </a:defRPr>
             </a:pPr>
             <a:r>
-              <a:t>【封版倒數 36h】</a:t>
+              <a:t>【封版倒數三十六小時】</a:t>
             </a:r>
           </a:p>
           <a:p>
@@ -12751,7 +12751,7 @@
               </a:defRPr>
             </a:pPr>
             <a:r>
-              <a:t>【激進提案】</a:t>
+              <a:t>【大膽激進提案】</a:t>
             </a:r>
           </a:p>
           <a:p>
@@ -12781,7 +12781,7 @@
               </a:defRPr>
             </a:pPr>
             <a:r>
-              <a:t>【全員起鬨】</a:t>
+              <a:t>【團隊全員起鬨】</a:t>
             </a:r>
           </a:p>
           <a:p>
@@ -12811,7 +12811,7 @@
               </a:defRPr>
             </a:pPr>
             <a:r>
-              <a:t>【品保沉默】</a:t>
+              <a:t>【品保主管沉默】</a:t>
             </a:r>
           </a:p>
           <a:p>
@@ -12826,7 +12826,7 @@
               </a:defRPr>
             </a:pPr>
             <a:r>
-              <a:t>品保主管面色凝重，沉默看向你等待定奪……倒數只剩 35:58:40！</a:t>
+              <a:t>品保主管面色凝重，沉默看向你等待定奪……倒數只剩三十五小時！</a:t>
             </a:r>
           </a:p>
         </p:txBody>
@@ -12878,7 +12878,7 @@
               </a:defRPr>
             </a:pPr>
             <a:r>
-              <a:t>⏱️ 決策課題：面對扁平直接、崇尚速度勝於完美的團隊，你的決策座標落點在哪裡？</a:t>
+              <a:t>⏱️ 決策課題：面對成員大膽挑戰既有架構並要求立即上線，你的領導決策座標落點在哪裡？</a:t>
             </a:r>
           </a:p>
         </p:txBody>

--- a/誰是文化王_備案簡報_Who_Is_Culture_King.pptx
+++ b/誰是文化王_備案簡報_Who_Is_Culture_King.pptx
@@ -5231,6 +5231,21 @@
           <a:p>
             <a:pPr algn="ctr">
               <a:spcBef>
+                <a:spcPts val="400"/>
+              </a:spcBef>
+              <a:defRPr sz="1300" b="1">
+                <a:solidFill>
+                  <a:srgbClr val="93C5FD"/>
+                </a:solidFill>
+              </a:defRPr>
+            </a:pPr>
+            <a:r>
+              <a:t>【代表國家：美國（矽谷）、澳洲、加拿大、英國】</a:t>
+            </a:r>
+          </a:p>
+          <a:p>
+            <a:pPr algn="ctr">
+              <a:spcBef>
                 <a:spcPts val="600"/>
               </a:spcBef>
               <a:defRPr sz="1200">
@@ -5607,11 +5622,11 @@
           </a:fontRef>
         </p:style>
         <p:txBody>
-          <a:bodyPr rtlCol="0" anchor="ctr" wrap="square" lIns="365760" rIns="365760" tIns="411480"/>
+          <a:bodyPr rtlCol="0" anchor="ctr" wrap="square" lIns="365760" rIns="365760" tIns="365760"/>
           <a:lstStyle/>
           <a:p>
             <a:pPr algn="ctr">
-              <a:defRPr sz="1900" b="1">
+              <a:defRPr sz="2000" b="1">
                 <a:solidFill>
                   <a:srgbClr val="1E293B"/>
                 </a:solidFill>
@@ -5624,9 +5639,24 @@
           <a:p>
             <a:pPr>
               <a:spcBef>
-                <a:spcPts val="1800"/>
+                <a:spcPts val="400"/>
               </a:spcBef>
-              <a:defRPr sz="1600" b="1">
+              <a:defRPr sz="1500" b="1">
+                <a:solidFill>
+                  <a:srgbClr val="0284C7"/>
+                </a:solidFill>
+              </a:defRPr>
+            </a:pPr>
+            <a:r>
+              <a:t>代表國家：美國（矽谷）、澳洲、加拿大、英國</a:t>
+            </a:r>
+          </a:p>
+          <a:p>
+            <a:pPr>
+              <a:spcBef>
+                <a:spcPts val="1600"/>
+              </a:spcBef>
+              <a:defRPr sz="1700" b="1">
                 <a:solidFill>
                   <a:srgbClr val="1E293B"/>
                 </a:solidFill>
@@ -5641,7 +5671,7 @@
               <a:lnSpc>
                 <a:spcPct val="135000"/>
               </a:lnSpc>
-              <a:defRPr sz="1300">
+              <a:defRPr sz="1450">
                 <a:solidFill>
                   <a:srgbClr val="475569"/>
                 </a:solidFill>
@@ -5654,9 +5684,9 @@
           <a:p>
             <a:pPr>
               <a:spcBef>
-                <a:spcPts val="1800"/>
+                <a:spcPts val="1600"/>
               </a:spcBef>
-              <a:defRPr sz="1600" b="1">
+              <a:defRPr sz="1700" b="1">
                 <a:solidFill>
                   <a:srgbClr val="1E293B"/>
                 </a:solidFill>
@@ -5671,7 +5701,7 @@
               <a:lnSpc>
                 <a:spcPct val="135000"/>
               </a:lnSpc>
-              <a:defRPr sz="1300">
+              <a:defRPr sz="1450">
                 <a:solidFill>
                   <a:srgbClr val="475569"/>
                 </a:solidFill>
@@ -5684,9 +5714,9 @@
           <a:p>
             <a:pPr>
               <a:spcBef>
-                <a:spcPts val="1800"/>
+                <a:spcPts val="1600"/>
               </a:spcBef>
-              <a:defRPr sz="1600" b="1">
+              <a:defRPr sz="1700" b="1">
                 <a:solidFill>
                   <a:srgbClr val="1E293B"/>
                 </a:solidFill>
@@ -5701,7 +5731,7 @@
               <a:lnSpc>
                 <a:spcPct val="135000"/>
               </a:lnSpc>
-              <a:defRPr sz="1300">
+              <a:defRPr sz="1450">
                 <a:solidFill>
                   <a:srgbClr val="475569"/>
                 </a:solidFill>
@@ -6347,6 +6377,21 @@
           <a:p>
             <a:pPr algn="ctr">
               <a:spcBef>
+                <a:spcPts val="400"/>
+              </a:spcBef>
+              <a:defRPr sz="1300" b="1">
+                <a:solidFill>
+                  <a:srgbClr val="93C5FD"/>
+                </a:solidFill>
+              </a:defRPr>
+            </a:pPr>
+            <a:r>
+              <a:t>【代表國家：荷蘭、瑞典、丹麥、挪威（北歐與低地國）】</a:t>
+            </a:r>
+          </a:p>
+          <a:p>
+            <a:pPr algn="ctr">
+              <a:spcBef>
                 <a:spcPts val="600"/>
               </a:spcBef>
               <a:defRPr sz="1200">
@@ -6723,11 +6768,11 @@
           </a:fontRef>
         </p:style>
         <p:txBody>
-          <a:bodyPr rtlCol="0" anchor="ctr" wrap="square" lIns="365760" rIns="365760" tIns="411480"/>
+          <a:bodyPr rtlCol="0" anchor="ctr" wrap="square" lIns="365760" rIns="365760" tIns="365760"/>
           <a:lstStyle/>
           <a:p>
             <a:pPr algn="ctr">
-              <a:defRPr sz="1900" b="1">
+              <a:defRPr sz="2000" b="1">
                 <a:solidFill>
                   <a:srgbClr val="1E293B"/>
                 </a:solidFill>
@@ -6740,9 +6785,24 @@
           <a:p>
             <a:pPr>
               <a:spcBef>
-                <a:spcPts val="1800"/>
+                <a:spcPts val="400"/>
               </a:spcBef>
-              <a:defRPr sz="1600" b="1">
+              <a:defRPr sz="1500" b="1">
+                <a:solidFill>
+                  <a:srgbClr val="0284C7"/>
+                </a:solidFill>
+              </a:defRPr>
+            </a:pPr>
+            <a:r>
+              <a:t>代表國家：荷蘭、瑞典、丹麥、挪威（北歐與低地國）</a:t>
+            </a:r>
+          </a:p>
+          <a:p>
+            <a:pPr>
+              <a:spcBef>
+                <a:spcPts val="1600"/>
+              </a:spcBef>
+              <a:defRPr sz="1700" b="1">
                 <a:solidFill>
                   <a:srgbClr val="1E293B"/>
                 </a:solidFill>
@@ -6757,7 +6817,7 @@
               <a:lnSpc>
                 <a:spcPct val="135000"/>
               </a:lnSpc>
-              <a:defRPr sz="1300">
+              <a:defRPr sz="1450">
                 <a:solidFill>
                   <a:srgbClr val="475569"/>
                 </a:solidFill>
@@ -6770,9 +6830,9 @@
           <a:p>
             <a:pPr>
               <a:spcBef>
-                <a:spcPts val="1800"/>
+                <a:spcPts val="1600"/>
               </a:spcBef>
-              <a:defRPr sz="1600" b="1">
+              <a:defRPr sz="1700" b="1">
                 <a:solidFill>
                   <a:srgbClr val="1E293B"/>
                 </a:solidFill>
@@ -6787,7 +6847,7 @@
               <a:lnSpc>
                 <a:spcPct val="135000"/>
               </a:lnSpc>
-              <a:defRPr sz="1300">
+              <a:defRPr sz="1450">
                 <a:solidFill>
                   <a:srgbClr val="475569"/>
                 </a:solidFill>
@@ -6800,9 +6860,9 @@
           <a:p>
             <a:pPr>
               <a:spcBef>
-                <a:spcPts val="1800"/>
+                <a:spcPts val="1600"/>
               </a:spcBef>
-              <a:defRPr sz="1600" b="1">
+              <a:defRPr sz="1700" b="1">
                 <a:solidFill>
                   <a:srgbClr val="1E293B"/>
                 </a:solidFill>
@@ -6817,7 +6877,7 @@
               <a:lnSpc>
                 <a:spcPct val="135000"/>
               </a:lnSpc>
-              <a:defRPr sz="1300">
+              <a:defRPr sz="1450">
                 <a:solidFill>
                   <a:srgbClr val="475569"/>
                 </a:solidFill>
@@ -10859,6 +10919,21 @@
           <a:p>
             <a:pPr algn="ctr">
               <a:spcBef>
+                <a:spcPts val="400"/>
+              </a:spcBef>
+              <a:defRPr sz="1300" b="1">
+                <a:solidFill>
+                  <a:srgbClr val="93C5FD"/>
+                </a:solidFill>
+              </a:defRPr>
+            </a:pPr>
+            <a:r>
+              <a:t>【代表國家：日本、韓國】</a:t>
+            </a:r>
+          </a:p>
+          <a:p>
+            <a:pPr algn="ctr">
+              <a:spcBef>
                 <a:spcPts val="600"/>
               </a:spcBef>
               <a:defRPr sz="1200">
@@ -11235,11 +11310,11 @@
           </a:fontRef>
         </p:style>
         <p:txBody>
-          <a:bodyPr rtlCol="0" anchor="ctr" wrap="square" lIns="365760" rIns="365760" tIns="411480"/>
+          <a:bodyPr rtlCol="0" anchor="ctr" wrap="square" lIns="365760" rIns="365760" tIns="365760"/>
           <a:lstStyle/>
           <a:p>
             <a:pPr algn="ctr">
-              <a:defRPr sz="1900" b="1">
+              <a:defRPr sz="2000" b="1">
                 <a:solidFill>
                   <a:srgbClr val="1E293B"/>
                 </a:solidFill>
@@ -11252,9 +11327,24 @@
           <a:p>
             <a:pPr>
               <a:spcBef>
-                <a:spcPts val="1800"/>
+                <a:spcPts val="400"/>
               </a:spcBef>
-              <a:defRPr sz="1600" b="1">
+              <a:defRPr sz="1500" b="1">
+                <a:solidFill>
+                  <a:srgbClr val="0284C7"/>
+                </a:solidFill>
+              </a:defRPr>
+            </a:pPr>
+            <a:r>
+              <a:t>代表國家：日本、韓國</a:t>
+            </a:r>
+          </a:p>
+          <a:p>
+            <a:pPr>
+              <a:spcBef>
+                <a:spcPts val="1600"/>
+              </a:spcBef>
+              <a:defRPr sz="1700" b="1">
                 <a:solidFill>
                   <a:srgbClr val="1E293B"/>
                 </a:solidFill>
@@ -11269,7 +11359,7 @@
               <a:lnSpc>
                 <a:spcPct val="135000"/>
               </a:lnSpc>
-              <a:defRPr sz="1300">
+              <a:defRPr sz="1450">
                 <a:solidFill>
                   <a:srgbClr val="475569"/>
                 </a:solidFill>
@@ -11282,9 +11372,9 @@
           <a:p>
             <a:pPr>
               <a:spcBef>
-                <a:spcPts val="1800"/>
+                <a:spcPts val="1600"/>
               </a:spcBef>
-              <a:defRPr sz="1600" b="1">
+              <a:defRPr sz="1700" b="1">
                 <a:solidFill>
                   <a:srgbClr val="1E293B"/>
                 </a:solidFill>
@@ -11299,7 +11389,7 @@
               <a:lnSpc>
                 <a:spcPct val="135000"/>
               </a:lnSpc>
-              <a:defRPr sz="1300">
+              <a:defRPr sz="1450">
                 <a:solidFill>
                   <a:srgbClr val="475569"/>
                 </a:solidFill>
@@ -11312,9 +11402,9 @@
           <a:p>
             <a:pPr>
               <a:spcBef>
-                <a:spcPts val="1800"/>
+                <a:spcPts val="1600"/>
               </a:spcBef>
-              <a:defRPr sz="1600" b="1">
+              <a:defRPr sz="1700" b="1">
                 <a:solidFill>
                   <a:srgbClr val="1E293B"/>
                 </a:solidFill>
@@ -11329,7 +11419,7 @@
               <a:lnSpc>
                 <a:spcPct val="135000"/>
               </a:lnSpc>
-              <a:defRPr sz="1300">
+              <a:defRPr sz="1450">
                 <a:solidFill>
                   <a:srgbClr val="475569"/>
                 </a:solidFill>
@@ -11975,6 +12065,21 @@
           <a:p>
             <a:pPr algn="ctr">
               <a:spcBef>
+                <a:spcPts val="400"/>
+              </a:spcBef>
+              <a:defRPr sz="1300" b="1">
+                <a:solidFill>
+                  <a:srgbClr val="93C5FD"/>
+                </a:solidFill>
+              </a:defRPr>
+            </a:pPr>
+            <a:r>
+              <a:t>【代表國家：中國、俄羅斯、印度、沙烏地阿拉伯】</a:t>
+            </a:r>
+          </a:p>
+          <a:p>
+            <a:pPr algn="ctr">
+              <a:spcBef>
                 <a:spcPts val="600"/>
               </a:spcBef>
               <a:defRPr sz="1200">
@@ -12351,11 +12456,11 @@
           </a:fontRef>
         </p:style>
         <p:txBody>
-          <a:bodyPr rtlCol="0" anchor="ctr" wrap="square" lIns="365760" rIns="365760" tIns="411480"/>
+          <a:bodyPr rtlCol="0" anchor="ctr" wrap="square" lIns="365760" rIns="365760" tIns="365760"/>
           <a:lstStyle/>
           <a:p>
             <a:pPr algn="ctr">
-              <a:defRPr sz="1900" b="1">
+              <a:defRPr sz="2000" b="1">
                 <a:solidFill>
                   <a:srgbClr val="1E293B"/>
                 </a:solidFill>
@@ -12368,9 +12473,24 @@
           <a:p>
             <a:pPr>
               <a:spcBef>
-                <a:spcPts val="1800"/>
+                <a:spcPts val="400"/>
               </a:spcBef>
-              <a:defRPr sz="1600" b="1">
+              <a:defRPr sz="1500" b="1">
+                <a:solidFill>
+                  <a:srgbClr val="0284C7"/>
+                </a:solidFill>
+              </a:defRPr>
+            </a:pPr>
+            <a:r>
+              <a:t>代表國家：中國、俄羅斯、印度、沙烏地阿拉伯</a:t>
+            </a:r>
+          </a:p>
+          <a:p>
+            <a:pPr>
+              <a:spcBef>
+                <a:spcPts val="1600"/>
+              </a:spcBef>
+              <a:defRPr sz="1700" b="1">
                 <a:solidFill>
                   <a:srgbClr val="1E293B"/>
                 </a:solidFill>
@@ -12385,7 +12505,7 @@
               <a:lnSpc>
                 <a:spcPct val="135000"/>
               </a:lnSpc>
-              <a:defRPr sz="1300">
+              <a:defRPr sz="1450">
                 <a:solidFill>
                   <a:srgbClr val="475569"/>
                 </a:solidFill>
@@ -12398,9 +12518,9 @@
           <a:p>
             <a:pPr>
               <a:spcBef>
-                <a:spcPts val="1800"/>
+                <a:spcPts val="1600"/>
               </a:spcBef>
-              <a:defRPr sz="1600" b="1">
+              <a:defRPr sz="1700" b="1">
                 <a:solidFill>
                   <a:srgbClr val="1E293B"/>
                 </a:solidFill>
@@ -12415,7 +12535,7 @@
               <a:lnSpc>
                 <a:spcPct val="135000"/>
               </a:lnSpc>
-              <a:defRPr sz="1300">
+              <a:defRPr sz="1450">
                 <a:solidFill>
                   <a:srgbClr val="475569"/>
                 </a:solidFill>
@@ -12428,9 +12548,9 @@
           <a:p>
             <a:pPr>
               <a:spcBef>
-                <a:spcPts val="1800"/>
+                <a:spcPts val="1600"/>
               </a:spcBef>
-              <a:defRPr sz="1600" b="1">
+              <a:defRPr sz="1700" b="1">
                 <a:solidFill>
                   <a:srgbClr val="1E293B"/>
                 </a:solidFill>
@@ -12445,7 +12565,7 @@
               <a:lnSpc>
                 <a:spcPct val="135000"/>
               </a:lnSpc>
-              <a:defRPr sz="1300">
+              <a:defRPr sz="1450">
                 <a:solidFill>
                   <a:srgbClr val="475569"/>
                 </a:solidFill>

--- a/誰是文化王_備案簡報_Who_Is_Culture_King.pptx
+++ b/誰是文化王_備案簡報_Who_Is_Culture_King.pptx
@@ -1287,7 +1287,7 @@
           <a:lstStyle/>
           <a:p>
             <a:r>
-              <a:t>【引導提示】為什麼技術主管會上不反對會後不動？為什麼技術主管要嚴懲越級寫信的年輕工程師？</a:t>
+              <a:t>【引導提示】為什麼技術主管會上不反對會後不動？為什麼員工私下批評未在會議前討論是破壞規則？</a:t>
             </a:r>
           </a:p>
         </p:txBody>
@@ -10639,7 +10639,7 @@
               </a:defRPr>
             </a:pPr>
             <a:r>
-              <a:t>【茶水間外衝突】</a:t>
+              <a:t>【茶水間外議論】</a:t>
             </a:r>
           </a:p>
           <a:p>
@@ -10654,7 +10654,7 @@
               </a:defRPr>
             </a:pPr>
             <a:r>
-              <a:t>技術主管嚴厲斥責昨晚寫私信給你的年輕人：「不懂規矩！破壞團隊程序！」</a:t>
+              <a:t>員工私下罵你破壞規則：「沒有在會議前先跟大家討論，根本不尊重專業！」</a:t>
             </a:r>
           </a:p>
         </p:txBody>

--- a/誰是文化王_備案簡報_Who_Is_Culture_King.pptx
+++ b/誰是文化王_備案簡報_Who_Is_Culture_King.pptx
@@ -5240,7 +5240,7 @@
               </a:defRPr>
             </a:pPr>
             <a:r>
-              <a:t>【代表國家：美國（矽谷）、澳洲、加拿大、英國】</a:t>
+              <a:t>【代表國家：美國、英國】</a:t>
             </a:r>
           </a:p>
           <a:p>
@@ -5648,7 +5648,7 @@
               </a:defRPr>
             </a:pPr>
             <a:r>
-              <a:t>代表國家：美國（矽谷）、澳洲、加拿大、英國</a:t>
+              <a:t>代表國家：美國、英國</a:t>
             </a:r>
           </a:p>
           <a:p>
@@ -6386,7 +6386,7 @@
               </a:defRPr>
             </a:pPr>
             <a:r>
-              <a:t>【代表國家：荷蘭、瑞典、丹麥、挪威（北歐與低地國）】</a:t>
+              <a:t>【代表國家：丹麥、荷蘭】</a:t>
             </a:r>
           </a:p>
           <a:p>
@@ -6794,7 +6794,7 @@
               </a:defRPr>
             </a:pPr>
             <a:r>
-              <a:t>代表國家：荷蘭、瑞典、丹麥、挪威（北歐與低地國）</a:t>
+              <a:t>代表國家：丹麥、荷蘭</a:t>
             </a:r>
           </a:p>
           <a:p>
@@ -7094,7 +7094,7 @@
               </a:defRPr>
             </a:pPr>
             <a:r>
-              <a:t>【日本、韓國】</a:t>
+              <a:t>【日本、德國】</a:t>
             </a:r>
           </a:p>
           <a:p>
@@ -7221,7 +7221,7 @@
               </a:defRPr>
             </a:pPr>
             <a:r>
-              <a:t>【荷蘭、北歐各國】</a:t>
+              <a:t>【丹麥、荷蘭】</a:t>
             </a:r>
           </a:p>
           <a:p>
@@ -7348,7 +7348,7 @@
               </a:defRPr>
             </a:pPr>
             <a:r>
-              <a:t>【美國矽谷、英國新創】</a:t>
+              <a:t>【美國、英國】</a:t>
             </a:r>
           </a:p>
           <a:p>
@@ -7360,7 +7360,7 @@
               </a:defRPr>
             </a:pPr>
             <a:r>
-              <a:t>• 決策機制：小 d 敏捷試錯</a:t>
+              <a:t>• 決策機制：小速決敏捷試錯</a:t>
             </a:r>
           </a:p>
           <a:p>
@@ -7475,7 +7475,7 @@
               </a:defRPr>
             </a:pPr>
             <a:r>
-              <a:t>【中國工廠、法國、印度】</a:t>
+              <a:t>【中國、法國】</a:t>
             </a:r>
           </a:p>
           <a:p>
@@ -9482,7 +9482,7 @@
               </a:defRPr>
             </a:pPr>
             <a:r>
-              <a:t>【日本、韓國】嚴明職級尊重與全員共識並存。正式會議僅為形式用印，真正的決策必須在會前依職級序列由下而上完成「會前私下摸底（根回）」。</a:t>
+              <a:t>【日本、德國】嚴明職級尊重與全員共識並存。正式會議僅為形式用印，真正的決策必須在會前依職級序列由下而上完成「會前私下摸底（根回）」。</a:t>
             </a:r>
           </a:p>
         </p:txBody>
@@ -9548,7 +9548,7 @@
               </a:defRPr>
             </a:pPr>
             <a:r>
-              <a:t>【荷蘭、北歐各國】基層與主管平起平坐，人人皆有一票否決權。領導者為「促進者」，追求刻在石碑上的神聖大承諾（大承諾）。</a:t>
+              <a:t>【丹麥、荷蘭】基層與主管平起平坐，人人皆有一票否決權。領導者為「促進者」，追求刻在石碑上的神聖大承諾。</a:t>
             </a:r>
           </a:p>
         </p:txBody>
@@ -9614,7 +9614,7 @@
               </a:defRPr>
             </a:pPr>
             <a:r>
-              <a:t>【美國矽谷、英國新創】扁平極客文化，鼓勵直抒己見甚至挑戰主管；但決策採「小速決」模式，先試跑、後續動態修補。</a:t>
+              <a:t>【美國、英國】扁平極客文化，鼓勵直抒己見甚至挑戰主管；但決策採「小速決」模式，先試跑、後續動態修補。</a:t>
             </a:r>
           </a:p>
         </p:txBody>
@@ -9680,7 +9680,7 @@
               </a:defRPr>
             </a:pPr>
             <a:r>
-              <a:t>【中國量產基地、法國、印度】強調最高主管威權指揮（最高指揮官模式）。危機時刻基層渴望明確指令，領導者必須一肩扛起成敗責任。</a:t>
+              <a:t>【中國、法國】強調最高主管威權指揮（最高指揮官模式）。危機時刻基層渴望明確指令，領導者必須一肩扛起成敗責任。</a:t>
             </a:r>
           </a:p>
         </p:txBody>
@@ -10928,7 +10928,7 @@
               </a:defRPr>
             </a:pPr>
             <a:r>
-              <a:t>【代表國家：日本、韓國】</a:t>
+              <a:t>【代表國家：日本、德國】</a:t>
             </a:r>
           </a:p>
           <a:p>
@@ -11336,7 +11336,7 @@
               </a:defRPr>
             </a:pPr>
             <a:r>
-              <a:t>代表國家：日本、韓國</a:t>
+              <a:t>代表國家：日本、德國</a:t>
             </a:r>
           </a:p>
           <a:p>
@@ -12074,7 +12074,7 @@
               </a:defRPr>
             </a:pPr>
             <a:r>
-              <a:t>【代表國家：中國、俄羅斯、印度、沙烏地阿拉伯】</a:t>
+              <a:t>【代表國家：中國、法國】</a:t>
             </a:r>
           </a:p>
           <a:p>
@@ -12482,7 +12482,7 @@
               </a:defRPr>
             </a:pPr>
             <a:r>
-              <a:t>代表國家：中國、俄羅斯、印度、沙烏地阿拉伯</a:t>
+              <a:t>代表國家：中國、法國</a:t>
             </a:r>
           </a:p>
           <a:p>

--- a/誰是文化王_備案簡報_Who_Is_Culture_King.pptx
+++ b/誰是文化王_備案簡報_Who_Is_Culture_King.pptx
@@ -587,7 +587,7 @@
           <a:lstStyle/>
           <a:p>
             <a:r>
-              <a:t>【計分引導】靶心座標為 (22, 24)。引導學員理解敏捷文化中的小速決思維。</a:t>
+              <a:t>【計分引導】靶心座標為 (22, 76)。引導學員理解敏捷文化中的小速決思維。</a:t>
             </a:r>
           </a:p>
         </p:txBody>
@@ -727,7 +727,7 @@
           <a:lstStyle/>
           <a:p>
             <a:r>
-              <a:t>【計分引導】靶心座標為 (18, 85)。至此四回合已全部揭曉，請各組加總四輪總積分！</a:t>
+              <a:t>【計分引導】靶心座標為 (18, 15)。至此四回合已全部揭曉，請各組加總四輪總積分！</a:t>
             </a:r>
           </a:p>
         </p:txBody>
@@ -1357,7 +1357,7 @@
           <a:lstStyle/>
           <a:p>
             <a:r>
-              <a:t>【計分引導】靶心座標為 (78, 82)。請計算距離 d = √[(X-78)² + (Y-82)²]，得分為 100 - d。</a:t>
+              <a:t>【計分引導】靶心座標為 (78, 18)。請計算距離 d = √[(X-78)² + (Y-18)²]，得分為 100 - d。</a:t>
             </a:r>
           </a:p>
         </p:txBody>
@@ -1497,7 +1497,7 @@
           <a:lstStyle/>
           <a:p>
             <a:r>
-              <a:t>【計分引導】靶心座標為 (84, 18)。交期只剩四小時的危機中，尋求共識會被視為卸責。</a:t>
+              <a:t>【計分引導】靶心座標為 (84, 82)。交期只剩四小時的危機中，尋求共識會被視為卸責。</a:t>
             </a:r>
           </a:p>
         </p:txBody>
@@ -5149,7 +5149,7 @@
               </a:defRPr>
             </a:pPr>
             <a:r>
-              <a:t>案例三 答案揭曉 · 第三象限（左下：橫軸 22，縱軸 24）</a:t>
+              <a:t>案例三 答案揭曉 · 左上象限（左上：橫軸 22，縱軸 76）</a:t>
             </a:r>
           </a:p>
         </p:txBody>
@@ -5201,7 +5201,7 @@
               </a:defRPr>
             </a:pPr>
             <a:r>
-              <a:t>正確答案（左下）</a:t>
+              <a:t>正確答案（左上）</a:t>
             </a:r>
           </a:p>
           <a:p>
@@ -5213,7 +5213,7 @@
               </a:defRPr>
             </a:pPr>
             <a:r>
-              <a:t>第三象限</a:t>
+              <a:t>左上象限</a:t>
             </a:r>
           </a:p>
           <a:p>
@@ -5225,7 +5225,7 @@
               </a:defRPr>
             </a:pPr>
             <a:r>
-              <a:t>平等主義 × 由上而下速決</a:t>
+              <a:t>平等 × 由上而下</a:t>
             </a:r>
           </a:p>
           <a:p>
@@ -5255,7 +5255,7 @@
               </a:defRPr>
             </a:pPr>
             <a:r>
-              <a:t>🎯 靶心座標：(22, 24)</a:t>
+              <a:t>🎯 靶心座標：(22, 76)</a:t>
             </a:r>
           </a:p>
           <a:p>
@@ -5284,6 +5284,84 @@
         <p:spPr>
           <a:xfrm>
             <a:off x="1645920" y="4114800"/>
+            <a:ext cx="1051560" cy="1051560"/>
+          </a:xfrm>
+          <a:prstGeom prst="roundRect">
+            <a:avLst/>
+          </a:prstGeom>
+          <a:solidFill>
+            <a:srgbClr val="EEF2FF"/>
+          </a:solidFill>
+          <a:ln w="12700">
+            <a:solidFill>
+              <a:srgbClr val="E2E8F0"/>
+            </a:solidFill>
+          </a:ln>
+        </p:spPr>
+        <p:style>
+          <a:lnRef idx="1">
+            <a:schemeClr val="accent1"/>
+          </a:lnRef>
+          <a:fillRef idx="3">
+            <a:schemeClr val="accent1"/>
+          </a:fillRef>
+          <a:effectRef idx="2">
+            <a:schemeClr val="accent1"/>
+          </a:effectRef>
+          <a:fontRef idx="minor">
+            <a:schemeClr val="lt1"/>
+          </a:fontRef>
+        </p:style>
+        <p:txBody>
+          <a:bodyPr rtlCol="0" anchor="ctr" wrap="square"/>
+          <a:lstStyle/>
+          <a:p>
+            <a:pPr algn="ctr">
+              <a:defRPr sz="1000" b="1">
+                <a:solidFill>
+                  <a:srgbClr val="1E293B"/>
+                </a:solidFill>
+              </a:defRPr>
+            </a:pPr>
+            <a:r>
+              <a:t>左上象限</a:t>
+            </a:r>
+          </a:p>
+          <a:p>
+            <a:pPr algn="ctr">
+              <a:defRPr sz="850">
+                <a:solidFill>
+                  <a:srgbClr val="475569"/>
+                </a:solidFill>
+              </a:defRPr>
+            </a:pPr>
+            <a:r>
+              <a:t>平等 × 由上而下</a:t>
+            </a:r>
+          </a:p>
+          <a:p>
+            <a:pPr algn="ctr">
+              <a:defRPr sz="850">
+                <a:solidFill>
+                  <a:srgbClr val="475569"/>
+                </a:solidFill>
+              </a:defRPr>
+            </a:pPr>
+            <a:r>
+              <a:t>（美國、英國）</a:t>
+            </a:r>
+          </a:p>
+        </p:txBody>
+      </p:sp>
+      <p:sp>
+        <p:nvSpPr>
+          <p:cNvPr id="7" name="Rounded Rectangle 6"/>
+          <p:cNvSpPr/>
+          <p:nvPr/>
+        </p:nvSpPr>
+        <p:spPr>
+          <a:xfrm>
+            <a:off x="2697480" y="4114800"/>
             <a:ext cx="1051560" cy="1051560"/>
           </a:xfrm>
           <a:prstGeom prst="roundRect">
@@ -5324,32 +5402,44 @@
               </a:defRPr>
             </a:pPr>
             <a:r>
-              <a:t>第二象限（左上）</a:t>
+              <a:t>右上象限</a:t>
             </a:r>
           </a:p>
           <a:p>
             <a:pPr algn="ctr">
-              <a:defRPr sz="900">
+              <a:defRPr sz="850">
                 <a:solidFill>
                   <a:srgbClr val="475569"/>
                 </a:solidFill>
               </a:defRPr>
             </a:pPr>
             <a:r>
-              <a:t>共識決策 × 平等主義</a:t>
-            </a:r>
-          </a:p>
-        </p:txBody>
-      </p:sp>
-      <p:sp>
-        <p:nvSpPr>
-          <p:cNvPr id="7" name="Rounded Rectangle 6"/>
+              <a:t>階級 × 由上而下</a:t>
+            </a:r>
+          </a:p>
+          <a:p>
+            <a:pPr algn="ctr">
+              <a:defRPr sz="850">
+                <a:solidFill>
+                  <a:srgbClr val="475569"/>
+                </a:solidFill>
+              </a:defRPr>
+            </a:pPr>
+            <a:r>
+              <a:t>（中國、法國）</a:t>
+            </a:r>
+          </a:p>
+        </p:txBody>
+      </p:sp>
+      <p:sp>
+        <p:nvSpPr>
+          <p:cNvPr id="8" name="Rounded Rectangle 7"/>
           <p:cNvSpPr/>
           <p:nvPr/>
         </p:nvSpPr>
         <p:spPr>
           <a:xfrm>
-            <a:off x="2697480" y="4114800"/>
+            <a:off x="1645920" y="5166360"/>
             <a:ext cx="1051560" cy="1051560"/>
           </a:xfrm>
           <a:prstGeom prst="roundRect">
@@ -5390,85 +5480,31 @@
               </a:defRPr>
             </a:pPr>
             <a:r>
-              <a:t>第一象限（右上）</a:t>
+              <a:t>左下象限</a:t>
             </a:r>
           </a:p>
           <a:p>
             <a:pPr algn="ctr">
-              <a:defRPr sz="900">
+              <a:defRPr sz="850">
                 <a:solidFill>
                   <a:srgbClr val="475569"/>
                 </a:solidFill>
               </a:defRPr>
             </a:pPr>
             <a:r>
-              <a:t>共識決策 × 階層制</a:t>
-            </a:r>
-          </a:p>
-        </p:txBody>
-      </p:sp>
-      <p:sp>
-        <p:nvSpPr>
-          <p:cNvPr id="8" name="Rounded Rectangle 7"/>
-          <p:cNvSpPr/>
-          <p:nvPr/>
-        </p:nvSpPr>
-        <p:spPr>
-          <a:xfrm>
-            <a:off x="1645920" y="5166360"/>
-            <a:ext cx="1051560" cy="1051560"/>
-          </a:xfrm>
-          <a:prstGeom prst="roundRect">
-            <a:avLst/>
-          </a:prstGeom>
-          <a:solidFill>
-            <a:srgbClr val="D1FAE5"/>
-          </a:solidFill>
-          <a:ln w="12700">
-            <a:solidFill>
-              <a:srgbClr val="E2E8F0"/>
-            </a:solidFill>
-          </a:ln>
-        </p:spPr>
-        <p:style>
-          <a:lnRef idx="1">
-            <a:schemeClr val="accent1"/>
-          </a:lnRef>
-          <a:fillRef idx="3">
-            <a:schemeClr val="accent1"/>
-          </a:fillRef>
-          <a:effectRef idx="2">
-            <a:schemeClr val="accent1"/>
-          </a:effectRef>
-          <a:fontRef idx="minor">
-            <a:schemeClr val="lt1"/>
-          </a:fontRef>
-        </p:style>
-        <p:txBody>
-          <a:bodyPr rtlCol="0" anchor="ctr" wrap="square"/>
-          <a:lstStyle/>
+              <a:t>平等 × 共識</a:t>
+            </a:r>
+          </a:p>
           <a:p>
             <a:pPr algn="ctr">
-              <a:defRPr sz="1000" b="1">
-                <a:solidFill>
-                  <a:srgbClr val="1E293B"/>
-                </a:solidFill>
-              </a:defRPr>
-            </a:pPr>
-            <a:r>
-              <a:t>第三象限（左下）</a:t>
-            </a:r>
-          </a:p>
-          <a:p>
-            <a:pPr algn="ctr">
-              <a:defRPr sz="900">
+              <a:defRPr sz="850">
                 <a:solidFill>
                   <a:srgbClr val="475569"/>
                 </a:solidFill>
               </a:defRPr>
             </a:pPr>
             <a:r>
-              <a:t>由上而下 × 平等主義</a:t>
+              <a:t>（丹麥、荷蘭）</a:t>
             </a:r>
           </a:p>
         </p:txBody>
@@ -5522,19 +5558,31 @@
               </a:defRPr>
             </a:pPr>
             <a:r>
-              <a:t>第四象限（右下）</a:t>
+              <a:t>右下象限</a:t>
             </a:r>
           </a:p>
           <a:p>
             <a:pPr algn="ctr">
-              <a:defRPr sz="900">
+              <a:defRPr sz="850">
                 <a:solidFill>
                   <a:srgbClr val="475569"/>
                 </a:solidFill>
               </a:defRPr>
             </a:pPr>
             <a:r>
-              <a:t>由上而下 × 階層制</a:t>
+              <a:t>階級 × 共識</a:t>
+            </a:r>
+          </a:p>
+          <a:p>
+            <a:pPr algn="ctr">
+              <a:defRPr sz="850">
+                <a:solidFill>
+                  <a:srgbClr val="475569"/>
+                </a:solidFill>
+              </a:defRPr>
+            </a:pPr>
+            <a:r>
+              <a:t>（德國、日本）</a:t>
             </a:r>
           </a:p>
         </p:txBody>
@@ -5547,7 +5595,7 @@
         </p:nvSpPr>
         <p:spPr>
           <a:xfrm>
-            <a:off x="1998878" y="5603443"/>
+            <a:off x="1998878" y="4509820"/>
             <a:ext cx="219456" cy="219456"/>
           </a:xfrm>
           <a:prstGeom prst="ellipse">
@@ -5678,7 +5726,7 @@
               </a:defRPr>
             </a:pPr>
             <a:r>
-              <a:t>矽谷敏捷試錯模式，組織極度扁平，決策採快速推進與動態修補。</a:t>
+              <a:t>敏捷試錯模式，組織極度扁平，決策採小速決快速推進與動態修補。</a:t>
             </a:r>
           </a:p>
           <a:p>
@@ -6295,7 +6343,7 @@
               </a:defRPr>
             </a:pPr>
             <a:r>
-              <a:t>案例四 答案揭曉 · 第二象限（左上：橫軸 18，縱軸 85）</a:t>
+              <a:t>案例四 答案揭曉 · 左下象限（左下：橫軸 18，縱軸 15）</a:t>
             </a:r>
           </a:p>
         </p:txBody>
@@ -6347,7 +6395,7 @@
               </a:defRPr>
             </a:pPr>
             <a:r>
-              <a:t>正確答案（左上）</a:t>
+              <a:t>正確答案（左下）</a:t>
             </a:r>
           </a:p>
           <a:p>
@@ -6359,7 +6407,7 @@
               </a:defRPr>
             </a:pPr>
             <a:r>
-              <a:t>第二象限</a:t>
+              <a:t>左下象限</a:t>
             </a:r>
           </a:p>
           <a:p>
@@ -6371,7 +6419,7 @@
               </a:defRPr>
             </a:pPr>
             <a:r>
-              <a:t>平等主義 × 共識型決策</a:t>
+              <a:t>平等 × 共識</a:t>
             </a:r>
           </a:p>
           <a:p>
@@ -6401,7 +6449,7 @@
               </a:defRPr>
             </a:pPr>
             <a:r>
-              <a:t>🎯 靶心座標：(18, 85)</a:t>
+              <a:t>🎯 靶心座標：(18, 15)</a:t>
             </a:r>
           </a:p>
           <a:p>
@@ -6430,72 +6478,6 @@
         <p:spPr>
           <a:xfrm>
             <a:off x="1645920" y="4114800"/>
-            <a:ext cx="1051560" cy="1051560"/>
-          </a:xfrm>
-          <a:prstGeom prst="roundRect">
-            <a:avLst/>
-          </a:prstGeom>
-          <a:solidFill>
-            <a:srgbClr val="EEF2FF"/>
-          </a:solidFill>
-          <a:ln w="12700">
-            <a:solidFill>
-              <a:srgbClr val="E2E8F0"/>
-            </a:solidFill>
-          </a:ln>
-        </p:spPr>
-        <p:style>
-          <a:lnRef idx="1">
-            <a:schemeClr val="accent1"/>
-          </a:lnRef>
-          <a:fillRef idx="3">
-            <a:schemeClr val="accent1"/>
-          </a:fillRef>
-          <a:effectRef idx="2">
-            <a:schemeClr val="accent1"/>
-          </a:effectRef>
-          <a:fontRef idx="minor">
-            <a:schemeClr val="lt1"/>
-          </a:fontRef>
-        </p:style>
-        <p:txBody>
-          <a:bodyPr rtlCol="0" anchor="ctr" wrap="square"/>
-          <a:lstStyle/>
-          <a:p>
-            <a:pPr algn="ctr">
-              <a:defRPr sz="1000" b="1">
-                <a:solidFill>
-                  <a:srgbClr val="1E293B"/>
-                </a:solidFill>
-              </a:defRPr>
-            </a:pPr>
-            <a:r>
-              <a:t>第二象限（左上）</a:t>
-            </a:r>
-          </a:p>
-          <a:p>
-            <a:pPr algn="ctr">
-              <a:defRPr sz="900">
-                <a:solidFill>
-                  <a:srgbClr val="475569"/>
-                </a:solidFill>
-              </a:defRPr>
-            </a:pPr>
-            <a:r>
-              <a:t>共識決策 × 平等主義</a:t>
-            </a:r>
-          </a:p>
-        </p:txBody>
-      </p:sp>
-      <p:sp>
-        <p:nvSpPr>
-          <p:cNvPr id="7" name="Rounded Rectangle 6"/>
-          <p:cNvSpPr/>
-          <p:nvPr/>
-        </p:nvSpPr>
-        <p:spPr>
-          <a:xfrm>
-            <a:off x="2697480" y="4114800"/>
             <a:ext cx="1051560" cy="1051560"/>
           </a:xfrm>
           <a:prstGeom prst="roundRect">
@@ -6536,32 +6518,44 @@
               </a:defRPr>
             </a:pPr>
             <a:r>
-              <a:t>第一象限（右上）</a:t>
+              <a:t>左上象限</a:t>
             </a:r>
           </a:p>
           <a:p>
             <a:pPr algn="ctr">
-              <a:defRPr sz="900">
+              <a:defRPr sz="850">
                 <a:solidFill>
                   <a:srgbClr val="475569"/>
                 </a:solidFill>
               </a:defRPr>
             </a:pPr>
             <a:r>
-              <a:t>共識決策 × 階層制</a:t>
-            </a:r>
-          </a:p>
-        </p:txBody>
-      </p:sp>
-      <p:sp>
-        <p:nvSpPr>
-          <p:cNvPr id="8" name="Rounded Rectangle 7"/>
+              <a:t>平等 × 由上而下</a:t>
+            </a:r>
+          </a:p>
+          <a:p>
+            <a:pPr algn="ctr">
+              <a:defRPr sz="850">
+                <a:solidFill>
+                  <a:srgbClr val="475569"/>
+                </a:solidFill>
+              </a:defRPr>
+            </a:pPr>
+            <a:r>
+              <a:t>（美國、英國）</a:t>
+            </a:r>
+          </a:p>
+        </p:txBody>
+      </p:sp>
+      <p:sp>
+        <p:nvSpPr>
+          <p:cNvPr id="7" name="Rounded Rectangle 6"/>
           <p:cNvSpPr/>
           <p:nvPr/>
         </p:nvSpPr>
         <p:spPr>
           <a:xfrm>
-            <a:off x="1645920" y="5166360"/>
+            <a:off x="2697480" y="4114800"/>
             <a:ext cx="1051560" cy="1051560"/>
           </a:xfrm>
           <a:prstGeom prst="roundRect">
@@ -6602,19 +6596,109 @@
               </a:defRPr>
             </a:pPr>
             <a:r>
-              <a:t>第三象限（左下）</a:t>
+              <a:t>右上象限</a:t>
             </a:r>
           </a:p>
           <a:p>
             <a:pPr algn="ctr">
-              <a:defRPr sz="900">
+              <a:defRPr sz="850">
                 <a:solidFill>
                   <a:srgbClr val="475569"/>
                 </a:solidFill>
               </a:defRPr>
             </a:pPr>
             <a:r>
-              <a:t>由上而下 × 平等主義</a:t>
+              <a:t>階級 × 由上而下</a:t>
+            </a:r>
+          </a:p>
+          <a:p>
+            <a:pPr algn="ctr">
+              <a:defRPr sz="850">
+                <a:solidFill>
+                  <a:srgbClr val="475569"/>
+                </a:solidFill>
+              </a:defRPr>
+            </a:pPr>
+            <a:r>
+              <a:t>（中國、法國）</a:t>
+            </a:r>
+          </a:p>
+        </p:txBody>
+      </p:sp>
+      <p:sp>
+        <p:nvSpPr>
+          <p:cNvPr id="8" name="Rounded Rectangle 7"/>
+          <p:cNvSpPr/>
+          <p:nvPr/>
+        </p:nvSpPr>
+        <p:spPr>
+          <a:xfrm>
+            <a:off x="1645920" y="5166360"/>
+            <a:ext cx="1051560" cy="1051560"/>
+          </a:xfrm>
+          <a:prstGeom prst="roundRect">
+            <a:avLst/>
+          </a:prstGeom>
+          <a:solidFill>
+            <a:srgbClr val="D1FAE5"/>
+          </a:solidFill>
+          <a:ln w="12700">
+            <a:solidFill>
+              <a:srgbClr val="E2E8F0"/>
+            </a:solidFill>
+          </a:ln>
+        </p:spPr>
+        <p:style>
+          <a:lnRef idx="1">
+            <a:schemeClr val="accent1"/>
+          </a:lnRef>
+          <a:fillRef idx="3">
+            <a:schemeClr val="accent1"/>
+          </a:fillRef>
+          <a:effectRef idx="2">
+            <a:schemeClr val="accent1"/>
+          </a:effectRef>
+          <a:fontRef idx="minor">
+            <a:schemeClr val="lt1"/>
+          </a:fontRef>
+        </p:style>
+        <p:txBody>
+          <a:bodyPr rtlCol="0" anchor="ctr" wrap="square"/>
+          <a:lstStyle/>
+          <a:p>
+            <a:pPr algn="ctr">
+              <a:defRPr sz="1000" b="1">
+                <a:solidFill>
+                  <a:srgbClr val="1E293B"/>
+                </a:solidFill>
+              </a:defRPr>
+            </a:pPr>
+            <a:r>
+              <a:t>左下象限</a:t>
+            </a:r>
+          </a:p>
+          <a:p>
+            <a:pPr algn="ctr">
+              <a:defRPr sz="850">
+                <a:solidFill>
+                  <a:srgbClr val="475569"/>
+                </a:solidFill>
+              </a:defRPr>
+            </a:pPr>
+            <a:r>
+              <a:t>平等 × 共識</a:t>
+            </a:r>
+          </a:p>
+          <a:p>
+            <a:pPr algn="ctr">
+              <a:defRPr sz="850">
+                <a:solidFill>
+                  <a:srgbClr val="475569"/>
+                </a:solidFill>
+              </a:defRPr>
+            </a:pPr>
+            <a:r>
+              <a:t>（丹麥、荷蘭）</a:t>
             </a:r>
           </a:p>
         </p:txBody>
@@ -6668,19 +6752,31 @@
               </a:defRPr>
             </a:pPr>
             <a:r>
-              <a:t>第四象限（右下）</a:t>
+              <a:t>右下象限</a:t>
             </a:r>
           </a:p>
           <a:p>
             <a:pPr algn="ctr">
-              <a:defRPr sz="900">
+              <a:defRPr sz="850">
                 <a:solidFill>
                   <a:srgbClr val="475569"/>
                 </a:solidFill>
               </a:defRPr>
             </a:pPr>
             <a:r>
-              <a:t>由上而下 × 階層制</a:t>
+              <a:t>階級 × 共識</a:t>
+            </a:r>
+          </a:p>
+          <a:p>
+            <a:pPr algn="ctr">
+              <a:defRPr sz="850">
+                <a:solidFill>
+                  <a:srgbClr val="475569"/>
+                </a:solidFill>
+              </a:defRPr>
+            </a:pPr>
+            <a:r>
+              <a:t>（德國、日本）</a:t>
             </a:r>
           </a:p>
         </p:txBody>
@@ -6693,7 +6789,7 @@
         </p:nvSpPr>
         <p:spPr>
           <a:xfrm>
-            <a:off x="1914753" y="4320540"/>
+            <a:off x="1914753" y="5792724"/>
             <a:ext cx="219456" cy="219456"/>
           </a:xfrm>
           <a:prstGeom prst="ellipse">
@@ -6824,7 +6920,7 @@
               </a:defRPr>
             </a:pPr>
             <a:r>
-              <a:t>荷蘭低地協商模式，基層工程師擁有一票否決權，追求刻在石碑上的神聖大承諾。</a:t>
+              <a:t>低地協商模式，基層工程師擁有一票否決權，追求刻在石碑上的神聖大承諾。</a:t>
             </a:r>
           </a:p>
           <a:p>
@@ -7035,6 +7131,133 @@
             <a:avLst/>
           </a:prstGeom>
           <a:solidFill>
+            <a:srgbClr val="EEF2FF"/>
+          </a:solidFill>
+          <a:ln w="19050">
+            <a:solidFill>
+              <a:srgbClr val="4F46E5"/>
+            </a:solidFill>
+          </a:ln>
+        </p:spPr>
+        <p:style>
+          <a:lnRef idx="1">
+            <a:schemeClr val="accent1"/>
+          </a:lnRef>
+          <a:fillRef idx="3">
+            <a:schemeClr val="accent1"/>
+          </a:fillRef>
+          <a:effectRef idx="2">
+            <a:schemeClr val="accent1"/>
+          </a:effectRef>
+          <a:fontRef idx="minor">
+            <a:schemeClr val="lt1"/>
+          </a:fontRef>
+        </p:style>
+        <p:txBody>
+          <a:bodyPr rtlCol="0" anchor="ctr" wrap="square" lIns="182880" tIns="182880" rIns="182880"/>
+          <a:lstStyle/>
+          <a:p>
+            <a:pPr algn="ctr">
+              <a:defRPr sz="1300" b="1">
+                <a:solidFill>
+                  <a:srgbClr val="4F46E5"/>
+                </a:solidFill>
+              </a:defRPr>
+            </a:pPr>
+            <a:r>
+              <a:t>左上象限</a:t>
+            </a:r>
+          </a:p>
+          <a:p>
+            <a:pPr>
+              <a:defRPr sz="1100" b="1">
+                <a:solidFill>
+                  <a:srgbClr val="1E293B"/>
+                </a:solidFill>
+              </a:defRPr>
+            </a:pPr>
+            <a:r>
+              <a:t>平等 × 由上而下</a:t>
+            </a:r>
+            <a:br/>
+          </a:p>
+          <a:p>
+            <a:pPr>
+              <a:defRPr sz="1000">
+                <a:solidFill>
+                  <a:srgbClr val="475569"/>
+                </a:solidFill>
+              </a:defRPr>
+            </a:pPr>
+            <a:r>
+              <a:t>【美國、英國】</a:t>
+            </a:r>
+          </a:p>
+          <a:p>
+            <a:pPr>
+              <a:defRPr sz="1000">
+                <a:solidFill>
+                  <a:srgbClr val="475569"/>
+                </a:solidFill>
+              </a:defRPr>
+            </a:pPr>
+            <a:r>
+              <a:t>• 決策機制：小速決敏捷試錯</a:t>
+            </a:r>
+          </a:p>
+          <a:p>
+            <a:pPr>
+              <a:defRPr sz="1000">
+                <a:solidFill>
+                  <a:srgbClr val="475569"/>
+                </a:solidFill>
+              </a:defRPr>
+            </a:pPr>
+            <a:r>
+              <a:t>• 領導者角色：方向定舵者 </a:t>
+            </a:r>
+          </a:p>
+          <a:p>
+            <a:pPr>
+              <a:defRPr sz="1000">
+                <a:solidFill>
+                  <a:srgbClr val="475569"/>
+                </a:solidFill>
+              </a:defRPr>
+            </a:pPr>
+            <a:r>
+              <a:t>• 關鍵動作：鼓勵平等暢所欲言，授權主管速決，後續線上動態修補。</a:t>
+            </a:r>
+          </a:p>
+          <a:p>
+            <a:pPr>
+              <a:defRPr sz="1000">
+                <a:solidFill>
+                  <a:srgbClr val="475569"/>
+                </a:solidFill>
+              </a:defRPr>
+            </a:pPr>
+            <a:r>
+              <a:t>• 致命地雷：耗費數週追求全員共識，錯失市場先機。</a:t>
+            </a:r>
+          </a:p>
+        </p:txBody>
+      </p:sp>
+      <p:sp>
+        <p:nvSpPr>
+          <p:cNvPr id="6" name="Rounded Rectangle 5"/>
+          <p:cNvSpPr/>
+          <p:nvPr/>
+        </p:nvSpPr>
+        <p:spPr>
+          <a:xfrm>
+            <a:off x="3456432" y="1371600"/>
+            <a:ext cx="2542032" cy="4846320"/>
+          </a:xfrm>
+          <a:prstGeom prst="roundRect">
+            <a:avLst/>
+          </a:prstGeom>
+          <a:solidFill>
             <a:srgbClr val="FEF3C7"/>
           </a:solidFill>
           <a:ln w="19050">
@@ -7069,7 +7292,7 @@
               </a:defRPr>
             </a:pPr>
             <a:r>
-              <a:t>第一象限（右上）</a:t>
+              <a:t>右上象限</a:t>
             </a:r>
           </a:p>
           <a:p>
@@ -7081,7 +7304,7 @@
               </a:defRPr>
             </a:pPr>
             <a:r>
-              <a:t>階層制 × 共識型決策</a:t>
+              <a:t>階級 × 由上而下</a:t>
             </a:r>
             <a:br/>
           </a:p>
@@ -7094,7 +7317,7 @@
               </a:defRPr>
             </a:pPr>
             <a:r>
-              <a:t>【日本、德國】</a:t>
+              <a:t>【中國、法國】</a:t>
             </a:r>
           </a:p>
           <a:p>
@@ -7106,7 +7329,7 @@
               </a:defRPr>
             </a:pPr>
             <a:r>
-              <a:t>• 決策機制：根回與稟議制</a:t>
+              <a:t>• 決策機制：指揮官指揮模式</a:t>
             </a:r>
           </a:p>
           <a:p>
@@ -7118,7 +7341,7 @@
               </a:defRPr>
             </a:pPr>
             <a:r>
-              <a:t>• 領導者角色：整合協調者 </a:t>
+              <a:t>• 領導者角色：最高指揮官 </a:t>
             </a:r>
           </a:p>
           <a:p>
@@ -7130,7 +7353,7 @@
               </a:defRPr>
             </a:pPr>
             <a:r>
-              <a:t>• 關鍵動作：大會前私下一對一對齊，由下而上會簽審核。</a:t>
+              <a:t>• 關鍵動作：危機時給予清晰步驟，領導者一肩承擔全部成敗。</a:t>
             </a:r>
           </a:p>
           <a:p>
@@ -7142,134 +7365,7 @@
               </a:defRPr>
             </a:pPr>
             <a:r>
-              <a:t>• 致命地雷：在正式會議強行舉手或當眾表態。</a:t>
-            </a:r>
-          </a:p>
-        </p:txBody>
-      </p:sp>
-      <p:sp>
-        <p:nvSpPr>
-          <p:cNvPr id="6" name="Rounded Rectangle 5"/>
-          <p:cNvSpPr/>
-          <p:nvPr/>
-        </p:nvSpPr>
-        <p:spPr>
-          <a:xfrm>
-            <a:off x="3456432" y="1371600"/>
-            <a:ext cx="2542032" cy="4846320"/>
-          </a:xfrm>
-          <a:prstGeom prst="roundRect">
-            <a:avLst/>
-          </a:prstGeom>
-          <a:solidFill>
-            <a:srgbClr val="EEF2FF"/>
-          </a:solidFill>
-          <a:ln w="19050">
-            <a:solidFill>
-              <a:srgbClr val="4F46E5"/>
-            </a:solidFill>
-          </a:ln>
-        </p:spPr>
-        <p:style>
-          <a:lnRef idx="1">
-            <a:schemeClr val="accent1"/>
-          </a:lnRef>
-          <a:fillRef idx="3">
-            <a:schemeClr val="accent1"/>
-          </a:fillRef>
-          <a:effectRef idx="2">
-            <a:schemeClr val="accent1"/>
-          </a:effectRef>
-          <a:fontRef idx="minor">
-            <a:schemeClr val="lt1"/>
-          </a:fontRef>
-        </p:style>
-        <p:txBody>
-          <a:bodyPr rtlCol="0" anchor="ctr" wrap="square" lIns="182880" tIns="182880" rIns="182880"/>
-          <a:lstStyle/>
-          <a:p>
-            <a:pPr algn="ctr">
-              <a:defRPr sz="1300" b="1">
-                <a:solidFill>
-                  <a:srgbClr val="4F46E5"/>
-                </a:solidFill>
-              </a:defRPr>
-            </a:pPr>
-            <a:r>
-              <a:t>第二象限（左上）</a:t>
-            </a:r>
-          </a:p>
-          <a:p>
-            <a:pPr>
-              <a:defRPr sz="1100" b="1">
-                <a:solidFill>
-                  <a:srgbClr val="1E293B"/>
-                </a:solidFill>
-              </a:defRPr>
-            </a:pPr>
-            <a:r>
-              <a:t>平等主義 × 共識型決策</a:t>
-            </a:r>
-            <a:br/>
-          </a:p>
-          <a:p>
-            <a:pPr>
-              <a:defRPr sz="1000">
-                <a:solidFill>
-                  <a:srgbClr val="475569"/>
-                </a:solidFill>
-              </a:defRPr>
-            </a:pPr>
-            <a:r>
-              <a:t>【丹麥、荷蘭】</a:t>
-            </a:r>
-          </a:p>
-          <a:p>
-            <a:pPr>
-              <a:defRPr sz="1000">
-                <a:solidFill>
-                  <a:srgbClr val="475569"/>
-                </a:solidFill>
-              </a:defRPr>
-            </a:pPr>
-            <a:r>
-              <a:t>• 決策機制：低地共識協商模式</a:t>
-            </a:r>
-          </a:p>
-          <a:p>
-            <a:pPr>
-              <a:defRPr sz="1000">
-                <a:solidFill>
-                  <a:srgbClr val="475569"/>
-                </a:solidFill>
-              </a:defRPr>
-            </a:pPr>
-            <a:r>
-              <a:t>• 領導者角色：中立促進者 </a:t>
-            </a:r>
-          </a:p>
-          <a:p>
-            <a:pPr>
-              <a:defRPr sz="1000">
-                <a:solidFill>
-                  <a:srgbClr val="475569"/>
-                </a:solidFill>
-              </a:defRPr>
-            </a:pPr>
-            <a:r>
-              <a:t>• 關鍵動作：全員公開透明共審，拍板即刻在石碑上不可翻案。</a:t>
-            </a:r>
-          </a:p>
-          <a:p>
-            <a:pPr>
-              <a:defRPr sz="1000">
-                <a:solidFill>
-                  <a:srgbClr val="475569"/>
-                </a:solidFill>
-              </a:defRPr>
-            </a:pPr>
-            <a:r>
-              <a:t>• 致命地雷：私下密室妥協、威權壓迫或隨意翻案。</a:t>
+              <a:t>• 致命地雷：危機時要求基層投票表態，被視為推諉懦弱。</a:t>
             </a:r>
           </a:p>
         </p:txBody>
@@ -7323,7 +7419,7 @@
               </a:defRPr>
             </a:pPr>
             <a:r>
-              <a:t>第三象限（左下）</a:t>
+              <a:t>左下象限</a:t>
             </a:r>
           </a:p>
           <a:p>
@@ -7335,7 +7431,7 @@
               </a:defRPr>
             </a:pPr>
             <a:r>
-              <a:t>平等主義 × 由上而下速決</a:t>
+              <a:t>平等 × 共識</a:t>
             </a:r>
             <a:br/>
           </a:p>
@@ -7348,7 +7444,7 @@
               </a:defRPr>
             </a:pPr>
             <a:r>
-              <a:t>【美國、英國】</a:t>
+              <a:t>【丹麥、荷蘭】</a:t>
             </a:r>
           </a:p>
           <a:p>
@@ -7360,7 +7456,7 @@
               </a:defRPr>
             </a:pPr>
             <a:r>
-              <a:t>• 決策機制：小速決敏捷試錯</a:t>
+              <a:t>• 決策機制：低地共識協商模式</a:t>
             </a:r>
           </a:p>
           <a:p>
@@ -7372,7 +7468,7 @@
               </a:defRPr>
             </a:pPr>
             <a:r>
-              <a:t>• 領導者角色：方向定舵者 </a:t>
+              <a:t>• 領導者角色：中立促進者 </a:t>
             </a:r>
           </a:p>
           <a:p>
@@ -7384,7 +7480,7 @@
               </a:defRPr>
             </a:pPr>
             <a:r>
-              <a:t>• 關鍵動作：鼓勵平等暢所欲言，授權主管速決，後續線上動態修補。</a:t>
+              <a:t>• 關鍵動作：全員公開透明共審，拍板即刻在石碑上不可翻案。</a:t>
             </a:r>
           </a:p>
           <a:p>
@@ -7396,7 +7492,7 @@
               </a:defRPr>
             </a:pPr>
             <a:r>
-              <a:t>• 致命地雷：耗費數週追求全員共識，錯失市場先機。</a:t>
+              <a:t>• 致命地雷：私下密室妥協、威權壓迫或隨意翻案。</a:t>
             </a:r>
           </a:p>
         </p:txBody>
@@ -7450,7 +7546,7 @@
               </a:defRPr>
             </a:pPr>
             <a:r>
-              <a:t>第四象限（右下）</a:t>
+              <a:t>右下象限</a:t>
             </a:r>
           </a:p>
           <a:p>
@@ -7462,7 +7558,7 @@
               </a:defRPr>
             </a:pPr>
             <a:r>
-              <a:t>階層制 × 由上而下速決</a:t>
+              <a:t>階級 × 共識</a:t>
             </a:r>
             <a:br/>
           </a:p>
@@ -7475,7 +7571,7 @@
               </a:defRPr>
             </a:pPr>
             <a:r>
-              <a:t>【中國、法國】</a:t>
+              <a:t>【德國、日本】</a:t>
             </a:r>
           </a:p>
           <a:p>
@@ -7487,7 +7583,7 @@
               </a:defRPr>
             </a:pPr>
             <a:r>
-              <a:t>• 決策機制：指揮官指揮模式</a:t>
+              <a:t>• 決策機制：根回與稟議制</a:t>
             </a:r>
           </a:p>
           <a:p>
@@ -7499,7 +7595,7 @@
               </a:defRPr>
             </a:pPr>
             <a:r>
-              <a:t>• 領導者角色：最高指揮官 </a:t>
+              <a:t>• 領導者角色：整合協調者 </a:t>
             </a:r>
           </a:p>
           <a:p>
@@ -7511,7 +7607,7 @@
               </a:defRPr>
             </a:pPr>
             <a:r>
-              <a:t>• 關鍵動作：危機時給予清晰步驟，領導者一肩承擔全部成敗。</a:t>
+              <a:t>• 關鍵動作：大會前私下一對一對齊，由下而上會簽審核。</a:t>
             </a:r>
           </a:p>
           <a:p>
@@ -7523,7 +7619,7 @@
               </a:defRPr>
             </a:pPr>
             <a:r>
-              <a:t>• 致命地雷：危機時要求基層投票表態，被視為推諉懦弱。</a:t>
+              <a:t>• 致命地雷：在正式會議強行舉手或當眾表態。</a:t>
             </a:r>
           </a:p>
         </p:txBody>
@@ -9206,19 +9302,31 @@
               </a:defRPr>
             </a:pPr>
             <a:r>
-              <a:t>第二象限（左上）</a:t>
+              <a:t>左上象限</a:t>
             </a:r>
           </a:p>
           <a:p>
             <a:pPr algn="ctr">
-              <a:defRPr sz="900">
+              <a:defRPr sz="850">
                 <a:solidFill>
                   <a:srgbClr val="475569"/>
                 </a:solidFill>
               </a:defRPr>
             </a:pPr>
             <a:r>
-              <a:t>共識決策 × 平等主義</a:t>
+              <a:t>平等 × 由上而下</a:t>
+            </a:r>
+          </a:p>
+          <a:p>
+            <a:pPr algn="ctr">
+              <a:defRPr sz="850">
+                <a:solidFill>
+                  <a:srgbClr val="475569"/>
+                </a:solidFill>
+              </a:defRPr>
+            </a:pPr>
+            <a:r>
+              <a:t>（美國、英國）</a:t>
             </a:r>
           </a:p>
         </p:txBody>
@@ -9272,19 +9380,31 @@
               </a:defRPr>
             </a:pPr>
             <a:r>
-              <a:t>第一象限（右上）</a:t>
+              <a:t>右上象限</a:t>
             </a:r>
           </a:p>
           <a:p>
             <a:pPr algn="ctr">
-              <a:defRPr sz="900">
+              <a:defRPr sz="850">
                 <a:solidFill>
                   <a:srgbClr val="475569"/>
                 </a:solidFill>
               </a:defRPr>
             </a:pPr>
             <a:r>
-              <a:t>共識決策 × 階層制</a:t>
+              <a:t>階級 × 由上而下</a:t>
+            </a:r>
+          </a:p>
+          <a:p>
+            <a:pPr algn="ctr">
+              <a:defRPr sz="850">
+                <a:solidFill>
+                  <a:srgbClr val="475569"/>
+                </a:solidFill>
+              </a:defRPr>
+            </a:pPr>
+            <a:r>
+              <a:t>（中國、法國）</a:t>
             </a:r>
           </a:p>
         </p:txBody>
@@ -9338,19 +9458,31 @@
               </a:defRPr>
             </a:pPr>
             <a:r>
-              <a:t>第三象限（左下）</a:t>
+              <a:t>左下象限</a:t>
             </a:r>
           </a:p>
           <a:p>
             <a:pPr algn="ctr">
-              <a:defRPr sz="900">
+              <a:defRPr sz="850">
                 <a:solidFill>
                   <a:srgbClr val="475569"/>
                 </a:solidFill>
               </a:defRPr>
             </a:pPr>
             <a:r>
-              <a:t>由上而下 × 平等主義</a:t>
+              <a:t>平等 × 共識</a:t>
+            </a:r>
+          </a:p>
+          <a:p>
+            <a:pPr algn="ctr">
+              <a:defRPr sz="850">
+                <a:solidFill>
+                  <a:srgbClr val="475569"/>
+                </a:solidFill>
+              </a:defRPr>
+            </a:pPr>
+            <a:r>
+              <a:t>（丹麥、荷蘭）</a:t>
             </a:r>
           </a:p>
         </p:txBody>
@@ -9404,19 +9536,31 @@
               </a:defRPr>
             </a:pPr>
             <a:r>
-              <a:t>第四象限（右下）</a:t>
+              <a:t>右下象限</a:t>
             </a:r>
           </a:p>
           <a:p>
             <a:pPr algn="ctr">
-              <a:defRPr sz="900">
+              <a:defRPr sz="850">
                 <a:solidFill>
                   <a:srgbClr val="475569"/>
                 </a:solidFill>
               </a:defRPr>
             </a:pPr>
             <a:r>
-              <a:t>由上而下 × 階層制</a:t>
+              <a:t>階級 × 共識</a:t>
+            </a:r>
+          </a:p>
+          <a:p>
+            <a:pPr algn="ctr">
+              <a:defRPr sz="850">
+                <a:solidFill>
+                  <a:srgbClr val="475569"/>
+                </a:solidFill>
+              </a:defRPr>
+            </a:pPr>
+            <a:r>
+              <a:t>（德國、日本）</a:t>
             </a:r>
           </a:p>
         </p:txBody>
@@ -9430,6 +9574,72 @@
         <p:spPr>
           <a:xfrm>
             <a:off x="5943600" y="1417320"/>
+            <a:ext cx="5486400" cy="1078992"/>
+          </a:xfrm>
+          <a:prstGeom prst="roundRect">
+            <a:avLst/>
+          </a:prstGeom>
+          <a:solidFill>
+            <a:srgbClr val="EEF2FF"/>
+          </a:solidFill>
+          <a:ln w="19050">
+            <a:solidFill>
+              <a:srgbClr val="4F46E5"/>
+            </a:solidFill>
+          </a:ln>
+        </p:spPr>
+        <p:style>
+          <a:lnRef idx="1">
+            <a:schemeClr val="accent1"/>
+          </a:lnRef>
+          <a:fillRef idx="3">
+            <a:schemeClr val="accent1"/>
+          </a:fillRef>
+          <a:effectRef idx="2">
+            <a:schemeClr val="accent1"/>
+          </a:effectRef>
+          <a:fontRef idx="minor">
+            <a:schemeClr val="lt1"/>
+          </a:fontRef>
+        </p:style>
+        <p:txBody>
+          <a:bodyPr rtlCol="0" anchor="ctr" wrap="square" lIns="164592" tIns="164592" rIns="164592"/>
+          <a:lstStyle/>
+          <a:p>
+            <a:pPr algn="ctr">
+              <a:defRPr sz="1200" b="1">
+                <a:solidFill>
+                  <a:srgbClr val="1E293B"/>
+                </a:solidFill>
+              </a:defRPr>
+            </a:pPr>
+            <a:r>
+              <a:t>左上象限：平等 × 由上而下</a:t>
+            </a:r>
+          </a:p>
+          <a:p>
+            <a:pPr>
+              <a:defRPr sz="1000">
+                <a:solidFill>
+                  <a:srgbClr val="475569"/>
+                </a:solidFill>
+              </a:defRPr>
+            </a:pPr>
+            <a:r>
+              <a:t>【美國、英國】扁平極客文化，鼓勵直抒己見甚至挑戰主管；但決策採「小速決」模式，由主管快速拍板，先試跑再動態修補。</a:t>
+            </a:r>
+          </a:p>
+        </p:txBody>
+      </p:sp>
+      <p:sp>
+        <p:nvSpPr>
+          <p:cNvPr id="10" name="Rounded Rectangle 9"/>
+          <p:cNvSpPr/>
+          <p:nvPr/>
+        </p:nvSpPr>
+        <p:spPr>
+          <a:xfrm>
+            <a:off x="5943600" y="2606040"/>
             <a:ext cx="5486400" cy="1078992"/>
           </a:xfrm>
           <a:prstGeom prst="roundRect">
@@ -9470,7 +9680,7 @@
               </a:defRPr>
             </a:pPr>
             <a:r>
-              <a:t>第一象限（右上）：共識型決策 × 階層制</a:t>
+              <a:t>右上象限：階級 × 由上而下</a:t>
             </a:r>
           </a:p>
           <a:p>
@@ -9482,73 +9692,7 @@
               </a:defRPr>
             </a:pPr>
             <a:r>
-              <a:t>【日本、德國】嚴明職級尊重與全員共識並存。正式會議僅為形式用印，真正的決策必須在會前依職級序列由下而上完成「會前私下摸底（根回）」。</a:t>
-            </a:r>
-          </a:p>
-        </p:txBody>
-      </p:sp>
-      <p:sp>
-        <p:nvSpPr>
-          <p:cNvPr id="10" name="Rounded Rectangle 9"/>
-          <p:cNvSpPr/>
-          <p:nvPr/>
-        </p:nvSpPr>
-        <p:spPr>
-          <a:xfrm>
-            <a:off x="5943600" y="2606040"/>
-            <a:ext cx="5486400" cy="1078992"/>
-          </a:xfrm>
-          <a:prstGeom prst="roundRect">
-            <a:avLst/>
-          </a:prstGeom>
-          <a:solidFill>
-            <a:srgbClr val="EEF2FF"/>
-          </a:solidFill>
-          <a:ln w="19050">
-            <a:solidFill>
-              <a:srgbClr val="4F46E5"/>
-            </a:solidFill>
-          </a:ln>
-        </p:spPr>
-        <p:style>
-          <a:lnRef idx="1">
-            <a:schemeClr val="accent1"/>
-          </a:lnRef>
-          <a:fillRef idx="3">
-            <a:schemeClr val="accent1"/>
-          </a:fillRef>
-          <a:effectRef idx="2">
-            <a:schemeClr val="accent1"/>
-          </a:effectRef>
-          <a:fontRef idx="minor">
-            <a:schemeClr val="lt1"/>
-          </a:fontRef>
-        </p:style>
-        <p:txBody>
-          <a:bodyPr rtlCol="0" anchor="ctr" wrap="square" lIns="164592" tIns="164592" rIns="164592"/>
-          <a:lstStyle/>
-          <a:p>
-            <a:pPr algn="ctr">
-              <a:defRPr sz="1200" b="1">
-                <a:solidFill>
-                  <a:srgbClr val="1E293B"/>
-                </a:solidFill>
-              </a:defRPr>
-            </a:pPr>
-            <a:r>
-              <a:t>第二象限（左上）：共識型決策 × 平等主義</a:t>
-            </a:r>
-          </a:p>
-          <a:p>
-            <a:pPr>
-              <a:defRPr sz="1000">
-                <a:solidFill>
-                  <a:srgbClr val="475569"/>
-                </a:solidFill>
-              </a:defRPr>
-            </a:pPr>
-            <a:r>
-              <a:t>【丹麥、荷蘭】基層與主管平起平坐，人人皆有一票否決權。領導者為「促進者」，追求刻在石碑上的神聖大承諾。</a:t>
+              <a:t>【中國、法國】強調最高主管威權指揮（最高指揮官模式）。危機時刻基層渴望明確指令，領導者必須一肩扛起成敗責任。</a:t>
             </a:r>
           </a:p>
         </p:txBody>
@@ -9602,7 +9746,7 @@
               </a:defRPr>
             </a:pPr>
             <a:r>
-              <a:t>第三象限（左下）：由上而下速決 × 平等主義</a:t>
+              <a:t>左下象限：平等 × 共識</a:t>
             </a:r>
           </a:p>
           <a:p>
@@ -9614,7 +9758,7 @@
               </a:defRPr>
             </a:pPr>
             <a:r>
-              <a:t>【美國、英國】扁平極客文化，鼓勵直抒己見甚至挑戰主管；但決策採「小速決」模式，先試跑、後續動態修補。</a:t>
+              <a:t>【丹麥、荷蘭】基層與主管平起平坐，人人皆有一票否決權。領導者為「促進者」，追求刻在石碑上的神聖大承諾。</a:t>
             </a:r>
           </a:p>
         </p:txBody>
@@ -9668,7 +9812,7 @@
               </a:defRPr>
             </a:pPr>
             <a:r>
-              <a:t>第四象限（右下）：由上而下速決 × 階層制</a:t>
+              <a:t>右下象限：階級 × 共識</a:t>
             </a:r>
           </a:p>
           <a:p>
@@ -9680,7 +9824,7 @@
               </a:defRPr>
             </a:pPr>
             <a:r>
-              <a:t>【中國、法國】強調最高主管威權指揮（最高指揮官模式）。危機時刻基層渴望明確指令，領導者必須一肩扛起成敗責任。</a:t>
+              <a:t>【德國、日本】嚴明職級尊重與全員共識並存。正式會議僅為形式用印，真正的決策必須在會前依職級序列由下而上完成「會前私下摸底（根回）」。</a:t>
             </a:r>
           </a:p>
         </p:txBody>
@@ -10837,7 +10981,7 @@
               </a:defRPr>
             </a:pPr>
             <a:r>
-              <a:t>案例一 答案揭曉 · 第一象限（右上：橫軸 78，縱軸 82）</a:t>
+              <a:t>案例一 答案揭曉 · 右下象限（右下：橫軸 78，縱軸 18）</a:t>
             </a:r>
           </a:p>
         </p:txBody>
@@ -10889,7 +11033,7 @@
               </a:defRPr>
             </a:pPr>
             <a:r>
-              <a:t>正確答案（右上）</a:t>
+              <a:t>正確答案（右下）</a:t>
             </a:r>
           </a:p>
           <a:p>
@@ -10901,7 +11045,7 @@
               </a:defRPr>
             </a:pPr>
             <a:r>
-              <a:t>第一象限</a:t>
+              <a:t>右下象限</a:t>
             </a:r>
           </a:p>
           <a:p>
@@ -10913,7 +11057,7 @@
               </a:defRPr>
             </a:pPr>
             <a:r>
-              <a:t>階層制 × 共識型決策</a:t>
+              <a:t>階級 × 共識</a:t>
             </a:r>
           </a:p>
           <a:p>
@@ -10928,7 +11072,7 @@
               </a:defRPr>
             </a:pPr>
             <a:r>
-              <a:t>【代表國家：日本、德國】</a:t>
+              <a:t>【代表國家：德國、日本】</a:t>
             </a:r>
           </a:p>
           <a:p>
@@ -10943,7 +11087,7 @@
               </a:defRPr>
             </a:pPr>
             <a:r>
-              <a:t>🎯 靶心座標：(78, 82)</a:t>
+              <a:t>🎯 靶心座標：(78, 18)</a:t>
             </a:r>
           </a:p>
           <a:p>
@@ -11012,19 +11156,31 @@
               </a:defRPr>
             </a:pPr>
             <a:r>
-              <a:t>第二象限（左上）</a:t>
+              <a:t>左上象限</a:t>
             </a:r>
           </a:p>
           <a:p>
             <a:pPr algn="ctr">
-              <a:defRPr sz="900">
+              <a:defRPr sz="850">
                 <a:solidFill>
                   <a:srgbClr val="475569"/>
                 </a:solidFill>
               </a:defRPr>
             </a:pPr>
             <a:r>
-              <a:t>共識決策 × 平等主義</a:t>
+              <a:t>平等 × 由上而下</a:t>
+            </a:r>
+          </a:p>
+          <a:p>
+            <a:pPr algn="ctr">
+              <a:defRPr sz="850">
+                <a:solidFill>
+                  <a:srgbClr val="475569"/>
+                </a:solidFill>
+              </a:defRPr>
+            </a:pPr>
+            <a:r>
+              <a:t>（美國、英國）</a:t>
             </a:r>
           </a:p>
         </p:txBody>
@@ -11038,72 +11194,6 @@
         <p:spPr>
           <a:xfrm>
             <a:off x="2697480" y="4114800"/>
-            <a:ext cx="1051560" cy="1051560"/>
-          </a:xfrm>
-          <a:prstGeom prst="roundRect">
-            <a:avLst/>
-          </a:prstGeom>
-          <a:solidFill>
-            <a:srgbClr val="FEF3C7"/>
-          </a:solidFill>
-          <a:ln w="12700">
-            <a:solidFill>
-              <a:srgbClr val="E2E8F0"/>
-            </a:solidFill>
-          </a:ln>
-        </p:spPr>
-        <p:style>
-          <a:lnRef idx="1">
-            <a:schemeClr val="accent1"/>
-          </a:lnRef>
-          <a:fillRef idx="3">
-            <a:schemeClr val="accent1"/>
-          </a:fillRef>
-          <a:effectRef idx="2">
-            <a:schemeClr val="accent1"/>
-          </a:effectRef>
-          <a:fontRef idx="minor">
-            <a:schemeClr val="lt1"/>
-          </a:fontRef>
-        </p:style>
-        <p:txBody>
-          <a:bodyPr rtlCol="0" anchor="ctr" wrap="square"/>
-          <a:lstStyle/>
-          <a:p>
-            <a:pPr algn="ctr">
-              <a:defRPr sz="1000" b="1">
-                <a:solidFill>
-                  <a:srgbClr val="1E293B"/>
-                </a:solidFill>
-              </a:defRPr>
-            </a:pPr>
-            <a:r>
-              <a:t>第一象限（右上）</a:t>
-            </a:r>
-          </a:p>
-          <a:p>
-            <a:pPr algn="ctr">
-              <a:defRPr sz="900">
-                <a:solidFill>
-                  <a:srgbClr val="475569"/>
-                </a:solidFill>
-              </a:defRPr>
-            </a:pPr>
-            <a:r>
-              <a:t>共識決策 × 階層制</a:t>
-            </a:r>
-          </a:p>
-        </p:txBody>
-      </p:sp>
-      <p:sp>
-        <p:nvSpPr>
-          <p:cNvPr id="8" name="Rounded Rectangle 7"/>
-          <p:cNvSpPr/>
-          <p:nvPr/>
-        </p:nvSpPr>
-        <p:spPr>
-          <a:xfrm>
-            <a:off x="1645920" y="5166360"/>
             <a:ext cx="1051560" cy="1051560"/>
           </a:xfrm>
           <a:prstGeom prst="roundRect">
@@ -11144,32 +11234,44 @@
               </a:defRPr>
             </a:pPr>
             <a:r>
-              <a:t>第三象限（左下）</a:t>
+              <a:t>右上象限</a:t>
             </a:r>
           </a:p>
           <a:p>
             <a:pPr algn="ctr">
-              <a:defRPr sz="900">
+              <a:defRPr sz="850">
                 <a:solidFill>
                   <a:srgbClr val="475569"/>
                 </a:solidFill>
               </a:defRPr>
             </a:pPr>
             <a:r>
-              <a:t>由上而下 × 平等主義</a:t>
-            </a:r>
-          </a:p>
-        </p:txBody>
-      </p:sp>
-      <p:sp>
-        <p:nvSpPr>
-          <p:cNvPr id="9" name="Rounded Rectangle 8"/>
+              <a:t>階級 × 由上而下</a:t>
+            </a:r>
+          </a:p>
+          <a:p>
+            <a:pPr algn="ctr">
+              <a:defRPr sz="850">
+                <a:solidFill>
+                  <a:srgbClr val="475569"/>
+                </a:solidFill>
+              </a:defRPr>
+            </a:pPr>
+            <a:r>
+              <a:t>（中國、法國）</a:t>
+            </a:r>
+          </a:p>
+        </p:txBody>
+      </p:sp>
+      <p:sp>
+        <p:nvSpPr>
+          <p:cNvPr id="8" name="Rounded Rectangle 7"/>
           <p:cNvSpPr/>
           <p:nvPr/>
         </p:nvSpPr>
         <p:spPr>
           <a:xfrm>
-            <a:off x="2697480" y="5166360"/>
+            <a:off x="1645920" y="5166360"/>
             <a:ext cx="1051560" cy="1051560"/>
           </a:xfrm>
           <a:prstGeom prst="roundRect">
@@ -11210,19 +11312,109 @@
               </a:defRPr>
             </a:pPr>
             <a:r>
-              <a:t>第四象限（右下）</a:t>
+              <a:t>左下象限</a:t>
             </a:r>
           </a:p>
           <a:p>
             <a:pPr algn="ctr">
-              <a:defRPr sz="900">
+              <a:defRPr sz="850">
                 <a:solidFill>
                   <a:srgbClr val="475569"/>
                 </a:solidFill>
               </a:defRPr>
             </a:pPr>
             <a:r>
-              <a:t>由上而下 × 階層制</a:t>
+              <a:t>平等 × 共識</a:t>
+            </a:r>
+          </a:p>
+          <a:p>
+            <a:pPr algn="ctr">
+              <a:defRPr sz="850">
+                <a:solidFill>
+                  <a:srgbClr val="475569"/>
+                </a:solidFill>
+              </a:defRPr>
+            </a:pPr>
+            <a:r>
+              <a:t>（丹麥、荷蘭）</a:t>
+            </a:r>
+          </a:p>
+        </p:txBody>
+      </p:sp>
+      <p:sp>
+        <p:nvSpPr>
+          <p:cNvPr id="9" name="Rounded Rectangle 8"/>
+          <p:cNvSpPr/>
+          <p:nvPr/>
+        </p:nvSpPr>
+        <p:spPr>
+          <a:xfrm>
+            <a:off x="2697480" y="5166360"/>
+            <a:ext cx="1051560" cy="1051560"/>
+          </a:xfrm>
+          <a:prstGeom prst="roundRect">
+            <a:avLst/>
+          </a:prstGeom>
+          <a:solidFill>
+            <a:srgbClr val="E0F2FE"/>
+          </a:solidFill>
+          <a:ln w="12700">
+            <a:solidFill>
+              <a:srgbClr val="E2E8F0"/>
+            </a:solidFill>
+          </a:ln>
+        </p:spPr>
+        <p:style>
+          <a:lnRef idx="1">
+            <a:schemeClr val="accent1"/>
+          </a:lnRef>
+          <a:fillRef idx="3">
+            <a:schemeClr val="accent1"/>
+          </a:fillRef>
+          <a:effectRef idx="2">
+            <a:schemeClr val="accent1"/>
+          </a:effectRef>
+          <a:fontRef idx="minor">
+            <a:schemeClr val="lt1"/>
+          </a:fontRef>
+        </p:style>
+        <p:txBody>
+          <a:bodyPr rtlCol="0" anchor="ctr" wrap="square"/>
+          <a:lstStyle/>
+          <a:p>
+            <a:pPr algn="ctr">
+              <a:defRPr sz="1000" b="1">
+                <a:solidFill>
+                  <a:srgbClr val="1E293B"/>
+                </a:solidFill>
+              </a:defRPr>
+            </a:pPr>
+            <a:r>
+              <a:t>右下象限</a:t>
+            </a:r>
+          </a:p>
+          <a:p>
+            <a:pPr algn="ctr">
+              <a:defRPr sz="850">
+                <a:solidFill>
+                  <a:srgbClr val="475569"/>
+                </a:solidFill>
+              </a:defRPr>
+            </a:pPr>
+            <a:r>
+              <a:t>階級 × 共識</a:t>
+            </a:r>
+          </a:p>
+          <a:p>
+            <a:pPr algn="ctr">
+              <a:defRPr sz="850">
+                <a:solidFill>
+                  <a:srgbClr val="475569"/>
+                </a:solidFill>
+              </a:defRPr>
+            </a:pPr>
+            <a:r>
+              <a:t>（德國、日本）</a:t>
             </a:r>
           </a:p>
         </p:txBody>
@@ -11235,7 +11427,7 @@
         </p:nvSpPr>
         <p:spPr>
           <a:xfrm>
-            <a:off x="3176625" y="4383633"/>
+            <a:off x="3176625" y="5729630"/>
             <a:ext cx="219456" cy="219456"/>
           </a:xfrm>
           <a:prstGeom prst="ellipse">
@@ -11336,7 +11528,7 @@
               </a:defRPr>
             </a:pPr>
             <a:r>
-              <a:t>代表國家：日本、德國</a:t>
+              <a:t>代表國家：德國、日本</a:t>
             </a:r>
           </a:p>
           <a:p>
@@ -11366,7 +11558,7 @@
               </a:defRPr>
             </a:pPr>
             <a:r>
-              <a:t>日本根回與稟議模式，兼具嚴明的職級尊卑與全員深度共識。</a:t>
+              <a:t>兼具嚴明的職級尊卑與全員深度共識，重視循序漸進的組織倫理與事前校準。</a:t>
             </a:r>
           </a:p>
           <a:p>
@@ -11983,7 +12175,7 @@
               </a:defRPr>
             </a:pPr>
             <a:r>
-              <a:t>案例二 答案揭曉 · 第四象限（右下：橫軸 84，縱軸 18）</a:t>
+              <a:t>案例二 答案揭曉 · 右上象限（右上：橫軸 84，縱軸 82）</a:t>
             </a:r>
           </a:p>
         </p:txBody>
@@ -12035,7 +12227,7 @@
               </a:defRPr>
             </a:pPr>
             <a:r>
-              <a:t>正確答案（右下）</a:t>
+              <a:t>正確答案（右上）</a:t>
             </a:r>
           </a:p>
           <a:p>
@@ -12047,7 +12239,7 @@
               </a:defRPr>
             </a:pPr>
             <a:r>
-              <a:t>第四象限</a:t>
+              <a:t>右上象限</a:t>
             </a:r>
           </a:p>
           <a:p>
@@ -12059,7 +12251,7 @@
               </a:defRPr>
             </a:pPr>
             <a:r>
-              <a:t>階層制 × 由上而下速決</a:t>
+              <a:t>階級 × 由上而下</a:t>
             </a:r>
           </a:p>
           <a:p>
@@ -12089,7 +12281,7 @@
               </a:defRPr>
             </a:pPr>
             <a:r>
-              <a:t>🎯 靶心座標：(84, 18)</a:t>
+              <a:t>🎯 靶心座標：(84, 82)</a:t>
             </a:r>
           </a:p>
           <a:p>
@@ -12158,19 +12350,31 @@
               </a:defRPr>
             </a:pPr>
             <a:r>
-              <a:t>第二象限（左上）</a:t>
+              <a:t>左上象限</a:t>
             </a:r>
           </a:p>
           <a:p>
             <a:pPr algn="ctr">
-              <a:defRPr sz="900">
+              <a:defRPr sz="850">
                 <a:solidFill>
                   <a:srgbClr val="475569"/>
                 </a:solidFill>
               </a:defRPr>
             </a:pPr>
             <a:r>
-              <a:t>共識決策 × 平等主義</a:t>
+              <a:t>平等 × 由上而下</a:t>
+            </a:r>
+          </a:p>
+          <a:p>
+            <a:pPr algn="ctr">
+              <a:defRPr sz="850">
+                <a:solidFill>
+                  <a:srgbClr val="475569"/>
+                </a:solidFill>
+              </a:defRPr>
+            </a:pPr>
+            <a:r>
+              <a:t>（美國、英國）</a:t>
             </a:r>
           </a:p>
         </p:txBody>
@@ -12184,6 +12388,84 @@
         <p:spPr>
           <a:xfrm>
             <a:off x="2697480" y="4114800"/>
+            <a:ext cx="1051560" cy="1051560"/>
+          </a:xfrm>
+          <a:prstGeom prst="roundRect">
+            <a:avLst/>
+          </a:prstGeom>
+          <a:solidFill>
+            <a:srgbClr val="FEF3C7"/>
+          </a:solidFill>
+          <a:ln w="12700">
+            <a:solidFill>
+              <a:srgbClr val="E2E8F0"/>
+            </a:solidFill>
+          </a:ln>
+        </p:spPr>
+        <p:style>
+          <a:lnRef idx="1">
+            <a:schemeClr val="accent1"/>
+          </a:lnRef>
+          <a:fillRef idx="3">
+            <a:schemeClr val="accent1"/>
+          </a:fillRef>
+          <a:effectRef idx="2">
+            <a:schemeClr val="accent1"/>
+          </a:effectRef>
+          <a:fontRef idx="minor">
+            <a:schemeClr val="lt1"/>
+          </a:fontRef>
+        </p:style>
+        <p:txBody>
+          <a:bodyPr rtlCol="0" anchor="ctr" wrap="square"/>
+          <a:lstStyle/>
+          <a:p>
+            <a:pPr algn="ctr">
+              <a:defRPr sz="1000" b="1">
+                <a:solidFill>
+                  <a:srgbClr val="1E293B"/>
+                </a:solidFill>
+              </a:defRPr>
+            </a:pPr>
+            <a:r>
+              <a:t>右上象限</a:t>
+            </a:r>
+          </a:p>
+          <a:p>
+            <a:pPr algn="ctr">
+              <a:defRPr sz="850">
+                <a:solidFill>
+                  <a:srgbClr val="475569"/>
+                </a:solidFill>
+              </a:defRPr>
+            </a:pPr>
+            <a:r>
+              <a:t>階級 × 由上而下</a:t>
+            </a:r>
+          </a:p>
+          <a:p>
+            <a:pPr algn="ctr">
+              <a:defRPr sz="850">
+                <a:solidFill>
+                  <a:srgbClr val="475569"/>
+                </a:solidFill>
+              </a:defRPr>
+            </a:pPr>
+            <a:r>
+              <a:t>（中國、法國）</a:t>
+            </a:r>
+          </a:p>
+        </p:txBody>
+      </p:sp>
+      <p:sp>
+        <p:nvSpPr>
+          <p:cNvPr id="8" name="Rounded Rectangle 7"/>
+          <p:cNvSpPr/>
+          <p:nvPr/>
+        </p:nvSpPr>
+        <p:spPr>
+          <a:xfrm>
+            <a:off x="1645920" y="5166360"/>
             <a:ext cx="1051560" cy="1051560"/>
           </a:xfrm>
           <a:prstGeom prst="roundRect">
@@ -12224,32 +12506,44 @@
               </a:defRPr>
             </a:pPr>
             <a:r>
-              <a:t>第一象限（右上）</a:t>
+              <a:t>左下象限</a:t>
             </a:r>
           </a:p>
           <a:p>
             <a:pPr algn="ctr">
-              <a:defRPr sz="900">
+              <a:defRPr sz="850">
                 <a:solidFill>
                   <a:srgbClr val="475569"/>
                 </a:solidFill>
               </a:defRPr>
             </a:pPr>
             <a:r>
-              <a:t>共識決策 × 階層制</a:t>
-            </a:r>
-          </a:p>
-        </p:txBody>
-      </p:sp>
-      <p:sp>
-        <p:nvSpPr>
-          <p:cNvPr id="8" name="Rounded Rectangle 7"/>
+              <a:t>平等 × 共識</a:t>
+            </a:r>
+          </a:p>
+          <a:p>
+            <a:pPr algn="ctr">
+              <a:defRPr sz="850">
+                <a:solidFill>
+                  <a:srgbClr val="475569"/>
+                </a:solidFill>
+              </a:defRPr>
+            </a:pPr>
+            <a:r>
+              <a:t>（丹麥、荷蘭）</a:t>
+            </a:r>
+          </a:p>
+        </p:txBody>
+      </p:sp>
+      <p:sp>
+        <p:nvSpPr>
+          <p:cNvPr id="9" name="Rounded Rectangle 8"/>
           <p:cNvSpPr/>
           <p:nvPr/>
         </p:nvSpPr>
         <p:spPr>
           <a:xfrm>
-            <a:off x="1645920" y="5166360"/>
+            <a:off x="2697480" y="5166360"/>
             <a:ext cx="1051560" cy="1051560"/>
           </a:xfrm>
           <a:prstGeom prst="roundRect">
@@ -12290,85 +12584,31 @@
               </a:defRPr>
             </a:pPr>
             <a:r>
-              <a:t>第三象限（左下）</a:t>
+              <a:t>右下象限</a:t>
             </a:r>
           </a:p>
           <a:p>
             <a:pPr algn="ctr">
-              <a:defRPr sz="900">
+              <a:defRPr sz="850">
                 <a:solidFill>
                   <a:srgbClr val="475569"/>
                 </a:solidFill>
               </a:defRPr>
             </a:pPr>
             <a:r>
-              <a:t>由上而下 × 平等主義</a:t>
-            </a:r>
-          </a:p>
-        </p:txBody>
-      </p:sp>
-      <p:sp>
-        <p:nvSpPr>
-          <p:cNvPr id="9" name="Rounded Rectangle 8"/>
-          <p:cNvSpPr/>
-          <p:nvPr/>
-        </p:nvSpPr>
-        <p:spPr>
-          <a:xfrm>
-            <a:off x="2697480" y="5166360"/>
-            <a:ext cx="1051560" cy="1051560"/>
-          </a:xfrm>
-          <a:prstGeom prst="roundRect">
-            <a:avLst/>
-          </a:prstGeom>
-          <a:solidFill>
-            <a:srgbClr val="E0F2FE"/>
-          </a:solidFill>
-          <a:ln w="12700">
-            <a:solidFill>
-              <a:srgbClr val="E2E8F0"/>
-            </a:solidFill>
-          </a:ln>
-        </p:spPr>
-        <p:style>
-          <a:lnRef idx="1">
-            <a:schemeClr val="accent1"/>
-          </a:lnRef>
-          <a:fillRef idx="3">
-            <a:schemeClr val="accent1"/>
-          </a:fillRef>
-          <a:effectRef idx="2">
-            <a:schemeClr val="accent1"/>
-          </a:effectRef>
-          <a:fontRef idx="minor">
-            <a:schemeClr val="lt1"/>
-          </a:fontRef>
-        </p:style>
-        <p:txBody>
-          <a:bodyPr rtlCol="0" anchor="ctr" wrap="square"/>
-          <a:lstStyle/>
+              <a:t>階級 × 共識</a:t>
+            </a:r>
+          </a:p>
           <a:p>
             <a:pPr algn="ctr">
-              <a:defRPr sz="1000" b="1">
-                <a:solidFill>
-                  <a:srgbClr val="1E293B"/>
-                </a:solidFill>
-              </a:defRPr>
-            </a:pPr>
-            <a:r>
-              <a:t>第四象限（右下）</a:t>
-            </a:r>
-          </a:p>
-          <a:p>
-            <a:pPr algn="ctr">
-              <a:defRPr sz="900">
+              <a:defRPr sz="850">
                 <a:solidFill>
                   <a:srgbClr val="475569"/>
                 </a:solidFill>
               </a:defRPr>
             </a:pPr>
             <a:r>
-              <a:t>由上而下 × 階層制</a:t>
+              <a:t>（德國、日本）</a:t>
             </a:r>
           </a:p>
         </p:txBody>
@@ -12381,7 +12621,7 @@
         </p:nvSpPr>
         <p:spPr>
           <a:xfrm>
-            <a:off x="3302812" y="5729630"/>
+            <a:off x="3302812" y="4383633"/>
             <a:ext cx="219456" cy="219456"/>
           </a:xfrm>
           <a:prstGeom prst="ellipse">

--- a/誰是文化王_備案簡報_Who_Is_Culture_King.pptx
+++ b/誰是文化王_備案簡報_Who_Is_Culture_King.pptx
@@ -5670,11 +5670,11 @@
           </a:fontRef>
         </p:style>
         <p:txBody>
-          <a:bodyPr rtlCol="0" anchor="ctr" wrap="square" lIns="365760" rIns="365760" tIns="365760"/>
+          <a:bodyPr rtlCol="0" anchor="ctr" wrap="square" lIns="365760" rIns="365760" tIns="274320"/>
           <a:lstStyle/>
           <a:p>
             <a:pPr algn="ctr">
-              <a:defRPr sz="2000" b="1">
+              <a:defRPr sz="1800" b="1">
                 <a:solidFill>
                   <a:srgbClr val="1E293B"/>
                 </a:solidFill>
@@ -5687,9 +5687,9 @@
           <a:p>
             <a:pPr>
               <a:spcBef>
-                <a:spcPts val="400"/>
+                <a:spcPts val="300"/>
               </a:spcBef>
-              <a:defRPr sz="1500" b="1">
+              <a:defRPr sz="1350" b="1">
                 <a:solidFill>
                   <a:srgbClr val="0284C7"/>
                 </a:solidFill>
@@ -5702,11 +5702,41 @@
           <a:p>
             <a:pPr>
               <a:spcBef>
-                <a:spcPts val="1600"/>
+                <a:spcPts val="900"/>
               </a:spcBef>
-              <a:defRPr sz="1700" b="1">
-                <a:solidFill>
-                  <a:srgbClr val="1E293B"/>
+              <a:defRPr sz="1400" b="1">
+                <a:solidFill>
+                  <a:srgbClr val="4F46E5"/>
+                </a:solidFill>
+              </a:defRPr>
+            </a:pPr>
+            <a:r>
+              <a:t>題目線索：</a:t>
+            </a:r>
+          </a:p>
+          <a:p>
+            <a:pPr>
+              <a:lnSpc>
+                <a:spcPct val="125000"/>
+              </a:lnSpc>
+              <a:defRPr sz="1200">
+                <a:solidFill>
+                  <a:srgbClr val="475569"/>
+                </a:solidFill>
+              </a:defRPr>
+            </a:pPr>
+            <a:r>
+              <a:t>工程師當面直言挑戰主管反映極致平等；崇尚先跑再修並由主管拍板，反映由上而下敏捷速決。</a:t>
+            </a:r>
+          </a:p>
+          <a:p>
+            <a:pPr>
+              <a:spcBef>
+                <a:spcPts val="900"/>
+              </a:spcBef>
+              <a:defRPr sz="1400" b="1">
+                <a:solidFill>
+                  <a:srgbClr val="0284C7"/>
                 </a:solidFill>
               </a:defRPr>
             </a:pPr>
@@ -5717,9 +5747,9 @@
           <a:p>
             <a:pPr>
               <a:lnSpc>
-                <a:spcPct val="135000"/>
+                <a:spcPct val="125000"/>
               </a:lnSpc>
-              <a:defRPr sz="1450">
+              <a:defRPr sz="1200">
                 <a:solidFill>
                   <a:srgbClr val="475569"/>
                 </a:solidFill>
@@ -5732,11 +5762,11 @@
           <a:p>
             <a:pPr>
               <a:spcBef>
-                <a:spcPts val="1600"/>
+                <a:spcPts val="900"/>
               </a:spcBef>
-              <a:defRPr sz="1700" b="1">
-                <a:solidFill>
-                  <a:srgbClr val="1E293B"/>
+              <a:defRPr sz="1400" b="1">
+                <a:solidFill>
+                  <a:srgbClr val="D97706"/>
                 </a:solidFill>
               </a:defRPr>
             </a:pPr>
@@ -5747,9 +5777,9 @@
           <a:p>
             <a:pPr>
               <a:lnSpc>
-                <a:spcPct val="135000"/>
+                <a:spcPct val="125000"/>
               </a:lnSpc>
-              <a:defRPr sz="1450">
+              <a:defRPr sz="1200">
                 <a:solidFill>
                   <a:srgbClr val="475569"/>
                 </a:solidFill>
@@ -5762,11 +5792,11 @@
           <a:p>
             <a:pPr>
               <a:spcBef>
-                <a:spcPts val="1600"/>
+                <a:spcPts val="900"/>
               </a:spcBef>
-              <a:defRPr sz="1700" b="1">
-                <a:solidFill>
-                  <a:srgbClr val="1E293B"/>
+              <a:defRPr sz="1400" b="1">
+                <a:solidFill>
+                  <a:srgbClr val="059669"/>
                 </a:solidFill>
               </a:defRPr>
             </a:pPr>
@@ -5777,9 +5807,9 @@
           <a:p>
             <a:pPr>
               <a:lnSpc>
-                <a:spcPct val="135000"/>
+                <a:spcPct val="125000"/>
               </a:lnSpc>
-              <a:defRPr sz="1450">
+              <a:defRPr sz="1200">
                 <a:solidFill>
                   <a:srgbClr val="475569"/>
                 </a:solidFill>
@@ -6864,11 +6894,11 @@
           </a:fontRef>
         </p:style>
         <p:txBody>
-          <a:bodyPr rtlCol="0" anchor="ctr" wrap="square" lIns="365760" rIns="365760" tIns="365760"/>
+          <a:bodyPr rtlCol="0" anchor="ctr" wrap="square" lIns="365760" rIns="365760" tIns="274320"/>
           <a:lstStyle/>
           <a:p>
             <a:pPr algn="ctr">
-              <a:defRPr sz="2000" b="1">
+              <a:defRPr sz="1800" b="1">
                 <a:solidFill>
                   <a:srgbClr val="1E293B"/>
                 </a:solidFill>
@@ -6881,9 +6911,9 @@
           <a:p>
             <a:pPr>
               <a:spcBef>
-                <a:spcPts val="400"/>
+                <a:spcPts val="300"/>
               </a:spcBef>
-              <a:defRPr sz="1500" b="1">
+              <a:defRPr sz="1350" b="1">
                 <a:solidFill>
                   <a:srgbClr val="0284C7"/>
                 </a:solidFill>
@@ -6896,11 +6926,41 @@
           <a:p>
             <a:pPr>
               <a:spcBef>
-                <a:spcPts val="1600"/>
+                <a:spcPts val="900"/>
               </a:spcBef>
-              <a:defRPr sz="1700" b="1">
-                <a:solidFill>
-                  <a:srgbClr val="1E293B"/>
+              <a:defRPr sz="1400" b="1">
+                <a:solidFill>
+                  <a:srgbClr val="4F46E5"/>
+                </a:solidFill>
+              </a:defRPr>
+            </a:pPr>
+            <a:r>
+              <a:t>題目線索：</a:t>
+            </a:r>
+          </a:p>
+          <a:p>
+            <a:pPr>
+              <a:lnSpc>
+                <a:spcPct val="125000"/>
+              </a:lnSpc>
+              <a:defRPr sz="1200">
+                <a:solidFill>
+                  <a:srgbClr val="475569"/>
+                </a:solidFill>
+              </a:defRPr>
+            </a:pPr>
+            <a:r>
+              <a:t>基層測試員平起平坐主導談判反映高度平等；堅持全員公開共審達成一致，反映神聖共識大承諾。</a:t>
+            </a:r>
+          </a:p>
+          <a:p>
+            <a:pPr>
+              <a:spcBef>
+                <a:spcPts val="900"/>
+              </a:spcBef>
+              <a:defRPr sz="1400" b="1">
+                <a:solidFill>
+                  <a:srgbClr val="0284C7"/>
                 </a:solidFill>
               </a:defRPr>
             </a:pPr>
@@ -6911,9 +6971,9 @@
           <a:p>
             <a:pPr>
               <a:lnSpc>
-                <a:spcPct val="135000"/>
+                <a:spcPct val="125000"/>
               </a:lnSpc>
-              <a:defRPr sz="1450">
+              <a:defRPr sz="1200">
                 <a:solidFill>
                   <a:srgbClr val="475569"/>
                 </a:solidFill>
@@ -6926,11 +6986,11 @@
           <a:p>
             <a:pPr>
               <a:spcBef>
-                <a:spcPts val="1600"/>
+                <a:spcPts val="900"/>
               </a:spcBef>
-              <a:defRPr sz="1700" b="1">
-                <a:solidFill>
-                  <a:srgbClr val="1E293B"/>
+              <a:defRPr sz="1400" b="1">
+                <a:solidFill>
+                  <a:srgbClr val="D97706"/>
                 </a:solidFill>
               </a:defRPr>
             </a:pPr>
@@ -6941,9 +7001,9 @@
           <a:p>
             <a:pPr>
               <a:lnSpc>
-                <a:spcPct val="135000"/>
+                <a:spcPct val="125000"/>
               </a:lnSpc>
-              <a:defRPr sz="1450">
+              <a:defRPr sz="1200">
                 <a:solidFill>
                   <a:srgbClr val="475569"/>
                 </a:solidFill>
@@ -6956,11 +7016,11 @@
           <a:p>
             <a:pPr>
               <a:spcBef>
-                <a:spcPts val="1600"/>
+                <a:spcPts val="900"/>
               </a:spcBef>
-              <a:defRPr sz="1700" b="1">
-                <a:solidFill>
-                  <a:srgbClr val="1E293B"/>
+              <a:defRPr sz="1400" b="1">
+                <a:solidFill>
+                  <a:srgbClr val="059669"/>
                 </a:solidFill>
               </a:defRPr>
             </a:pPr>
@@ -6971,9 +7031,9 @@
           <a:p>
             <a:pPr>
               <a:lnSpc>
-                <a:spcPct val="135000"/>
+                <a:spcPct val="125000"/>
               </a:lnSpc>
-              <a:defRPr sz="1450">
+              <a:defRPr sz="1200">
                 <a:solidFill>
                   <a:srgbClr val="475569"/>
                 </a:solidFill>
@@ -11502,11 +11562,11 @@
           </a:fontRef>
         </p:style>
         <p:txBody>
-          <a:bodyPr rtlCol="0" anchor="ctr" wrap="square" lIns="365760" rIns="365760" tIns="365760"/>
+          <a:bodyPr rtlCol="0" anchor="ctr" wrap="square" lIns="365760" rIns="365760" tIns="274320"/>
           <a:lstStyle/>
           <a:p>
             <a:pPr algn="ctr">
-              <a:defRPr sz="2000" b="1">
+              <a:defRPr sz="1800" b="1">
                 <a:solidFill>
                   <a:srgbClr val="1E293B"/>
                 </a:solidFill>
@@ -11519,9 +11579,9 @@
           <a:p>
             <a:pPr>
               <a:spcBef>
-                <a:spcPts val="400"/>
+                <a:spcPts val="300"/>
               </a:spcBef>
-              <a:defRPr sz="1500" b="1">
+              <a:defRPr sz="1350" b="1">
                 <a:solidFill>
                   <a:srgbClr val="0284C7"/>
                 </a:solidFill>
@@ -11534,11 +11594,41 @@
           <a:p>
             <a:pPr>
               <a:spcBef>
-                <a:spcPts val="1600"/>
+                <a:spcPts val="900"/>
               </a:spcBef>
-              <a:defRPr sz="1700" b="1">
-                <a:solidFill>
-                  <a:srgbClr val="1E293B"/>
+              <a:defRPr sz="1400" b="1">
+                <a:solidFill>
+                  <a:srgbClr val="4F46E5"/>
+                </a:solidFill>
+              </a:defRPr>
+            </a:pPr>
+            <a:r>
+              <a:t>題目線索：</a:t>
+            </a:r>
+          </a:p>
+          <a:p>
+            <a:pPr>
+              <a:lnSpc>
+                <a:spcPct val="125000"/>
+              </a:lnSpc>
+              <a:defRPr sz="1200">
+                <a:solidFill>
+                  <a:srgbClr val="475569"/>
+                </a:solidFill>
+              </a:defRPr>
+            </a:pPr>
+            <a:r>
+              <a:t>大會全員沉默低頭反映重階級；私下批評未在會前討論，則反映需事前摸底（根回）凝聚共識。</a:t>
+            </a:r>
+          </a:p>
+          <a:p>
+            <a:pPr>
+              <a:spcBef>
+                <a:spcPts val="900"/>
+              </a:spcBef>
+              <a:defRPr sz="1400" b="1">
+                <a:solidFill>
+                  <a:srgbClr val="0284C7"/>
                 </a:solidFill>
               </a:defRPr>
             </a:pPr>
@@ -11549,9 +11639,9 @@
           <a:p>
             <a:pPr>
               <a:lnSpc>
-                <a:spcPct val="135000"/>
+                <a:spcPct val="125000"/>
               </a:lnSpc>
-              <a:defRPr sz="1450">
+              <a:defRPr sz="1200">
                 <a:solidFill>
                   <a:srgbClr val="475569"/>
                 </a:solidFill>
@@ -11564,11 +11654,11 @@
           <a:p>
             <a:pPr>
               <a:spcBef>
-                <a:spcPts val="1600"/>
+                <a:spcPts val="900"/>
               </a:spcBef>
-              <a:defRPr sz="1700" b="1">
-                <a:solidFill>
-                  <a:srgbClr val="1E293B"/>
+              <a:defRPr sz="1400" b="1">
+                <a:solidFill>
+                  <a:srgbClr val="D97706"/>
                 </a:solidFill>
               </a:defRPr>
             </a:pPr>
@@ -11579,9 +11669,9 @@
           <a:p>
             <a:pPr>
               <a:lnSpc>
-                <a:spcPct val="135000"/>
+                <a:spcPct val="125000"/>
               </a:lnSpc>
-              <a:defRPr sz="1450">
+              <a:defRPr sz="1200">
                 <a:solidFill>
                   <a:srgbClr val="475569"/>
                 </a:solidFill>
@@ -11594,11 +11684,11 @@
           <a:p>
             <a:pPr>
               <a:spcBef>
-                <a:spcPts val="1600"/>
+                <a:spcPts val="900"/>
               </a:spcBef>
-              <a:defRPr sz="1700" b="1">
-                <a:solidFill>
-                  <a:srgbClr val="1E293B"/>
+              <a:defRPr sz="1400" b="1">
+                <a:solidFill>
+                  <a:srgbClr val="059669"/>
                 </a:solidFill>
               </a:defRPr>
             </a:pPr>
@@ -11609,9 +11699,9 @@
           <a:p>
             <a:pPr>
               <a:lnSpc>
-                <a:spcPct val="135000"/>
+                <a:spcPct val="125000"/>
               </a:lnSpc>
-              <a:defRPr sz="1450">
+              <a:defRPr sz="1200">
                 <a:solidFill>
                   <a:srgbClr val="475569"/>
                 </a:solidFill>
@@ -12696,11 +12786,11 @@
           </a:fontRef>
         </p:style>
         <p:txBody>
-          <a:bodyPr rtlCol="0" anchor="ctr" wrap="square" lIns="365760" rIns="365760" tIns="365760"/>
+          <a:bodyPr rtlCol="0" anchor="ctr" wrap="square" lIns="365760" rIns="365760" tIns="274320"/>
           <a:lstStyle/>
           <a:p>
             <a:pPr algn="ctr">
-              <a:defRPr sz="2000" b="1">
+              <a:defRPr sz="1800" b="1">
                 <a:solidFill>
                   <a:srgbClr val="1E293B"/>
                 </a:solidFill>
@@ -12713,9 +12803,9 @@
           <a:p>
             <a:pPr>
               <a:spcBef>
-                <a:spcPts val="400"/>
+                <a:spcPts val="300"/>
               </a:spcBef>
-              <a:defRPr sz="1500" b="1">
+              <a:defRPr sz="1350" b="1">
                 <a:solidFill>
                   <a:srgbClr val="0284C7"/>
                 </a:solidFill>
@@ -12728,11 +12818,41 @@
           <a:p>
             <a:pPr>
               <a:spcBef>
-                <a:spcPts val="1600"/>
+                <a:spcPts val="900"/>
               </a:spcBef>
-              <a:defRPr sz="1700" b="1">
-                <a:solidFill>
-                  <a:srgbClr val="1E293B"/>
+              <a:defRPr sz="1400" b="1">
+                <a:solidFill>
+                  <a:srgbClr val="4F46E5"/>
+                </a:solidFill>
+              </a:defRPr>
+            </a:pPr>
+            <a:r>
+              <a:t>題目線索：</a:t>
+            </a:r>
+          </a:p>
+          <a:p>
+            <a:pPr>
+              <a:lnSpc>
+                <a:spcPct val="125000"/>
+              </a:lnSpc>
+              <a:defRPr sz="1200">
+                <a:solidFill>
+                  <a:srgbClr val="475569"/>
+                </a:solidFill>
+              </a:defRPr>
+            </a:pPr>
+            <a:r>
+              <a:t>基層無人敢擅自做主反映重階層；領班急求主管明確裁示，反映危機時仰賴由上而下拍板擔責。</a:t>
+            </a:r>
+          </a:p>
+          <a:p>
+            <a:pPr>
+              <a:spcBef>
+                <a:spcPts val="900"/>
+              </a:spcBef>
+              <a:defRPr sz="1400" b="1">
+                <a:solidFill>
+                  <a:srgbClr val="0284C7"/>
                 </a:solidFill>
               </a:defRPr>
             </a:pPr>
@@ -12743,9 +12863,9 @@
           <a:p>
             <a:pPr>
               <a:lnSpc>
-                <a:spcPct val="135000"/>
+                <a:spcPct val="125000"/>
               </a:lnSpc>
-              <a:defRPr sz="1450">
+              <a:defRPr sz="1200">
                 <a:solidFill>
                   <a:srgbClr val="475569"/>
                 </a:solidFill>
@@ -12758,11 +12878,11 @@
           <a:p>
             <a:pPr>
               <a:spcBef>
-                <a:spcPts val="1600"/>
+                <a:spcPts val="900"/>
               </a:spcBef>
-              <a:defRPr sz="1700" b="1">
-                <a:solidFill>
-                  <a:srgbClr val="1E293B"/>
+              <a:defRPr sz="1400" b="1">
+                <a:solidFill>
+                  <a:srgbClr val="D97706"/>
                 </a:solidFill>
               </a:defRPr>
             </a:pPr>
@@ -12773,9 +12893,9 @@
           <a:p>
             <a:pPr>
               <a:lnSpc>
-                <a:spcPct val="135000"/>
+                <a:spcPct val="125000"/>
               </a:lnSpc>
-              <a:defRPr sz="1450">
+              <a:defRPr sz="1200">
                 <a:solidFill>
                   <a:srgbClr val="475569"/>
                 </a:solidFill>
@@ -12788,11 +12908,11 @@
           <a:p>
             <a:pPr>
               <a:spcBef>
-                <a:spcPts val="1600"/>
+                <a:spcPts val="900"/>
               </a:spcBef>
-              <a:defRPr sz="1700" b="1">
-                <a:solidFill>
-                  <a:srgbClr val="1E293B"/>
+              <a:defRPr sz="1400" b="1">
+                <a:solidFill>
+                  <a:srgbClr val="059669"/>
                 </a:solidFill>
               </a:defRPr>
             </a:pPr>
@@ -12803,9 +12923,9 @@
           <a:p>
             <a:pPr>
               <a:lnSpc>
-                <a:spcPct val="135000"/>
+                <a:spcPct val="125000"/>
               </a:lnSpc>
-              <a:defRPr sz="1450">
+              <a:defRPr sz="1200">
                 <a:solidFill>
                   <a:srgbClr val="475569"/>
                 </a:solidFill>

--- a/誰是文化王_備案簡報_Who_Is_Culture_King.pptx
+++ b/誰是文化王_備案簡報_Who_Is_Culture_King.pptx
@@ -6063,7 +6063,7 @@
           <a:lstStyle/>
           <a:p>
             <a:pPr algn="ctr">
-              <a:defRPr sz="1300" b="1">
+              <a:defRPr sz="1400" b="1">
                 <a:solidFill>
                   <a:srgbClr val="0284C7"/>
                 </a:solidFill>
@@ -6078,7 +6078,7 @@
               <a:spcBef>
                 <a:spcPts val="600"/>
               </a:spcBef>
-              <a:defRPr sz="1100" b="1">
+              <a:defRPr sz="1300" b="1">
                 <a:solidFill>
                   <a:srgbClr val="1E293B"/>
                 </a:solidFill>
@@ -6091,9 +6091,9 @@
           <a:p>
             <a:pPr>
               <a:lnSpc>
-                <a:spcPct val="125000"/>
+                <a:spcPct val="120000"/>
               </a:lnSpc>
-              <a:defRPr sz="1050">
+              <a:defRPr sz="1200">
                 <a:solidFill>
                   <a:srgbClr val="475569"/>
                 </a:solidFill>
@@ -6108,7 +6108,7 @@
               <a:spcBef>
                 <a:spcPts val="600"/>
               </a:spcBef>
-              <a:defRPr sz="1100" b="1">
+              <a:defRPr sz="1300" b="1">
                 <a:solidFill>
                   <a:srgbClr val="1E293B"/>
                 </a:solidFill>
@@ -6121,9 +6121,9 @@
           <a:p>
             <a:pPr>
               <a:lnSpc>
-                <a:spcPct val="125000"/>
+                <a:spcPct val="120000"/>
               </a:lnSpc>
-              <a:defRPr sz="1050">
+              <a:defRPr sz="1200">
                 <a:solidFill>
                   <a:srgbClr val="475569"/>
                 </a:solidFill>
@@ -6138,7 +6138,7 @@
               <a:spcBef>
                 <a:spcPts val="600"/>
               </a:spcBef>
-              <a:defRPr sz="1100" b="1">
+              <a:defRPr sz="1300" b="1">
                 <a:solidFill>
                   <a:srgbClr val="1E293B"/>
                 </a:solidFill>
@@ -6151,9 +6151,9 @@
           <a:p>
             <a:pPr>
               <a:lnSpc>
-                <a:spcPct val="125000"/>
+                <a:spcPct val="120000"/>
               </a:lnSpc>
-              <a:defRPr sz="1050">
+              <a:defRPr sz="1200">
                 <a:solidFill>
                   <a:srgbClr val="475569"/>
                 </a:solidFill>
@@ -6168,7 +6168,7 @@
               <a:spcBef>
                 <a:spcPts val="600"/>
               </a:spcBef>
-              <a:defRPr sz="1100" b="1">
+              <a:defRPr sz="1300" b="1">
                 <a:solidFill>
                   <a:srgbClr val="1E293B"/>
                 </a:solidFill>
@@ -6181,9 +6181,9 @@
           <a:p>
             <a:pPr>
               <a:lnSpc>
-                <a:spcPct val="125000"/>
+                <a:spcPct val="120000"/>
               </a:lnSpc>
-              <a:defRPr sz="1050">
+              <a:defRPr sz="1200">
                 <a:solidFill>
                   <a:srgbClr val="475569"/>
                 </a:solidFill>
@@ -6235,7 +6235,7 @@
           <a:lstStyle/>
           <a:p>
             <a:pPr algn="ctr">
-              <a:defRPr sz="1200" b="1">
+              <a:defRPr sz="1350" b="1">
                 <a:solidFill>
                   <a:srgbClr val="FEF3C7"/>
                 </a:solidFill>
@@ -10731,7 +10731,7 @@
           <a:lstStyle/>
           <a:p>
             <a:pPr algn="ctr">
-              <a:defRPr sz="1300" b="1">
+              <a:defRPr sz="1400" b="1">
                 <a:solidFill>
                   <a:srgbClr val="0284C7"/>
                 </a:solidFill>
@@ -10746,7 +10746,7 @@
               <a:spcBef>
                 <a:spcPts val="600"/>
               </a:spcBef>
-              <a:defRPr sz="1100" b="1">
+              <a:defRPr sz="1300" b="1">
                 <a:solidFill>
                   <a:srgbClr val="1E293B"/>
                 </a:solidFill>
@@ -10759,9 +10759,9 @@
           <a:p>
             <a:pPr>
               <a:lnSpc>
-                <a:spcPct val="125000"/>
+                <a:spcPct val="120000"/>
               </a:lnSpc>
-              <a:defRPr sz="1050">
+              <a:defRPr sz="1200">
                 <a:solidFill>
                   <a:srgbClr val="475569"/>
                 </a:solidFill>
@@ -10776,7 +10776,7 @@
               <a:spcBef>
                 <a:spcPts val="600"/>
               </a:spcBef>
-              <a:defRPr sz="1100" b="1">
+              <a:defRPr sz="1300" b="1">
                 <a:solidFill>
                   <a:srgbClr val="1E293B"/>
                 </a:solidFill>
@@ -10789,9 +10789,9 @@
           <a:p>
             <a:pPr>
               <a:lnSpc>
-                <a:spcPct val="125000"/>
+                <a:spcPct val="120000"/>
               </a:lnSpc>
-              <a:defRPr sz="1050">
+              <a:defRPr sz="1200">
                 <a:solidFill>
                   <a:srgbClr val="475569"/>
                 </a:solidFill>
@@ -10806,7 +10806,7 @@
               <a:spcBef>
                 <a:spcPts val="600"/>
               </a:spcBef>
-              <a:defRPr sz="1100" b="1">
+              <a:defRPr sz="1300" b="1">
                 <a:solidFill>
                   <a:srgbClr val="1E293B"/>
                 </a:solidFill>
@@ -10819,9 +10819,9 @@
           <a:p>
             <a:pPr>
               <a:lnSpc>
-                <a:spcPct val="125000"/>
+                <a:spcPct val="120000"/>
               </a:lnSpc>
-              <a:defRPr sz="1050">
+              <a:defRPr sz="1200">
                 <a:solidFill>
                   <a:srgbClr val="475569"/>
                 </a:solidFill>
@@ -10836,7 +10836,7 @@
               <a:spcBef>
                 <a:spcPts val="600"/>
               </a:spcBef>
-              <a:defRPr sz="1100" b="1">
+              <a:defRPr sz="1300" b="1">
                 <a:solidFill>
                   <a:srgbClr val="1E293B"/>
                 </a:solidFill>
@@ -10849,9 +10849,9 @@
           <a:p>
             <a:pPr>
               <a:lnSpc>
-                <a:spcPct val="125000"/>
+                <a:spcPct val="120000"/>
               </a:lnSpc>
-              <a:defRPr sz="1050">
+              <a:defRPr sz="1200">
                 <a:solidFill>
                   <a:srgbClr val="475569"/>
                 </a:solidFill>
@@ -10903,7 +10903,7 @@
           <a:lstStyle/>
           <a:p>
             <a:pPr algn="ctr">
-              <a:defRPr sz="1200" b="1">
+              <a:defRPr sz="1350" b="1">
                 <a:solidFill>
                   <a:srgbClr val="FEF3C7"/>
                 </a:solidFill>
@@ -11955,7 +11955,7 @@
           <a:lstStyle/>
           <a:p>
             <a:pPr algn="ctr">
-              <a:defRPr sz="1300" b="1">
+              <a:defRPr sz="1400" b="1">
                 <a:solidFill>
                   <a:srgbClr val="0284C7"/>
                 </a:solidFill>
@@ -11970,7 +11970,7 @@
               <a:spcBef>
                 <a:spcPts val="600"/>
               </a:spcBef>
-              <a:defRPr sz="1100" b="1">
+              <a:defRPr sz="1300" b="1">
                 <a:solidFill>
                   <a:srgbClr val="1E293B"/>
                 </a:solidFill>
@@ -11983,9 +11983,9 @@
           <a:p>
             <a:pPr>
               <a:lnSpc>
-                <a:spcPct val="125000"/>
+                <a:spcPct val="120000"/>
               </a:lnSpc>
-              <a:defRPr sz="1050">
+              <a:defRPr sz="1200">
                 <a:solidFill>
                   <a:srgbClr val="475569"/>
                 </a:solidFill>
@@ -12000,7 +12000,7 @@
               <a:spcBef>
                 <a:spcPts val="600"/>
               </a:spcBef>
-              <a:defRPr sz="1100" b="1">
+              <a:defRPr sz="1300" b="1">
                 <a:solidFill>
                   <a:srgbClr val="1E293B"/>
                 </a:solidFill>
@@ -12013,9 +12013,9 @@
           <a:p>
             <a:pPr>
               <a:lnSpc>
-                <a:spcPct val="125000"/>
+                <a:spcPct val="120000"/>
               </a:lnSpc>
-              <a:defRPr sz="1050">
+              <a:defRPr sz="1200">
                 <a:solidFill>
                   <a:srgbClr val="475569"/>
                 </a:solidFill>
@@ -12030,7 +12030,7 @@
               <a:spcBef>
                 <a:spcPts val="600"/>
               </a:spcBef>
-              <a:defRPr sz="1100" b="1">
+              <a:defRPr sz="1300" b="1">
                 <a:solidFill>
                   <a:srgbClr val="1E293B"/>
                 </a:solidFill>
@@ -12043,9 +12043,9 @@
           <a:p>
             <a:pPr>
               <a:lnSpc>
-                <a:spcPct val="125000"/>
+                <a:spcPct val="120000"/>
               </a:lnSpc>
-              <a:defRPr sz="1050">
+              <a:defRPr sz="1200">
                 <a:solidFill>
                   <a:srgbClr val="475569"/>
                 </a:solidFill>
@@ -12060,7 +12060,7 @@
               <a:spcBef>
                 <a:spcPts val="600"/>
               </a:spcBef>
-              <a:defRPr sz="1100" b="1">
+              <a:defRPr sz="1300" b="1">
                 <a:solidFill>
                   <a:srgbClr val="1E293B"/>
                 </a:solidFill>
@@ -12073,9 +12073,9 @@
           <a:p>
             <a:pPr>
               <a:lnSpc>
-                <a:spcPct val="125000"/>
+                <a:spcPct val="120000"/>
               </a:lnSpc>
-              <a:defRPr sz="1050">
+              <a:defRPr sz="1200">
                 <a:solidFill>
                   <a:srgbClr val="475569"/>
                 </a:solidFill>
@@ -12127,7 +12127,7 @@
           <a:lstStyle/>
           <a:p>
             <a:pPr algn="ctr">
-              <a:defRPr sz="1200" b="1">
+              <a:defRPr sz="1350" b="1">
                 <a:solidFill>
                   <a:srgbClr val="FEF3C7"/>
                 </a:solidFill>
@@ -13179,7 +13179,7 @@
           <a:lstStyle/>
           <a:p>
             <a:pPr algn="ctr">
-              <a:defRPr sz="1300" b="1">
+              <a:defRPr sz="1400" b="1">
                 <a:solidFill>
                   <a:srgbClr val="0284C7"/>
                 </a:solidFill>
@@ -13194,7 +13194,7 @@
               <a:spcBef>
                 <a:spcPts val="600"/>
               </a:spcBef>
-              <a:defRPr sz="1100" b="1">
+              <a:defRPr sz="1300" b="1">
                 <a:solidFill>
                   <a:srgbClr val="1E293B"/>
                 </a:solidFill>
@@ -13207,9 +13207,9 @@
           <a:p>
             <a:pPr>
               <a:lnSpc>
-                <a:spcPct val="125000"/>
+                <a:spcPct val="120000"/>
               </a:lnSpc>
-              <a:defRPr sz="1050">
+              <a:defRPr sz="1200">
                 <a:solidFill>
                   <a:srgbClr val="475569"/>
                 </a:solidFill>
@@ -13224,7 +13224,7 @@
               <a:spcBef>
                 <a:spcPts val="600"/>
               </a:spcBef>
-              <a:defRPr sz="1100" b="1">
+              <a:defRPr sz="1300" b="1">
                 <a:solidFill>
                   <a:srgbClr val="1E293B"/>
                 </a:solidFill>
@@ -13237,9 +13237,9 @@
           <a:p>
             <a:pPr>
               <a:lnSpc>
-                <a:spcPct val="125000"/>
+                <a:spcPct val="120000"/>
               </a:lnSpc>
-              <a:defRPr sz="1050">
+              <a:defRPr sz="1200">
                 <a:solidFill>
                   <a:srgbClr val="475569"/>
                 </a:solidFill>
@@ -13254,7 +13254,7 @@
               <a:spcBef>
                 <a:spcPts val="600"/>
               </a:spcBef>
-              <a:defRPr sz="1100" b="1">
+              <a:defRPr sz="1300" b="1">
                 <a:solidFill>
                   <a:srgbClr val="1E293B"/>
                 </a:solidFill>
@@ -13267,9 +13267,9 @@
           <a:p>
             <a:pPr>
               <a:lnSpc>
-                <a:spcPct val="125000"/>
+                <a:spcPct val="120000"/>
               </a:lnSpc>
-              <a:defRPr sz="1050">
+              <a:defRPr sz="1200">
                 <a:solidFill>
                   <a:srgbClr val="475569"/>
                 </a:solidFill>
@@ -13284,7 +13284,7 @@
               <a:spcBef>
                 <a:spcPts val="600"/>
               </a:spcBef>
-              <a:defRPr sz="1100" b="1">
+              <a:defRPr sz="1300" b="1">
                 <a:solidFill>
                   <a:srgbClr val="1E293B"/>
                 </a:solidFill>
@@ -13297,9 +13297,9 @@
           <a:p>
             <a:pPr>
               <a:lnSpc>
-                <a:spcPct val="125000"/>
+                <a:spcPct val="120000"/>
               </a:lnSpc>
-              <a:defRPr sz="1050">
+              <a:defRPr sz="1200">
                 <a:solidFill>
                   <a:srgbClr val="475569"/>
                 </a:solidFill>
@@ -13351,7 +13351,7 @@
           <a:lstStyle/>
           <a:p>
             <a:pPr algn="ctr">
-              <a:defRPr sz="1200" b="1">
+              <a:defRPr sz="1350" b="1">
                 <a:solidFill>
                   <a:srgbClr val="FEF3C7"/>
                 </a:solidFill>

--- a/誰是文化王_備案簡報_Who_Is_Culture_King.pptx
+++ b/誰是文化王_備案簡報_Who_Is_Culture_King.pptx
@@ -6063,22 +6063,22 @@
           <a:lstStyle/>
           <a:p>
             <a:pPr algn="ctr">
+              <a:defRPr sz="1550" b="1">
+                <a:solidFill>
+                  <a:srgbClr val="0284C7"/>
+                </a:solidFill>
+              </a:defRPr>
+            </a:pPr>
+            <a:r>
+              <a:t>📍 全球首發 · 戰略客戶攤牌現場</a:t>
+            </a:r>
+          </a:p>
+          <a:p>
+            <a:pPr>
+              <a:spcBef>
+                <a:spcPts val="500"/>
+              </a:spcBef>
               <a:defRPr sz="1400" b="1">
-                <a:solidFill>
-                  <a:srgbClr val="0284C7"/>
-                </a:solidFill>
-              </a:defRPr>
-            </a:pPr>
-            <a:r>
-              <a:t>📍 全球首發 · 戰略客戶攤牌現場</a:t>
-            </a:r>
-          </a:p>
-          <a:p>
-            <a:pPr>
-              <a:spcBef>
-                <a:spcPts val="600"/>
-              </a:spcBef>
-              <a:defRPr sz="1300" b="1">
                 <a:solidFill>
                   <a:srgbClr val="1E293B"/>
                 </a:solidFill>
@@ -6093,7 +6093,7 @@
               <a:lnSpc>
                 <a:spcPct val="120000"/>
               </a:lnSpc>
-              <a:defRPr sz="1200">
+              <a:defRPr sz="1350">
                 <a:solidFill>
                   <a:srgbClr val="475569"/>
                 </a:solidFill>
@@ -6106,9 +6106,9 @@
           <a:p>
             <a:pPr>
               <a:spcBef>
-                <a:spcPts val="600"/>
+                <a:spcPts val="500"/>
               </a:spcBef>
-              <a:defRPr sz="1300" b="1">
+              <a:defRPr sz="1400" b="1">
                 <a:solidFill>
                   <a:srgbClr val="1E293B"/>
                 </a:solidFill>
@@ -6123,7 +6123,7 @@
               <a:lnSpc>
                 <a:spcPct val="120000"/>
               </a:lnSpc>
-              <a:defRPr sz="1200">
+              <a:defRPr sz="1350">
                 <a:solidFill>
                   <a:srgbClr val="475569"/>
                 </a:solidFill>
@@ -6136,9 +6136,9 @@
           <a:p>
             <a:pPr>
               <a:spcBef>
-                <a:spcPts val="600"/>
+                <a:spcPts val="500"/>
               </a:spcBef>
-              <a:defRPr sz="1300" b="1">
+              <a:defRPr sz="1400" b="1">
                 <a:solidFill>
                   <a:srgbClr val="1E293B"/>
                 </a:solidFill>
@@ -6153,7 +6153,7 @@
               <a:lnSpc>
                 <a:spcPct val="120000"/>
               </a:lnSpc>
-              <a:defRPr sz="1200">
+              <a:defRPr sz="1350">
                 <a:solidFill>
                   <a:srgbClr val="475569"/>
                 </a:solidFill>
@@ -6166,9 +6166,9 @@
           <a:p>
             <a:pPr>
               <a:spcBef>
-                <a:spcPts val="600"/>
+                <a:spcPts val="500"/>
               </a:spcBef>
-              <a:defRPr sz="1300" b="1">
+              <a:defRPr sz="1400" b="1">
                 <a:solidFill>
                   <a:srgbClr val="1E293B"/>
                 </a:solidFill>
@@ -6183,7 +6183,7 @@
               <a:lnSpc>
                 <a:spcPct val="120000"/>
               </a:lnSpc>
-              <a:defRPr sz="1200">
+              <a:defRPr sz="1350">
                 <a:solidFill>
                   <a:srgbClr val="475569"/>
                 </a:solidFill>
@@ -6203,8 +6203,8 @@
         </p:nvSpPr>
         <p:spPr>
           <a:xfrm>
-            <a:off x="5989320" y="5257800"/>
-            <a:ext cx="5468112" cy="1005840"/>
+            <a:off x="5989320" y="5212079"/>
+            <a:ext cx="5468112" cy="1051560"/>
           </a:xfrm>
           <a:prstGeom prst="roundRect">
             <a:avLst/>
@@ -6235,7 +6235,7 @@
           <a:lstStyle/>
           <a:p>
             <a:pPr algn="ctr">
-              <a:defRPr sz="1350" b="1">
+              <a:defRPr sz="1500" b="1">
                 <a:solidFill>
                   <a:srgbClr val="FEF3C7"/>
                 </a:solidFill>
@@ -10731,22 +10731,22 @@
           <a:lstStyle/>
           <a:p>
             <a:pPr algn="ctr">
+              <a:defRPr sz="1550" b="1">
+                <a:solidFill>
+                  <a:srgbClr val="0284C7"/>
+                </a:solidFill>
+              </a:defRPr>
+            </a:pPr>
+            <a:r>
+              <a:t>📍 海外併購 · 精密研發中心</a:t>
+            </a:r>
+          </a:p>
+          <a:p>
+            <a:pPr>
+              <a:spcBef>
+                <a:spcPts val="500"/>
+              </a:spcBef>
               <a:defRPr sz="1400" b="1">
-                <a:solidFill>
-                  <a:srgbClr val="0284C7"/>
-                </a:solidFill>
-              </a:defRPr>
-            </a:pPr>
-            <a:r>
-              <a:t>📍 海外併購 · 精密研發中心</a:t>
-            </a:r>
-          </a:p>
-          <a:p>
-            <a:pPr>
-              <a:spcBef>
-                <a:spcPts val="600"/>
-              </a:spcBef>
-              <a:defRPr sz="1300" b="1">
                 <a:solidFill>
                   <a:srgbClr val="1E293B"/>
                 </a:solidFill>
@@ -10761,7 +10761,7 @@
               <a:lnSpc>
                 <a:spcPct val="120000"/>
               </a:lnSpc>
-              <a:defRPr sz="1200">
+              <a:defRPr sz="1350">
                 <a:solidFill>
                   <a:srgbClr val="475569"/>
                 </a:solidFill>
@@ -10774,9 +10774,9 @@
           <a:p>
             <a:pPr>
               <a:spcBef>
-                <a:spcPts val="600"/>
+                <a:spcPts val="500"/>
               </a:spcBef>
-              <a:defRPr sz="1300" b="1">
+              <a:defRPr sz="1400" b="1">
                 <a:solidFill>
                   <a:srgbClr val="1E293B"/>
                 </a:solidFill>
@@ -10791,7 +10791,7 @@
               <a:lnSpc>
                 <a:spcPct val="120000"/>
               </a:lnSpc>
-              <a:defRPr sz="1200">
+              <a:defRPr sz="1350">
                 <a:solidFill>
                   <a:srgbClr val="475569"/>
                 </a:solidFill>
@@ -10804,9 +10804,9 @@
           <a:p>
             <a:pPr>
               <a:spcBef>
-                <a:spcPts val="600"/>
+                <a:spcPts val="500"/>
               </a:spcBef>
-              <a:defRPr sz="1300" b="1">
+              <a:defRPr sz="1400" b="1">
                 <a:solidFill>
                   <a:srgbClr val="1E293B"/>
                 </a:solidFill>
@@ -10821,7 +10821,7 @@
               <a:lnSpc>
                 <a:spcPct val="120000"/>
               </a:lnSpc>
-              <a:defRPr sz="1200">
+              <a:defRPr sz="1350">
                 <a:solidFill>
                   <a:srgbClr val="475569"/>
                 </a:solidFill>
@@ -10834,9 +10834,9 @@
           <a:p>
             <a:pPr>
               <a:spcBef>
-                <a:spcPts val="600"/>
+                <a:spcPts val="500"/>
               </a:spcBef>
-              <a:defRPr sz="1300" b="1">
+              <a:defRPr sz="1400" b="1">
                 <a:solidFill>
                   <a:srgbClr val="1E293B"/>
                 </a:solidFill>
@@ -10851,7 +10851,7 @@
               <a:lnSpc>
                 <a:spcPct val="120000"/>
               </a:lnSpc>
-              <a:defRPr sz="1200">
+              <a:defRPr sz="1350">
                 <a:solidFill>
                   <a:srgbClr val="475569"/>
                 </a:solidFill>
@@ -10871,8 +10871,8 @@
         </p:nvSpPr>
         <p:spPr>
           <a:xfrm>
-            <a:off x="5989320" y="5257800"/>
-            <a:ext cx="5468112" cy="1005840"/>
+            <a:off x="5989320" y="5212079"/>
+            <a:ext cx="5468112" cy="1051560"/>
           </a:xfrm>
           <a:prstGeom prst="roundRect">
             <a:avLst/>
@@ -10903,7 +10903,7 @@
           <a:lstStyle/>
           <a:p>
             <a:pPr algn="ctr">
-              <a:defRPr sz="1350" b="1">
+              <a:defRPr sz="1500" b="1">
                 <a:solidFill>
                   <a:srgbClr val="FEF3C7"/>
                 </a:solidFill>
@@ -11955,22 +11955,22 @@
           <a:lstStyle/>
           <a:p>
             <a:pPr algn="ctr">
+              <a:defRPr sz="1550" b="1">
+                <a:solidFill>
+                  <a:srgbClr val="0284C7"/>
+                </a:solidFill>
+              </a:defRPr>
+            </a:pPr>
+            <a:r>
+              <a:t>📍 海外量產 · 核心試產基地</a:t>
+            </a:r>
+          </a:p>
+          <a:p>
+            <a:pPr>
+              <a:spcBef>
+                <a:spcPts val="500"/>
+              </a:spcBef>
               <a:defRPr sz="1400" b="1">
-                <a:solidFill>
-                  <a:srgbClr val="0284C7"/>
-                </a:solidFill>
-              </a:defRPr>
-            </a:pPr>
-            <a:r>
-              <a:t>📍 海外量產 · 核心試產基地</a:t>
-            </a:r>
-          </a:p>
-          <a:p>
-            <a:pPr>
-              <a:spcBef>
-                <a:spcPts val="600"/>
-              </a:spcBef>
-              <a:defRPr sz="1300" b="1">
                 <a:solidFill>
                   <a:srgbClr val="1E293B"/>
                 </a:solidFill>
@@ -11985,7 +11985,7 @@
               <a:lnSpc>
                 <a:spcPct val="120000"/>
               </a:lnSpc>
-              <a:defRPr sz="1200">
+              <a:defRPr sz="1350">
                 <a:solidFill>
                   <a:srgbClr val="475569"/>
                 </a:solidFill>
@@ -11998,9 +11998,9 @@
           <a:p>
             <a:pPr>
               <a:spcBef>
-                <a:spcPts val="600"/>
+                <a:spcPts val="500"/>
               </a:spcBef>
-              <a:defRPr sz="1300" b="1">
+              <a:defRPr sz="1400" b="1">
                 <a:solidFill>
                   <a:srgbClr val="1E293B"/>
                 </a:solidFill>
@@ -12015,7 +12015,7 @@
               <a:lnSpc>
                 <a:spcPct val="120000"/>
               </a:lnSpc>
-              <a:defRPr sz="1200">
+              <a:defRPr sz="1350">
                 <a:solidFill>
                   <a:srgbClr val="475569"/>
                 </a:solidFill>
@@ -12028,9 +12028,9 @@
           <a:p>
             <a:pPr>
               <a:spcBef>
-                <a:spcPts val="600"/>
+                <a:spcPts val="500"/>
               </a:spcBef>
-              <a:defRPr sz="1300" b="1">
+              <a:defRPr sz="1400" b="1">
                 <a:solidFill>
                   <a:srgbClr val="1E293B"/>
                 </a:solidFill>
@@ -12045,7 +12045,7 @@
               <a:lnSpc>
                 <a:spcPct val="120000"/>
               </a:lnSpc>
-              <a:defRPr sz="1200">
+              <a:defRPr sz="1350">
                 <a:solidFill>
                   <a:srgbClr val="475569"/>
                 </a:solidFill>
@@ -12058,9 +12058,9 @@
           <a:p>
             <a:pPr>
               <a:spcBef>
-                <a:spcPts val="600"/>
+                <a:spcPts val="500"/>
               </a:spcBef>
-              <a:defRPr sz="1300" b="1">
+              <a:defRPr sz="1400" b="1">
                 <a:solidFill>
                   <a:srgbClr val="1E293B"/>
                 </a:solidFill>
@@ -12075,7 +12075,7 @@
               <a:lnSpc>
                 <a:spcPct val="120000"/>
               </a:lnSpc>
-              <a:defRPr sz="1200">
+              <a:defRPr sz="1350">
                 <a:solidFill>
                   <a:srgbClr val="475569"/>
                 </a:solidFill>
@@ -12095,8 +12095,8 @@
         </p:nvSpPr>
         <p:spPr>
           <a:xfrm>
-            <a:off x="5989320" y="5257800"/>
-            <a:ext cx="5468112" cy="1005840"/>
+            <a:off x="5989320" y="5212079"/>
+            <a:ext cx="5468112" cy="1051560"/>
           </a:xfrm>
           <a:prstGeom prst="roundRect">
             <a:avLst/>
@@ -12127,7 +12127,7 @@
           <a:lstStyle/>
           <a:p>
             <a:pPr algn="ctr">
-              <a:defRPr sz="1350" b="1">
+              <a:defRPr sz="1500" b="1">
                 <a:solidFill>
                   <a:srgbClr val="FEF3C7"/>
                 </a:solidFill>
@@ -13179,22 +13179,22 @@
           <a:lstStyle/>
           <a:p>
             <a:pPr algn="ctr">
+              <a:defRPr sz="1550" b="1">
+                <a:solidFill>
+                  <a:srgbClr val="0284C7"/>
+                </a:solidFill>
+              </a:defRPr>
+            </a:pPr>
+            <a:r>
+              <a:t>📍 新創研發 · 高速運算實驗室</a:t>
+            </a:r>
+          </a:p>
+          <a:p>
+            <a:pPr>
+              <a:spcBef>
+                <a:spcPts val="500"/>
+              </a:spcBef>
               <a:defRPr sz="1400" b="1">
-                <a:solidFill>
-                  <a:srgbClr val="0284C7"/>
-                </a:solidFill>
-              </a:defRPr>
-            </a:pPr>
-            <a:r>
-              <a:t>📍 新創研發 · 高速運算實驗室</a:t>
-            </a:r>
-          </a:p>
-          <a:p>
-            <a:pPr>
-              <a:spcBef>
-                <a:spcPts val="600"/>
-              </a:spcBef>
-              <a:defRPr sz="1300" b="1">
                 <a:solidFill>
                   <a:srgbClr val="1E293B"/>
                 </a:solidFill>
@@ -13209,7 +13209,7 @@
               <a:lnSpc>
                 <a:spcPct val="120000"/>
               </a:lnSpc>
-              <a:defRPr sz="1200">
+              <a:defRPr sz="1350">
                 <a:solidFill>
                   <a:srgbClr val="475569"/>
                 </a:solidFill>
@@ -13222,9 +13222,9 @@
           <a:p>
             <a:pPr>
               <a:spcBef>
-                <a:spcPts val="600"/>
+                <a:spcPts val="500"/>
               </a:spcBef>
-              <a:defRPr sz="1300" b="1">
+              <a:defRPr sz="1400" b="1">
                 <a:solidFill>
                   <a:srgbClr val="1E293B"/>
                 </a:solidFill>
@@ -13239,7 +13239,7 @@
               <a:lnSpc>
                 <a:spcPct val="120000"/>
               </a:lnSpc>
-              <a:defRPr sz="1200">
+              <a:defRPr sz="1350">
                 <a:solidFill>
                   <a:srgbClr val="475569"/>
                 </a:solidFill>
@@ -13252,9 +13252,9 @@
           <a:p>
             <a:pPr>
               <a:spcBef>
-                <a:spcPts val="600"/>
+                <a:spcPts val="500"/>
               </a:spcBef>
-              <a:defRPr sz="1300" b="1">
+              <a:defRPr sz="1400" b="1">
                 <a:solidFill>
                   <a:srgbClr val="1E293B"/>
                 </a:solidFill>
@@ -13269,7 +13269,7 @@
               <a:lnSpc>
                 <a:spcPct val="120000"/>
               </a:lnSpc>
-              <a:defRPr sz="1200">
+              <a:defRPr sz="1350">
                 <a:solidFill>
                   <a:srgbClr val="475569"/>
                 </a:solidFill>
@@ -13282,9 +13282,9 @@
           <a:p>
             <a:pPr>
               <a:spcBef>
-                <a:spcPts val="600"/>
+                <a:spcPts val="500"/>
               </a:spcBef>
-              <a:defRPr sz="1300" b="1">
+              <a:defRPr sz="1400" b="1">
                 <a:solidFill>
                   <a:srgbClr val="1E293B"/>
                 </a:solidFill>
@@ -13299,7 +13299,7 @@
               <a:lnSpc>
                 <a:spcPct val="120000"/>
               </a:lnSpc>
-              <a:defRPr sz="1200">
+              <a:defRPr sz="1350">
                 <a:solidFill>
                   <a:srgbClr val="475569"/>
                 </a:solidFill>
@@ -13319,8 +13319,8 @@
         </p:nvSpPr>
         <p:spPr>
           <a:xfrm>
-            <a:off x="5989320" y="5257800"/>
-            <a:ext cx="5468112" cy="1005840"/>
+            <a:off x="5989320" y="5212079"/>
+            <a:ext cx="5468112" cy="1051560"/>
           </a:xfrm>
           <a:prstGeom prst="roundRect">
             <a:avLst/>
@@ -13351,7 +13351,7 @@
           <a:lstStyle/>
           <a:p>
             <a:pPr algn="ctr">
-              <a:defRPr sz="1350" b="1">
+              <a:defRPr sz="1500" b="1">
                 <a:solidFill>
                   <a:srgbClr val="FEF3C7"/>
                 </a:solidFill>
